--- a/deliveries/week10/PresentationWeek10.pptx
+++ b/deliveries/week10/PresentationWeek10.pptx
@@ -509,7 +509,7 @@
           <a:p>
             <a:r>
               <a:rPr lang="en-US" dirty="0"/>
-              <a:t>5 minutos: problema, demo, decisiones, y las seis preguntas en las que queremos feedback.</a:t>
+              <a:t>5 minutos: problema y audiencia · demo · decisiones y alternativas · seis preguntas.</a:t>
             </a:r>
             <a:endParaRPr lang="en-US" dirty="0"/>
           </a:p>
@@ -597,7 +597,7 @@
           <a:p>
             <a:r>
               <a:rPr lang="en-US" dirty="0"/>
-              <a:t>El problema no es falta de datos: es el nivel de agregación con que se reportan.</a:t>
+              <a:t/>
             </a:r>
             <a:endParaRPr lang="en-US" dirty="0"/>
           </a:p>
@@ -685,7 +685,7 @@
           <a:p>
             <a:r>
               <a:rPr lang="en-US" dirty="0"/>
-              <a:t>Demo en vivo acá. Mostrar el hover y el zoom del mapa.</a:t>
+              <a:t>Demo en vivo: cargar la página, dejar que el pico se desdibuje, bajar con → al capítulo 2.</a:t>
             </a:r>
             <a:endParaRPr lang="en-US" dirty="0"/>
           </a:p>
@@ -773,7 +773,7 @@
           <a:p>
             <a:r>
               <a:rPr lang="en-US" dirty="0"/>
-              <a:t>Hacer el brush en vivo y después doble clic para limpiarlo.</a:t>
+              <a:t>Mostrar el capítulo 5 en vivo. Luego el botón "ver estas estaciones en el explorador".</a:t>
             </a:r>
             <a:endParaRPr lang="en-US" dirty="0"/>
           </a:p>
@@ -861,7 +861,7 @@
           <a:p>
             <a:r>
               <a:rPr lang="en-US" dirty="0"/>
-              <a:t>Si hay poco tiempo, contar solo la primera y la última fila.</a:t>
+              <a:t>Demo en vivo: clic en Parkchester o Yankee Stadium. Mostrar el aviso de estacionalidad.</a:t>
             </a:r>
             <a:endParaRPr lang="en-US" dirty="0"/>
           </a:p>
@@ -949,7 +949,7 @@
           <a:p>
             <a:r>
               <a:rPr lang="en-US" dirty="0"/>
-              <a:t>Esta es la diapositiva más importante del contenido analítico.</a:t>
+              <a:t>Si falta tiempo, contar solo las filas 1, 3 y 4.</a:t>
             </a:r>
             <a:endParaRPr lang="en-US" dirty="0"/>
           </a:p>
@@ -1037,7 +1037,7 @@
           <a:p>
             <a:r>
               <a:rPr lang="en-US" dirty="0"/>
-              <a:t>No esconder nada: el PDF pide explícitamente documentar lo incompleto.</a:t>
+              <a:t/>
             </a:r>
             <a:endParaRPr lang="en-US" dirty="0"/>
           </a:p>
@@ -1125,7 +1125,7 @@
           <a:p>
             <a:r>
               <a:rPr lang="en-US" dirty="0"/>
-              <a:t>Dejar esta diapositiva en pantalla mientras recibimos el feedback.</a:t>
+              <a:t>Dejar esta diapositiva en pantalla y anotar todo: la Semana 12 pide responder sugerencia por sugerencia.</a:t>
             </a:r>
             <a:endParaRPr lang="en-US" dirty="0"/>
           </a:p>
@@ -1546,8 +1546,8 @@
         </p:nvSpPr>
         <p:spPr>
           <a:xfrm>
-            <a:off x="822960" y="1965960"/>
-            <a:ext cx="10515600" cy="777240"/>
+            <a:off x="822960" y="1828800"/>
+            <a:ext cx="10515600" cy="822960"/>
           </a:xfrm>
           <a:prstGeom prst="rect">
             <a:avLst/>
@@ -1563,7 +1563,7 @@
               <a:buNone/>
             </a:pPr>
             <a:r>
-              <a:rPr lang="en-US" sz="3800" b="1" dirty="0">
+              <a:rPr lang="en-US" sz="4000" b="1" dirty="0">
                 <a:solidFill>
                   <a:srgbClr val="1B4F8C"/>
                 </a:solidFill>
@@ -1571,9 +1571,9 @@
                 <a:ea typeface="Calibri" pitchFamily="34" charset="-122"/>
                 <a:cs typeface="Calibri" pitchFamily="34" charset="-120"/>
               </a:rPr>
-              <a:t>Prototipo funcional</a:t>
-            </a:r>
-            <a:endParaRPr lang="en-US" sz="3800" dirty="0"/>
+              <a:t>La forma del día</a:t>
+            </a:r>
+            <a:endParaRPr lang="en-US" sz="4000" dirty="0"/>
           </a:p>
         </p:txBody>
       </p:sp>
@@ -1585,7 +1585,7 @@
         </p:nvSpPr>
         <p:spPr>
           <a:xfrm>
-            <a:off x="822960" y="2788920"/>
+            <a:off x="822960" y="2697480"/>
             <a:ext cx="10515600" cy="457200"/>
           </a:xfrm>
           <a:prstGeom prst="rect">
@@ -1610,7 +1610,7 @@
                 <a:ea typeface="Calibri" pitchFamily="34" charset="-122"/>
                 <a:cs typeface="Calibri" pitchFamily="34" charset="-120"/>
               </a:rPr>
-              <a:t>La forma del día · cómo cambió el ritmo horario del metro de Nueva York, 2020–2024</a:t>
+              <a:t>Cómo cambió el ritmo horario del metro de Nueva York, 2020–2024 — y quién no lo cambió</a:t>
             </a:r>
             <a:endParaRPr lang="en-US" sz="1700" dirty="0"/>
           </a:p>
@@ -1624,7 +1624,7 @@
         </p:nvSpPr>
         <p:spPr>
           <a:xfrm>
-            <a:off x="822960" y="3310128"/>
+            <a:off x="822960" y="3246120"/>
             <a:ext cx="10515600" cy="320040"/>
           </a:xfrm>
           <a:prstGeom prst="rect">
@@ -1649,7 +1649,7 @@
                 <a:ea typeface="Calibri" pitchFamily="34" charset="-122"/>
                 <a:cs typeface="Calibri" pitchFamily="34" charset="-120"/>
               </a:rPr>
-              <a:t>Design review · Semana 10</a:t>
+              <a:t>Prototipo funcional · design review · Semana 10</a:t>
             </a:r>
             <a:endParaRPr lang="en-US" sz="1400" dirty="0"/>
           </a:p>
@@ -1663,7 +1663,7 @@
         </p:nvSpPr>
         <p:spPr>
           <a:xfrm>
-            <a:off x="822960" y="3977640"/>
+            <a:off x="822960" y="3931920"/>
             <a:ext cx="10515600" cy="320040"/>
           </a:xfrm>
           <a:prstGeom prst="rect">
@@ -1834,7 +1834,7 @@
         <p:spPr>
           <a:xfrm>
             <a:off x="822960" y="1325880"/>
-            <a:ext cx="10515600" cy="1737360"/>
+            <a:ext cx="10515600" cy="2103120"/>
           </a:xfrm>
           <a:prstGeom prst="rect">
             <a:avLst/>
@@ -1851,7 +1851,7 @@
                 <a:spcPct val="105000"/>
               </a:lnSpc>
               <a:spcAft>
-                <a:spcPts val="900"/>
+                <a:spcPts val="800"/>
               </a:spcAft>
               <a:buSzPct val="100000"/>
               <a:buChar char="•"/>
@@ -1865,7 +1865,7 @@
                 <a:ea typeface="Calibri" pitchFamily="34" charset="-122"/>
                 <a:cs typeface="Calibri" pitchFamily="34" charset="-120"/>
               </a:rPr>
-              <a:t>El metro programa su servicio alrededor del doble pico del día laborable. Entre 2020 y 2024 esa forma cambió.</a:t>
+              <a:t>El metro se programa alrededor del doble pico del día laborable. Entre 2020 y 2024 esa forma cambió; la recuperación se reporta con un solo número que no dice a qué hora ni en qué barrios.</a:t>
             </a:r>
             <a:endParaRPr lang="en-US" sz="1600" dirty="0"/>
           </a:p>
@@ -1875,7 +1875,7 @@
                 <a:spcPct val="105000"/>
               </a:lnSpc>
               <a:spcAft>
-                <a:spcPts val="900"/>
+                <a:spcPts val="800"/>
               </a:spcAft>
               <a:buSzPct val="100000"/>
               <a:buChar char="•"/>
@@ -1889,7 +1889,7 @@
                 <a:ea typeface="Calibri" pitchFamily="34" charset="-122"/>
                 <a:cs typeface="Calibri" pitchFamily="34" charset="-120"/>
               </a:rPr>
-              <a:t>La recuperación se reporta con un solo número: dice cuánta demanda volvió, no a qué hora ni en qué estaciones.</a:t>
+              <a:t>Unidad de análisis: el perfil horario de cada estación, 24 × 7 = 168 valores normalizados por su total. Describe su ritmo, no su tamaño.</a:t>
             </a:r>
             <a:endParaRPr lang="en-US" sz="1600" dirty="0"/>
           </a:p>
@@ -1899,7 +1899,7 @@
                 <a:spcPct val="105000"/>
               </a:lnSpc>
               <a:spcAft>
-                <a:spcPts val="900"/>
+                <a:spcPts val="800"/>
               </a:spcAft>
               <a:buSzPct val="100000"/>
               <a:buChar char="•"/>
@@ -1913,7 +1913,7 @@
                 <a:ea typeface="Calibri" pitchFamily="34" charset="-122"/>
                 <a:cs typeface="Calibri" pitchFamily="34" charset="-120"/>
               </a:rPr>
-              <a:t>Nuestra unidad de análisis es el perfil horario semanal de cada estación: 168 valores normalizados por su propio total. Describe su ritmo, no su tamaño.</a:t>
+              <a:t>La pregunta cambió. Que el pico se aplanó ya se sabía. La pregunta es quién resistió y dónde.</a:t>
             </a:r>
             <a:endParaRPr lang="en-US" sz="1600" dirty="0"/>
           </a:p>
@@ -1927,8 +1927,8 @@
         </p:nvSpPr>
         <p:spPr>
           <a:xfrm>
-            <a:off x="822960" y="3291840"/>
-            <a:ext cx="5120640" cy="1920240"/>
+            <a:off x="822960" y="3566160"/>
+            <a:ext cx="5120640" cy="1737360"/>
           </a:xfrm>
           <a:prstGeom prst="rect">
             <a:avLst/>
@@ -1947,7 +1947,7 @@
         </p:nvSpPr>
         <p:spPr>
           <a:xfrm>
-            <a:off x="1097280" y="3474720"/>
+            <a:off x="1097280" y="3730752"/>
             <a:ext cx="4572000" cy="274320"/>
           </a:xfrm>
           <a:prstGeom prst="rect">
@@ -1986,8 +1986,8 @@
         </p:nvSpPr>
         <p:spPr>
           <a:xfrm>
-            <a:off x="1097280" y="3794760"/>
-            <a:ext cx="4572000" cy="411480"/>
+            <a:off x="1097280" y="4041648"/>
+            <a:ext cx="4572000" cy="731520"/>
           </a:xfrm>
           <a:prstGeom prst="rect">
             <a:avLst/>
@@ -2003,7 +2003,7 @@
               <a:buNone/>
             </a:pPr>
             <a:r>
-              <a:rPr lang="en-US" sz="1600" b="1" dirty="0">
+              <a:rPr lang="en-US" sz="1500" b="1" dirty="0">
                 <a:solidFill>
                   <a:srgbClr val="1A1A1A"/>
                 </a:solidFill>
@@ -2011,9 +2011,9 @@
                 <a:ea typeface="Calibri" pitchFamily="34" charset="-122"/>
                 <a:cs typeface="Calibri" pitchFamily="34" charset="-120"/>
               </a:rPr>
-              <a:t>Planificadores de servicio de la MTA</a:t>
-            </a:r>
-            <a:endParaRPr lang="en-US" sz="1600" dirty="0"/>
+              <a:t>Investigadores de transporte urbano, periodismo de datos, gobierno local</a:t>
+            </a:r>
+            <a:endParaRPr lang="en-US" sz="1500" dirty="0"/>
           </a:p>
         </p:txBody>
       </p:sp>
@@ -2025,8 +2025,8 @@
         </p:nvSpPr>
         <p:spPr>
           <a:xfrm>
-            <a:off x="1097280" y="4297680"/>
-            <a:ext cx="4572000" cy="640080"/>
+            <a:off x="1097280" y="4773168"/>
+            <a:ext cx="4572000" cy="502920"/>
           </a:xfrm>
           <a:prstGeom prst="rect">
             <a:avLst/>
@@ -2042,7 +2042,7 @@
               <a:buNone/>
             </a:pPr>
             <a:r>
-              <a:rPr lang="en-US" sz="1300" dirty="0">
+              <a:rPr lang="en-US" sz="1150" dirty="0">
                 <a:solidFill>
                   <a:srgbClr val="5A5A5A"/>
                 </a:solidFill>
@@ -2050,9 +2050,9 @@
                 <a:ea typeface="Calibri" pitchFamily="34" charset="-122"/>
                 <a:cs typeface="Calibri" pitchFamily="34" charset="-120"/>
               </a:rPr>
-              <a:t>Decisión que apoya: dónde reasignar frecuencia de servicio.</a:t>
-            </a:r>
-            <a:endParaRPr lang="en-US" sz="1300" dirty="0"/>
+              <a:t>Ya no "planificadores de la MTA": la MTA tiene datos internos muy superiores a las entradas públicas.</a:t>
+            </a:r>
+            <a:endParaRPr lang="en-US" sz="1150" dirty="0"/>
           </a:p>
         </p:txBody>
       </p:sp>
@@ -2064,8 +2064,8 @@
         </p:nvSpPr>
         <p:spPr>
           <a:xfrm>
-            <a:off x="6309360" y="3291840"/>
-            <a:ext cx="5029200" cy="1920240"/>
+            <a:off x="6309360" y="3566160"/>
+            <a:ext cx="5029200" cy="1737360"/>
           </a:xfrm>
           <a:prstGeom prst="rect">
             <a:avLst/>
@@ -2084,7 +2084,7 @@
         </p:nvSpPr>
         <p:spPr>
           <a:xfrm>
-            <a:off x="6583680" y="3474720"/>
+            <a:off x="6583680" y="3730752"/>
             <a:ext cx="4480560" cy="274320"/>
           </a:xfrm>
           <a:prstGeom prst="rect">
@@ -2109,7 +2109,7 @@
                 <a:ea typeface="Calibri" pitchFamily="34" charset="-122"/>
                 <a:cs typeface="Calibri" pitchFamily="34" charset="-120"/>
               </a:rPr>
-              <a:t>ESCALA</a:t>
+              <a:t>DATOS</a:t>
             </a:r>
             <a:endParaRPr lang="en-US" sz="1200" dirty="0"/>
           </a:p>
@@ -2123,7 +2123,7 @@
         </p:nvSpPr>
         <p:spPr>
           <a:xfrm>
-            <a:off x="6583680" y="3794760"/>
+            <a:off x="6583680" y="4041648"/>
             <a:ext cx="4480560" cy="457200"/>
           </a:xfrm>
           <a:prstGeom prst="rect">
@@ -2140,7 +2140,7 @@
               <a:buNone/>
             </a:pPr>
             <a:r>
-              <a:rPr lang="en-US" sz="1600" b="1" dirty="0">
+              <a:rPr lang="en-US" sz="1500" b="1" dirty="0">
                 <a:solidFill>
                   <a:srgbClr val="1A1A1A"/>
                 </a:solidFill>
@@ -2150,7 +2150,7 @@
               </a:rPr>
               <a:t>428 estaciones · 60 meses · 120 855 568 registros</a:t>
             </a:r>
-            <a:endParaRPr lang="en-US" sz="1600" dirty="0"/>
+            <a:endParaRPr lang="en-US" sz="1500" dirty="0"/>
           </a:p>
         </p:txBody>
       </p:sp>
@@ -2162,8 +2162,8 @@
         </p:nvSpPr>
         <p:spPr>
           <a:xfrm>
-            <a:off x="6583680" y="4343400"/>
-            <a:ext cx="4480560" cy="640080"/>
+            <a:off x="6583680" y="4553712"/>
+            <a:ext cx="4480560" cy="548640"/>
           </a:xfrm>
           <a:prstGeom prst="rect">
             <a:avLst/>
@@ -2179,7 +2179,7 @@
               <a:buNone/>
             </a:pPr>
             <a:r>
-              <a:rPr lang="en-US" sz="1300" dirty="0">
+              <a:rPr lang="en-US" sz="1150" dirty="0">
                 <a:solidFill>
                   <a:srgbClr val="5A5A5A"/>
                 </a:solidFill>
@@ -2187,9 +2187,9 @@
                 <a:ea typeface="Calibri" pitchFamily="34" charset="-122"/>
                 <a:cs typeface="Calibri" pitchFamily="34" charset="-120"/>
               </a:rPr>
-              <a:t>Agregados del lado del servidor con la API SODA; el navegador carga 1.4 MB.</a:t>
-            </a:r>
-            <a:endParaRPr lang="en-US" sz="1300" dirty="0"/>
+              <a:t>Agregados del lado del servidor con la API SODA. El navegador carga 1.6 MB.</a:t>
+            </a:r>
+            <a:endParaRPr lang="en-US" sz="1150" dirty="0"/>
           </a:p>
         </p:txBody>
       </p:sp>
@@ -2278,7 +2278,7 @@
                 <a:ea typeface="Calibri" pitchFamily="34" charset="-122"/>
                 <a:cs typeface="Calibri" pitchFamily="34" charset="-120"/>
               </a:rPr>
-              <a:t>El prototipo · cuatro vistas enlazadas</a:t>
+              <a:t>El prototipo: un argumento, no un dashboard</a:t>
             </a:r>
             <a:endParaRPr lang="en-US" sz="2400" dirty="0"/>
           </a:p>
@@ -2326,7 +2326,7 @@
       </p:sp>
       <p:pic>
         <p:nvPicPr>
-          <p:cNvPr id="6" name="Image 0" descr="/home/claude/w10/img/overview.png">    </p:cNvPr>
+          <p:cNvPr id="6" name="Image 0" descr="/home/claude/w10v2/capturas/01-inicio.png">    </p:cNvPr>
           <p:cNvPicPr>
             <a:picLocks noChangeAspect="1"/>
           </p:cNvPicPr>
@@ -2341,7 +2341,7 @@
         <p:spPr>
           <a:xfrm>
             <a:off x="566928" y="1097280"/>
-            <a:ext cx="6583680" cy="5541264"/>
+            <a:ext cx="6949440" cy="4343400"/>
           </a:xfrm>
           <a:prstGeom prst="rect">
             <a:avLst/>
@@ -2356,8 +2356,8 @@
         </p:nvSpPr>
         <p:spPr>
           <a:xfrm>
-            <a:off x="7452360" y="1325880"/>
-            <a:ext cx="384048" cy="320040"/>
+            <a:off x="7772400" y="1143000"/>
+            <a:ext cx="4114800" cy="274320"/>
           </a:xfrm>
           <a:prstGeom prst="rect">
             <a:avLst/>
@@ -2373,7 +2373,7 @@
               <a:buNone/>
             </a:pPr>
             <a:r>
-              <a:rPr lang="en-US" sz="2100" b="1" dirty="0">
+              <a:rPr lang="en-US" sz="1100" b="1" spc="100" kern="0" dirty="0">
                 <a:solidFill>
                   <a:srgbClr val="E07A16"/>
                 </a:solidFill>
@@ -2381,9 +2381,9 @@
                 <a:ea typeface="Calibri" pitchFamily="34" charset="-122"/>
                 <a:cs typeface="Calibri" pitchFamily="34" charset="-120"/>
               </a:rPr>
-              <a:t>A</a:t>
-            </a:r>
-            <a:endParaRPr lang="en-US" sz="2100" dirty="0"/>
+              <a:t>SIETE CAPÍTULOS + UN EXPLORADOR</a:t>
+            </a:r>
+            <a:endParaRPr lang="en-US" sz="1100" dirty="0"/>
           </a:p>
         </p:txBody>
       </p:sp>
@@ -2395,8 +2395,8 @@
         </p:nvSpPr>
         <p:spPr>
           <a:xfrm>
-            <a:off x="7936992" y="1362456"/>
-            <a:ext cx="3657600" cy="274320"/>
+            <a:off x="7772400" y="1481328"/>
+            <a:ext cx="320040" cy="320040"/>
           </a:xfrm>
           <a:prstGeom prst="rect">
             <a:avLst/>
@@ -2411,18 +2411,7 @@
             <a:pPr indent="0" marL="0">
               <a:buNone/>
             </a:pPr>
-            <a:r>
-              <a:rPr lang="en-US" sz="1600" b="1" dirty="0">
-                <a:solidFill>
-                  <a:srgbClr val="1B4F8C"/>
-                </a:solidFill>
-                <a:latin typeface="Calibri" pitchFamily="34" charset="0"/>
-                <a:ea typeface="Calibri" pitchFamily="34" charset="-122"/>
-                <a:cs typeface="Calibri" pitchFamily="34" charset="-120"/>
-              </a:rPr>
-              <a:t>Mapa</a:t>
-            </a:r>
-            <a:endParaRPr lang="en-US" sz="1600" dirty="0"/>
+            <a:endParaRPr lang="en-US" sz="1300" dirty="0"/>
           </a:p>
         </p:txBody>
       </p:sp>
@@ -2434,8 +2423,593 @@
         </p:nvSpPr>
         <p:spPr>
           <a:xfrm>
-            <a:off x="7936992" y="1691640"/>
-            <a:ext cx="3931920" cy="777240"/>
+            <a:off x="8092440" y="1481328"/>
+            <a:ext cx="3840480" cy="320040"/>
+          </a:xfrm>
+          <a:prstGeom prst="rect">
+            <a:avLst/>
+          </a:prstGeom>
+          <a:noFill/>
+          <a:ln/>
+        </p:spPr>
+        <p:txBody>
+          <a:bodyPr wrap="square" lIns="0" tIns="0" rIns="0" bIns="0" rtlCol="0" anchor="ctr"/>
+          <a:lstStyle/>
+          <a:p>
+            <a:pPr indent="0" marL="0">
+              <a:buNone/>
+            </a:pPr>
+            <a:r>
+              <a:rPr lang="en-US" sz="1300" dirty="0">
+                <a:solidFill>
+                  <a:srgbClr val="1A1A1A"/>
+                </a:solidFill>
+                <a:latin typeface="Calibri" pitchFamily="34" charset="0"/>
+                <a:ea typeface="Calibri" pitchFamily="34" charset="-122"/>
+                <a:cs typeface="Calibri" pitchFamily="34" charset="-120"/>
+              </a:rPr>
+              <a:t>La forma del día</a:t>
+            </a:r>
+            <a:endParaRPr lang="en-US" sz="1300" dirty="0"/>
+          </a:p>
+        </p:txBody>
+      </p:sp>
+      <p:sp>
+        <p:nvSpPr>
+          <p:cNvPr id="10" name="Text 7"/>
+          <p:cNvSpPr txBox="1"/>
+          <p:nvPr/>
+        </p:nvSpPr>
+        <p:spPr>
+          <a:xfrm>
+            <a:off x="7772400" y="1865376"/>
+            <a:ext cx="320040" cy="320040"/>
+          </a:xfrm>
+          <a:prstGeom prst="rect">
+            <a:avLst/>
+          </a:prstGeom>
+          <a:noFill/>
+          <a:ln/>
+        </p:spPr>
+        <p:txBody>
+          <a:bodyPr wrap="square" lIns="0" tIns="0" rIns="0" bIns="0" rtlCol="0" anchor="ctr"/>
+          <a:lstStyle/>
+          <a:p>
+            <a:pPr indent="0" marL="0">
+              <a:buNone/>
+            </a:pPr>
+            <a:r>
+              <a:rPr lang="en-US" sz="1300" b="1" dirty="0">
+                <a:solidFill>
+                  <a:srgbClr val="E07A16"/>
+                </a:solidFill>
+                <a:latin typeface="Calibri" pitchFamily="34" charset="0"/>
+                <a:ea typeface="Calibri" pitchFamily="34" charset="-122"/>
+                <a:cs typeface="Calibri" pitchFamily="34" charset="-120"/>
+              </a:rPr>
+              <a:t>1</a:t>
+            </a:r>
+            <a:endParaRPr lang="en-US" sz="1300" dirty="0"/>
+          </a:p>
+        </p:txBody>
+      </p:sp>
+      <p:sp>
+        <p:nvSpPr>
+          <p:cNvPr id="11" name="Text 8"/>
+          <p:cNvSpPr txBox="1"/>
+          <p:nvPr/>
+        </p:nvSpPr>
+        <p:spPr>
+          <a:xfrm>
+            <a:off x="8092440" y="1865376"/>
+            <a:ext cx="3840480" cy="320040"/>
+          </a:xfrm>
+          <a:prstGeom prst="rect">
+            <a:avLst/>
+          </a:prstGeom>
+          <a:noFill/>
+          <a:ln/>
+        </p:spPr>
+        <p:txBody>
+          <a:bodyPr wrap="square" lIns="0" tIns="0" rIns="0" bIns="0" rtlCol="0" anchor="ctr"/>
+          <a:lstStyle/>
+          <a:p>
+            <a:pPr indent="0" marL="0">
+              <a:buNone/>
+            </a:pPr>
+            <a:r>
+              <a:rPr lang="en-US" sz="1300" dirty="0">
+                <a:solidFill>
+                  <a:srgbClr val="1A1A1A"/>
+                </a:solidFill>
+                <a:latin typeface="Calibri" pitchFamily="34" charset="0"/>
+                <a:ea typeface="Calibri" pitchFamily="34" charset="-122"/>
+                <a:cs typeface="Calibri" pitchFamily="34" charset="-120"/>
+              </a:rPr>
+              <a:t>¿Cuánta gente volvió?</a:t>
+            </a:r>
+            <a:endParaRPr lang="en-US" sz="1300" dirty="0"/>
+          </a:p>
+        </p:txBody>
+      </p:sp>
+      <p:sp>
+        <p:nvSpPr>
+          <p:cNvPr id="12" name="Text 9"/>
+          <p:cNvSpPr txBox="1"/>
+          <p:nvPr/>
+        </p:nvSpPr>
+        <p:spPr>
+          <a:xfrm>
+            <a:off x="7772400" y="2249424"/>
+            <a:ext cx="320040" cy="320040"/>
+          </a:xfrm>
+          <a:prstGeom prst="rect">
+            <a:avLst/>
+          </a:prstGeom>
+          <a:noFill/>
+          <a:ln/>
+        </p:spPr>
+        <p:txBody>
+          <a:bodyPr wrap="square" lIns="0" tIns="0" rIns="0" bIns="0" rtlCol="0" anchor="ctr"/>
+          <a:lstStyle/>
+          <a:p>
+            <a:pPr indent="0" marL="0">
+              <a:buNone/>
+            </a:pPr>
+            <a:r>
+              <a:rPr lang="en-US" sz="1300" b="1" dirty="0">
+                <a:solidFill>
+                  <a:srgbClr val="E07A16"/>
+                </a:solidFill>
+                <a:latin typeface="Calibri" pitchFamily="34" charset="0"/>
+                <a:ea typeface="Calibri" pitchFamily="34" charset="-122"/>
+                <a:cs typeface="Calibri" pitchFamily="34" charset="-120"/>
+              </a:rPr>
+              <a:t>2</a:t>
+            </a:r>
+            <a:endParaRPr lang="en-US" sz="1300" dirty="0"/>
+          </a:p>
+        </p:txBody>
+      </p:sp>
+      <p:sp>
+        <p:nvSpPr>
+          <p:cNvPr id="13" name="Text 10"/>
+          <p:cNvSpPr txBox="1"/>
+          <p:nvPr/>
+        </p:nvSpPr>
+        <p:spPr>
+          <a:xfrm>
+            <a:off x="8092440" y="2249424"/>
+            <a:ext cx="3840480" cy="320040"/>
+          </a:xfrm>
+          <a:prstGeom prst="rect">
+            <a:avLst/>
+          </a:prstGeom>
+          <a:noFill/>
+          <a:ln/>
+        </p:spPr>
+        <p:txBody>
+          <a:bodyPr wrap="square" lIns="0" tIns="0" rIns="0" bIns="0" rtlCol="0" anchor="ctr"/>
+          <a:lstStyle/>
+          <a:p>
+            <a:pPr indent="0" marL="0">
+              <a:buNone/>
+            </a:pPr>
+            <a:r>
+              <a:rPr lang="en-US" sz="1300" dirty="0">
+                <a:solidFill>
+                  <a:srgbClr val="1A1A1A"/>
+                </a:solidFill>
+                <a:latin typeface="Calibri" pitchFamily="34" charset="0"/>
+                <a:ea typeface="Calibri" pitchFamily="34" charset="-122"/>
+                <a:cs typeface="Calibri" pitchFamily="34" charset="-120"/>
+              </a:rPr>
+              <a:t>¿Sigue existiendo el doble pico?</a:t>
+            </a:r>
+            <a:endParaRPr lang="en-US" sz="1300" dirty="0"/>
+          </a:p>
+        </p:txBody>
+      </p:sp>
+      <p:sp>
+        <p:nvSpPr>
+          <p:cNvPr id="14" name="Text 11"/>
+          <p:cNvSpPr txBox="1"/>
+          <p:nvPr/>
+        </p:nvSpPr>
+        <p:spPr>
+          <a:xfrm>
+            <a:off x="7772400" y="2633472"/>
+            <a:ext cx="320040" cy="320040"/>
+          </a:xfrm>
+          <a:prstGeom prst="rect">
+            <a:avLst/>
+          </a:prstGeom>
+          <a:noFill/>
+          <a:ln/>
+        </p:spPr>
+        <p:txBody>
+          <a:bodyPr wrap="square" lIns="0" tIns="0" rIns="0" bIns="0" rtlCol="0" anchor="ctr"/>
+          <a:lstStyle/>
+          <a:p>
+            <a:pPr indent="0" marL="0">
+              <a:buNone/>
+            </a:pPr>
+            <a:r>
+              <a:rPr lang="en-US" sz="1300" b="1" dirty="0">
+                <a:solidFill>
+                  <a:srgbClr val="E07A16"/>
+                </a:solidFill>
+                <a:latin typeface="Calibri" pitchFamily="34" charset="0"/>
+                <a:ea typeface="Calibri" pitchFamily="34" charset="-122"/>
+                <a:cs typeface="Calibri" pitchFamily="34" charset="-120"/>
+              </a:rPr>
+              <a:t>3</a:t>
+            </a:r>
+            <a:endParaRPr lang="en-US" sz="1300" dirty="0"/>
+          </a:p>
+        </p:txBody>
+      </p:sp>
+      <p:sp>
+        <p:nvSpPr>
+          <p:cNvPr id="15" name="Text 12"/>
+          <p:cNvSpPr txBox="1"/>
+          <p:nvPr/>
+        </p:nvSpPr>
+        <p:spPr>
+          <a:xfrm>
+            <a:off x="8092440" y="2633472"/>
+            <a:ext cx="3840480" cy="320040"/>
+          </a:xfrm>
+          <a:prstGeom prst="rect">
+            <a:avLst/>
+          </a:prstGeom>
+          <a:noFill/>
+          <a:ln/>
+        </p:spPr>
+        <p:txBody>
+          <a:bodyPr wrap="square" lIns="0" tIns="0" rIns="0" bIns="0" rtlCol="0" anchor="ctr"/>
+          <a:lstStyle/>
+          <a:p>
+            <a:pPr indent="0" marL="0">
+              <a:buNone/>
+            </a:pPr>
+            <a:r>
+              <a:rPr lang="en-US" sz="1300" dirty="0">
+                <a:solidFill>
+                  <a:srgbClr val="1A1A1A"/>
+                </a:solidFill>
+                <a:latin typeface="Calibri" pitchFamily="34" charset="0"/>
+                <a:ea typeface="Calibri" pitchFamily="34" charset="-122"/>
+                <a:cs typeface="Calibri" pitchFamily="34" charset="-120"/>
+              </a:rPr>
+              <a:t>¿Para qué se usa cada estación?</a:t>
+            </a:r>
+            <a:endParaRPr lang="en-US" sz="1300" dirty="0"/>
+          </a:p>
+        </p:txBody>
+      </p:sp>
+      <p:sp>
+        <p:nvSpPr>
+          <p:cNvPr id="16" name="Text 13"/>
+          <p:cNvSpPr txBox="1"/>
+          <p:nvPr/>
+        </p:nvSpPr>
+        <p:spPr>
+          <a:xfrm>
+            <a:off x="7772400" y="3017520"/>
+            <a:ext cx="320040" cy="320040"/>
+          </a:xfrm>
+          <a:prstGeom prst="rect">
+            <a:avLst/>
+          </a:prstGeom>
+          <a:noFill/>
+          <a:ln/>
+        </p:spPr>
+        <p:txBody>
+          <a:bodyPr wrap="square" lIns="0" tIns="0" rIns="0" bIns="0" rtlCol="0" anchor="ctr"/>
+          <a:lstStyle/>
+          <a:p>
+            <a:pPr indent="0" marL="0">
+              <a:buNone/>
+            </a:pPr>
+            <a:r>
+              <a:rPr lang="en-US" sz="1300" b="1" dirty="0">
+                <a:solidFill>
+                  <a:srgbClr val="E07A16"/>
+                </a:solidFill>
+                <a:latin typeface="Calibri" pitchFamily="34" charset="0"/>
+                <a:ea typeface="Calibri" pitchFamily="34" charset="-122"/>
+                <a:cs typeface="Calibri" pitchFamily="34" charset="-120"/>
+              </a:rPr>
+              <a:t>4</a:t>
+            </a:r>
+            <a:endParaRPr lang="en-US" sz="1300" dirty="0"/>
+          </a:p>
+        </p:txBody>
+      </p:sp>
+      <p:sp>
+        <p:nvSpPr>
+          <p:cNvPr id="17" name="Text 14"/>
+          <p:cNvSpPr txBox="1"/>
+          <p:nvPr/>
+        </p:nvSpPr>
+        <p:spPr>
+          <a:xfrm>
+            <a:off x="8092440" y="3017520"/>
+            <a:ext cx="3840480" cy="320040"/>
+          </a:xfrm>
+          <a:prstGeom prst="rect">
+            <a:avLst/>
+          </a:prstGeom>
+          <a:noFill/>
+          <a:ln/>
+        </p:spPr>
+        <p:txBody>
+          <a:bodyPr wrap="square" lIns="0" tIns="0" rIns="0" bIns="0" rtlCol="0" anchor="ctr"/>
+          <a:lstStyle/>
+          <a:p>
+            <a:pPr indent="0" marL="0">
+              <a:buNone/>
+            </a:pPr>
+            <a:r>
+              <a:rPr lang="en-US" sz="1300" dirty="0">
+                <a:solidFill>
+                  <a:srgbClr val="1A1A1A"/>
+                </a:solidFill>
+                <a:latin typeface="Calibri" pitchFamily="34" charset="0"/>
+                <a:ea typeface="Calibri" pitchFamily="34" charset="-122"/>
+                <a:cs typeface="Calibri" pitchFamily="34" charset="-120"/>
+              </a:rPr>
+              <a:t>¿Qué cambió más: cuánto o cómo?</a:t>
+            </a:r>
+            <a:endParaRPr lang="en-US" sz="1300" dirty="0"/>
+          </a:p>
+        </p:txBody>
+      </p:sp>
+      <p:sp>
+        <p:nvSpPr>
+          <p:cNvPr id="18" name="Text 15"/>
+          <p:cNvSpPr txBox="1"/>
+          <p:nvPr/>
+        </p:nvSpPr>
+        <p:spPr>
+          <a:xfrm>
+            <a:off x="7772400" y="3401568"/>
+            <a:ext cx="320040" cy="320040"/>
+          </a:xfrm>
+          <a:prstGeom prst="rect">
+            <a:avLst/>
+          </a:prstGeom>
+          <a:noFill/>
+          <a:ln/>
+        </p:spPr>
+        <p:txBody>
+          <a:bodyPr wrap="square" lIns="0" tIns="0" rIns="0" bIns="0" rtlCol="0" anchor="ctr"/>
+          <a:lstStyle/>
+          <a:p>
+            <a:pPr indent="0" marL="0">
+              <a:buNone/>
+            </a:pPr>
+            <a:r>
+              <a:rPr lang="en-US" sz="1300" b="1" dirty="0">
+                <a:solidFill>
+                  <a:srgbClr val="E07A16"/>
+                </a:solidFill>
+                <a:latin typeface="Calibri" pitchFamily="34" charset="0"/>
+                <a:ea typeface="Calibri" pitchFamily="34" charset="-122"/>
+                <a:cs typeface="Calibri" pitchFamily="34" charset="-120"/>
+              </a:rPr>
+              <a:t>5</a:t>
+            </a:r>
+            <a:endParaRPr lang="en-US" sz="1300" dirty="0"/>
+          </a:p>
+        </p:txBody>
+      </p:sp>
+      <p:sp>
+        <p:nvSpPr>
+          <p:cNvPr id="19" name="Text 16"/>
+          <p:cNvSpPr txBox="1"/>
+          <p:nvPr/>
+        </p:nvSpPr>
+        <p:spPr>
+          <a:xfrm>
+            <a:off x="8092440" y="3401568"/>
+            <a:ext cx="3840480" cy="320040"/>
+          </a:xfrm>
+          <a:prstGeom prst="rect">
+            <a:avLst/>
+          </a:prstGeom>
+          <a:noFill/>
+          <a:ln/>
+        </p:spPr>
+        <p:txBody>
+          <a:bodyPr wrap="square" lIns="0" tIns="0" rIns="0" bIns="0" rtlCol="0" anchor="ctr"/>
+          <a:lstStyle/>
+          <a:p>
+            <a:pPr indent="0" marL="0">
+              <a:buNone/>
+            </a:pPr>
+            <a:r>
+              <a:rPr lang="en-US" sz="1300" dirty="0">
+                <a:solidFill>
+                  <a:srgbClr val="1A1A1A"/>
+                </a:solidFill>
+                <a:latin typeface="Calibri" pitchFamily="34" charset="0"/>
+                <a:ea typeface="Calibri" pitchFamily="34" charset="-122"/>
+                <a:cs typeface="Calibri" pitchFamily="34" charset="-120"/>
+              </a:rPr>
+              <a:t>¿Por qué el Bronx?</a:t>
+            </a:r>
+            <a:endParaRPr lang="en-US" sz="1300" dirty="0"/>
+          </a:p>
+        </p:txBody>
+      </p:sp>
+      <p:sp>
+        <p:nvSpPr>
+          <p:cNvPr id="20" name="Text 17"/>
+          <p:cNvSpPr txBox="1"/>
+          <p:nvPr/>
+        </p:nvSpPr>
+        <p:spPr>
+          <a:xfrm>
+            <a:off x="7772400" y="3785616"/>
+            <a:ext cx="320040" cy="320040"/>
+          </a:xfrm>
+          <a:prstGeom prst="rect">
+            <a:avLst/>
+          </a:prstGeom>
+          <a:noFill/>
+          <a:ln/>
+        </p:spPr>
+        <p:txBody>
+          <a:bodyPr wrap="square" lIns="0" tIns="0" rIns="0" bIns="0" rtlCol="0" anchor="ctr"/>
+          <a:lstStyle/>
+          <a:p>
+            <a:pPr indent="0" marL="0">
+              <a:buNone/>
+            </a:pPr>
+            <a:r>
+              <a:rPr lang="en-US" sz="1300" b="1" dirty="0">
+                <a:solidFill>
+                  <a:srgbClr val="E07A16"/>
+                </a:solidFill>
+                <a:latin typeface="Calibri" pitchFamily="34" charset="0"/>
+                <a:ea typeface="Calibri" pitchFamily="34" charset="-122"/>
+                <a:cs typeface="Calibri" pitchFamily="34" charset="-120"/>
+              </a:rPr>
+              <a:t>6</a:t>
+            </a:r>
+            <a:endParaRPr lang="en-US" sz="1300" dirty="0"/>
+          </a:p>
+        </p:txBody>
+      </p:sp>
+      <p:sp>
+        <p:nvSpPr>
+          <p:cNvPr id="21" name="Text 18"/>
+          <p:cNvSpPr txBox="1"/>
+          <p:nvPr/>
+        </p:nvSpPr>
+        <p:spPr>
+          <a:xfrm>
+            <a:off x="8092440" y="3785616"/>
+            <a:ext cx="3840480" cy="320040"/>
+          </a:xfrm>
+          <a:prstGeom prst="rect">
+            <a:avLst/>
+          </a:prstGeom>
+          <a:noFill/>
+          <a:ln/>
+        </p:spPr>
+        <p:txBody>
+          <a:bodyPr wrap="square" lIns="0" tIns="0" rIns="0" bIns="0" rtlCol="0" anchor="ctr"/>
+          <a:lstStyle/>
+          <a:p>
+            <a:pPr indent="0" marL="0">
+              <a:buNone/>
+            </a:pPr>
+            <a:r>
+              <a:rPr lang="en-US" sz="1300" dirty="0">
+                <a:solidFill>
+                  <a:srgbClr val="1A1A1A"/>
+                </a:solidFill>
+                <a:latin typeface="Calibri" pitchFamily="34" charset="0"/>
+                <a:ea typeface="Calibri" pitchFamily="34" charset="-122"/>
+                <a:cs typeface="Calibri" pitchFamily="34" charset="-120"/>
+              </a:rPr>
+              <a:t>¿Quién dejó de comprar el abono?</a:t>
+            </a:r>
+            <a:endParaRPr lang="en-US" sz="1300" dirty="0"/>
+          </a:p>
+        </p:txBody>
+      </p:sp>
+      <p:sp>
+        <p:nvSpPr>
+          <p:cNvPr id="22" name="Text 19"/>
+          <p:cNvSpPr txBox="1"/>
+          <p:nvPr/>
+        </p:nvSpPr>
+        <p:spPr>
+          <a:xfrm>
+            <a:off x="7772400" y="4169664"/>
+            <a:ext cx="320040" cy="320040"/>
+          </a:xfrm>
+          <a:prstGeom prst="rect">
+            <a:avLst/>
+          </a:prstGeom>
+          <a:noFill/>
+          <a:ln/>
+        </p:spPr>
+        <p:txBody>
+          <a:bodyPr wrap="square" lIns="0" tIns="0" rIns="0" bIns="0" rtlCol="0" anchor="ctr"/>
+          <a:lstStyle/>
+          <a:p>
+            <a:pPr indent="0" marL="0">
+              <a:buNone/>
+            </a:pPr>
+            <a:r>
+              <a:rPr lang="en-US" sz="1300" b="1" dirty="0">
+                <a:solidFill>
+                  <a:srgbClr val="E07A16"/>
+                </a:solidFill>
+                <a:latin typeface="Calibri" pitchFamily="34" charset="0"/>
+                <a:ea typeface="Calibri" pitchFamily="34" charset="-122"/>
+                <a:cs typeface="Calibri" pitchFamily="34" charset="-120"/>
+              </a:rPr>
+              <a:t>7</a:t>
+            </a:r>
+            <a:endParaRPr lang="en-US" sz="1300" dirty="0"/>
+          </a:p>
+        </p:txBody>
+      </p:sp>
+      <p:sp>
+        <p:nvSpPr>
+          <p:cNvPr id="23" name="Text 20"/>
+          <p:cNvSpPr txBox="1"/>
+          <p:nvPr/>
+        </p:nvSpPr>
+        <p:spPr>
+          <a:xfrm>
+            <a:off x="8092440" y="4169664"/>
+            <a:ext cx="3840480" cy="320040"/>
+          </a:xfrm>
+          <a:prstGeom prst="rect">
+            <a:avLst/>
+          </a:prstGeom>
+          <a:noFill/>
+          <a:ln/>
+        </p:spPr>
+        <p:txBody>
+          <a:bodyPr wrap="square" lIns="0" tIns="0" rIns="0" bIns="0" rtlCol="0" anchor="ctr"/>
+          <a:lstStyle/>
+          <a:p>
+            <a:pPr indent="0" marL="0">
+              <a:buNone/>
+            </a:pPr>
+            <a:r>
+              <a:rPr lang="en-US" sz="1300" dirty="0">
+                <a:solidFill>
+                  <a:srgbClr val="1A1A1A"/>
+                </a:solidFill>
+                <a:latin typeface="Calibri" pitchFamily="34" charset="0"/>
+                <a:ea typeface="Calibri" pitchFamily="34" charset="-122"/>
+                <a:cs typeface="Calibri" pitchFamily="34" charset="-120"/>
+              </a:rPr>
+              <a:t>¿Qué no podemos afirmar?</a:t>
+            </a:r>
+            <a:endParaRPr lang="en-US" sz="1300" dirty="0"/>
+          </a:p>
+        </p:txBody>
+      </p:sp>
+      <p:sp>
+        <p:nvSpPr>
+          <p:cNvPr id="24" name="Text 21"/>
+          <p:cNvSpPr txBox="1"/>
+          <p:nvPr/>
+        </p:nvSpPr>
+        <p:spPr>
+          <a:xfrm>
+            <a:off x="7772400" y="4663440"/>
+            <a:ext cx="4114800" cy="1097280"/>
           </a:xfrm>
           <a:prstGeom prst="rect">
             <a:avLst/>
@@ -2454,7 +3028,7 @@
               <a:buNone/>
             </a:pPr>
             <a:r>
-              <a:rPr lang="en-US" sz="1300" dirty="0">
+              <a:rPr lang="en-US" sz="1150" dirty="0">
                 <a:solidFill>
                   <a:srgbClr val="5A5A5A"/>
                 </a:solidFill>
@@ -2462,19 +3036,38 @@
                 <a:ea typeface="Calibri" pitchFamily="34" charset="-122"/>
                 <a:cs typeface="Calibri" pitchFamily="34" charset="-120"/>
               </a:rPr>
-              <a:t>color = recuperación</a:t>
-            </a:r>
-            <a:endParaRPr lang="en-US" sz="1300" dirty="0"/>
-          </a:p>
-          <a:p>
-            <a:pPr indent="0" marL="0">
-              <a:lnSpc>
-                <a:spcPct val="110000"/>
-              </a:lnSpc>
-              <a:buNone/>
-            </a:pPr>
-            <a:r>
-              <a:rPr lang="en-US" sz="1300" dirty="0">
+              <a:t>Cada capítulo: una pregunta, el hallazgo como frase, el gráfico, cómo se mide, qué no demuestra, y un botón al explorador ya configurado.</a:t>
+            </a:r>
+            <a:endParaRPr lang="en-US" sz="1150" dirty="0"/>
+          </a:p>
+        </p:txBody>
+      </p:sp>
+      <p:sp>
+        <p:nvSpPr>
+          <p:cNvPr id="25" name="Text 22"/>
+          <p:cNvSpPr txBox="1"/>
+          <p:nvPr/>
+        </p:nvSpPr>
+        <p:spPr>
+          <a:xfrm>
+            <a:off x="822960" y="5989320"/>
+            <a:ext cx="10515600" cy="411480"/>
+          </a:xfrm>
+          <a:prstGeom prst="rect">
+            <a:avLst/>
+          </a:prstGeom>
+          <a:noFill/>
+          <a:ln/>
+        </p:spPr>
+        <p:txBody>
+          <a:bodyPr wrap="square" lIns="0" tIns="0" rIns="0" bIns="0" rtlCol="0" anchor="t"/>
+          <a:lstStyle/>
+          <a:p>
+            <a:pPr indent="0" marL="0">
+              <a:buNone/>
+            </a:pPr>
+            <a:r>
+              <a:rPr lang="en-US" sz="1300" i="1" dirty="0">
                 <a:solidFill>
                   <a:srgbClr val="5A5A5A"/>
                 </a:solidFill>
@@ -2482,427 +3075,7 @@
                 <a:ea typeface="Calibri" pitchFamily="34" charset="-122"/>
                 <a:cs typeface="Calibri" pitchFamily="34" charset="-120"/>
               </a:rPr>
-              <a:t>tamaño = entradas/día</a:t>
-            </a:r>
-            <a:endParaRPr lang="en-US" sz="1300" dirty="0"/>
-          </a:p>
-        </p:txBody>
-      </p:sp>
-      <p:sp>
-        <p:nvSpPr>
-          <p:cNvPr id="10" name="Text 7"/>
-          <p:cNvSpPr txBox="1"/>
-          <p:nvPr/>
-        </p:nvSpPr>
-        <p:spPr>
-          <a:xfrm>
-            <a:off x="7452360" y="2651760"/>
-            <a:ext cx="384048" cy="320040"/>
-          </a:xfrm>
-          <a:prstGeom prst="rect">
-            <a:avLst/>
-          </a:prstGeom>
-          <a:noFill/>
-          <a:ln/>
-        </p:spPr>
-        <p:txBody>
-          <a:bodyPr wrap="square" lIns="0" tIns="0" rIns="0" bIns="0" rtlCol="0" anchor="ctr"/>
-          <a:lstStyle/>
-          <a:p>
-            <a:pPr indent="0" marL="0">
-              <a:buNone/>
-            </a:pPr>
-            <a:r>
-              <a:rPr lang="en-US" sz="2100" b="1" dirty="0">
-                <a:solidFill>
-                  <a:srgbClr val="E07A16"/>
-                </a:solidFill>
-                <a:latin typeface="Calibri" pitchFamily="34" charset="0"/>
-                <a:ea typeface="Calibri" pitchFamily="34" charset="-122"/>
-                <a:cs typeface="Calibri" pitchFamily="34" charset="-120"/>
-              </a:rPr>
-              <a:t>B</a:t>
-            </a:r>
-            <a:endParaRPr lang="en-US" sz="2100" dirty="0"/>
-          </a:p>
-        </p:txBody>
-      </p:sp>
-      <p:sp>
-        <p:nvSpPr>
-          <p:cNvPr id="11" name="Text 8"/>
-          <p:cNvSpPr txBox="1"/>
-          <p:nvPr/>
-        </p:nvSpPr>
-        <p:spPr>
-          <a:xfrm>
-            <a:off x="7936992" y="2688336"/>
-            <a:ext cx="3657600" cy="274320"/>
-          </a:xfrm>
-          <a:prstGeom prst="rect">
-            <a:avLst/>
-          </a:prstGeom>
-          <a:noFill/>
-          <a:ln/>
-        </p:spPr>
-        <p:txBody>
-          <a:bodyPr wrap="square" lIns="0" tIns="0" rIns="0" bIns="0" rtlCol="0" anchor="ctr"/>
-          <a:lstStyle/>
-          <a:p>
-            <a:pPr indent="0" marL="0">
-              <a:buNone/>
-            </a:pPr>
-            <a:r>
-              <a:rPr lang="en-US" sz="1600" b="1" dirty="0">
-                <a:solidFill>
-                  <a:srgbClr val="1B4F8C"/>
-                </a:solidFill>
-                <a:latin typeface="Calibri" pitchFamily="34" charset="0"/>
-                <a:ea typeface="Calibri" pitchFamily="34" charset="-122"/>
-                <a:cs typeface="Calibri" pitchFamily="34" charset="-120"/>
-              </a:rPr>
-              <a:t>Perfiles semanales</a:t>
-            </a:r>
-            <a:endParaRPr lang="en-US" sz="1600" dirty="0"/>
-          </a:p>
-        </p:txBody>
-      </p:sp>
-      <p:sp>
-        <p:nvSpPr>
-          <p:cNvPr id="12" name="Text 9"/>
-          <p:cNvSpPr txBox="1"/>
-          <p:nvPr/>
-        </p:nvSpPr>
-        <p:spPr>
-          <a:xfrm>
-            <a:off x="7936992" y="3017520"/>
-            <a:ext cx="3931920" cy="777240"/>
-          </a:xfrm>
-          <a:prstGeom prst="rect">
-            <a:avLst/>
-          </a:prstGeom>
-          <a:noFill/>
-          <a:ln/>
-        </p:spPr>
-        <p:txBody>
-          <a:bodyPr wrap="square" lIns="0" tIns="0" rIns="0" bIns="0" rtlCol="0" anchor="t"/>
-          <a:lstStyle/>
-          <a:p>
-            <a:pPr indent="0" marL="0">
-              <a:lnSpc>
-                <a:spcPct val="110000"/>
-              </a:lnSpc>
-              <a:buNone/>
-            </a:pPr>
-            <a:r>
-              <a:rPr lang="en-US" sz="1300" dirty="0">
-                <a:solidFill>
-                  <a:srgbClr val="5A5A5A"/>
-                </a:solidFill>
-                <a:latin typeface="Calibri" pitchFamily="34" charset="0"/>
-                <a:ea typeface="Calibri" pitchFamily="34" charset="-122"/>
-                <a:cs typeface="Calibri" pitchFamily="34" charset="-120"/>
-              </a:rPr>
-              <a:t>área gris = ene–feb 2020</a:t>
-            </a:r>
-            <a:endParaRPr lang="en-US" sz="1300" dirty="0"/>
-          </a:p>
-          <a:p>
-            <a:pPr indent="0" marL="0">
-              <a:lnSpc>
-                <a:spcPct val="110000"/>
-              </a:lnSpc>
-              <a:buNone/>
-            </a:pPr>
-            <a:r>
-              <a:rPr lang="en-US" sz="1300" dirty="0">
-                <a:solidFill>
-                  <a:srgbClr val="5A5A5A"/>
-                </a:solidFill>
-                <a:latin typeface="Calibri" pitchFamily="34" charset="0"/>
-                <a:ea typeface="Calibri" pitchFamily="34" charset="-122"/>
-                <a:cs typeface="Calibri" pitchFamily="34" charset="-120"/>
-              </a:rPr>
-              <a:t>línea azul = 2024</a:t>
-            </a:r>
-            <a:endParaRPr lang="en-US" sz="1300" dirty="0"/>
-          </a:p>
-        </p:txBody>
-      </p:sp>
-      <p:sp>
-        <p:nvSpPr>
-          <p:cNvPr id="13" name="Text 10"/>
-          <p:cNvSpPr txBox="1"/>
-          <p:nvPr/>
-        </p:nvSpPr>
-        <p:spPr>
-          <a:xfrm>
-            <a:off x="7452360" y="3977640"/>
-            <a:ext cx="384048" cy="320040"/>
-          </a:xfrm>
-          <a:prstGeom prst="rect">
-            <a:avLst/>
-          </a:prstGeom>
-          <a:noFill/>
-          <a:ln/>
-        </p:spPr>
-        <p:txBody>
-          <a:bodyPr wrap="square" lIns="0" tIns="0" rIns="0" bIns="0" rtlCol="0" anchor="ctr"/>
-          <a:lstStyle/>
-          <a:p>
-            <a:pPr indent="0" marL="0">
-              <a:buNone/>
-            </a:pPr>
-            <a:r>
-              <a:rPr lang="en-US" sz="2100" b="1" dirty="0">
-                <a:solidFill>
-                  <a:srgbClr val="E07A16"/>
-                </a:solidFill>
-                <a:latin typeface="Calibri" pitchFamily="34" charset="0"/>
-                <a:ea typeface="Calibri" pitchFamily="34" charset="-122"/>
-                <a:cs typeface="Calibri" pitchFamily="34" charset="-120"/>
-              </a:rPr>
-              <a:t>D</a:t>
-            </a:r>
-            <a:endParaRPr lang="en-US" sz="2100" dirty="0"/>
-          </a:p>
-        </p:txBody>
-      </p:sp>
-      <p:sp>
-        <p:nvSpPr>
-          <p:cNvPr id="14" name="Text 11"/>
-          <p:cNvSpPr txBox="1"/>
-          <p:nvPr/>
-        </p:nvSpPr>
-        <p:spPr>
-          <a:xfrm>
-            <a:off x="7936992" y="4014216"/>
-            <a:ext cx="3657600" cy="274320"/>
-          </a:xfrm>
-          <a:prstGeom prst="rect">
-            <a:avLst/>
-          </a:prstGeom>
-          <a:noFill/>
-          <a:ln/>
-        </p:spPr>
-        <p:txBody>
-          <a:bodyPr wrap="square" lIns="0" tIns="0" rIns="0" bIns="0" rtlCol="0" anchor="ctr"/>
-          <a:lstStyle/>
-          <a:p>
-            <a:pPr indent="0" marL="0">
-              <a:buNone/>
-            </a:pPr>
-            <a:r>
-              <a:rPr lang="en-US" sz="1600" b="1" dirty="0">
-                <a:solidFill>
-                  <a:srgbClr val="1B4F8C"/>
-                </a:solidFill>
-                <a:latin typeface="Calibri" pitchFamily="34" charset="0"/>
-                <a:ea typeface="Calibri" pitchFamily="34" charset="-122"/>
-                <a:cs typeface="Calibri" pitchFamily="34" charset="-120"/>
-              </a:rPr>
-              <a:t>Pico/valle</a:t>
-            </a:r>
-            <a:endParaRPr lang="en-US" sz="1600" dirty="0"/>
-          </a:p>
-        </p:txBody>
-      </p:sp>
-      <p:sp>
-        <p:nvSpPr>
-          <p:cNvPr id="15" name="Text 12"/>
-          <p:cNvSpPr txBox="1"/>
-          <p:nvPr/>
-        </p:nvSpPr>
-        <p:spPr>
-          <a:xfrm>
-            <a:off x="7936992" y="4343400"/>
-            <a:ext cx="3931920" cy="777240"/>
-          </a:xfrm>
-          <a:prstGeom prst="rect">
-            <a:avLst/>
-          </a:prstGeom>
-          <a:noFill/>
-          <a:ln/>
-        </p:spPr>
-        <p:txBody>
-          <a:bodyPr wrap="square" lIns="0" tIns="0" rIns="0" bIns="0" rtlCol="0" anchor="t"/>
-          <a:lstStyle/>
-          <a:p>
-            <a:pPr indent="0" marL="0">
-              <a:lnSpc>
-                <a:spcPct val="110000"/>
-              </a:lnSpc>
-              <a:buNone/>
-            </a:pPr>
-            <a:r>
-              <a:rPr lang="en-US" sz="1300" dirty="0">
-                <a:solidFill>
-                  <a:srgbClr val="5A5A5A"/>
-                </a:solidFill>
-                <a:latin typeface="Calibri" pitchFamily="34" charset="0"/>
-                <a:ea typeface="Calibri" pitchFamily="34" charset="-122"/>
-                <a:cs typeface="Calibri" pitchFamily="34" charset="-120"/>
-              </a:rPr>
-              <a:t>antes (x) contra después (y)</a:t>
-            </a:r>
-            <a:endParaRPr lang="en-US" sz="1300" dirty="0"/>
-          </a:p>
-          <a:p>
-            <a:pPr indent="0" marL="0">
-              <a:lnSpc>
-                <a:spcPct val="110000"/>
-              </a:lnSpc>
-              <a:buNone/>
-            </a:pPr>
-            <a:r>
-              <a:rPr lang="en-US" sz="1300" dirty="0">
-                <a:solidFill>
-                  <a:srgbClr val="5A5A5A"/>
-                </a:solidFill>
-                <a:latin typeface="Calibri" pitchFamily="34" charset="0"/>
-                <a:ea typeface="Calibri" pitchFamily="34" charset="-122"/>
-                <a:cs typeface="Calibri" pitchFamily="34" charset="-120"/>
-              </a:rPr>
-              <a:t>bajo la diagonal = se aplanó</a:t>
-            </a:r>
-            <a:endParaRPr lang="en-US" sz="1300" dirty="0"/>
-          </a:p>
-        </p:txBody>
-      </p:sp>
-      <p:sp>
-        <p:nvSpPr>
-          <p:cNvPr id="16" name="Text 13"/>
-          <p:cNvSpPr txBox="1"/>
-          <p:nvPr/>
-        </p:nvSpPr>
-        <p:spPr>
-          <a:xfrm>
-            <a:off x="7452360" y="5303520"/>
-            <a:ext cx="384048" cy="320040"/>
-          </a:xfrm>
-          <a:prstGeom prst="rect">
-            <a:avLst/>
-          </a:prstGeom>
-          <a:noFill/>
-          <a:ln/>
-        </p:spPr>
-        <p:txBody>
-          <a:bodyPr wrap="square" lIns="0" tIns="0" rIns="0" bIns="0" rtlCol="0" anchor="ctr"/>
-          <a:lstStyle/>
-          <a:p>
-            <a:pPr indent="0" marL="0">
-              <a:buNone/>
-            </a:pPr>
-            <a:r>
-              <a:rPr lang="en-US" sz="2100" b="1" dirty="0">
-                <a:solidFill>
-                  <a:srgbClr val="E07A16"/>
-                </a:solidFill>
-                <a:latin typeface="Calibri" pitchFamily="34" charset="0"/>
-                <a:ea typeface="Calibri" pitchFamily="34" charset="-122"/>
-                <a:cs typeface="Calibri" pitchFamily="34" charset="-120"/>
-              </a:rPr>
-              <a:t>C</a:t>
-            </a:r>
-            <a:endParaRPr lang="en-US" sz="2100" dirty="0"/>
-          </a:p>
-        </p:txBody>
-      </p:sp>
-      <p:sp>
-        <p:nvSpPr>
-          <p:cNvPr id="17" name="Text 14"/>
-          <p:cNvSpPr txBox="1"/>
-          <p:nvPr/>
-        </p:nvSpPr>
-        <p:spPr>
-          <a:xfrm>
-            <a:off x="7936992" y="5340096"/>
-            <a:ext cx="3657600" cy="274320"/>
-          </a:xfrm>
-          <a:prstGeom prst="rect">
-            <a:avLst/>
-          </a:prstGeom>
-          <a:noFill/>
-          <a:ln/>
-        </p:spPr>
-        <p:txBody>
-          <a:bodyPr wrap="square" lIns="0" tIns="0" rIns="0" bIns="0" rtlCol="0" anchor="ctr"/>
-          <a:lstStyle/>
-          <a:p>
-            <a:pPr indent="0" marL="0">
-              <a:buNone/>
-            </a:pPr>
-            <a:r>
-              <a:rPr lang="en-US" sz="1600" b="1" dirty="0">
-                <a:solidFill>
-                  <a:srgbClr val="1B4F8C"/>
-                </a:solidFill>
-                <a:latin typeface="Calibri" pitchFamily="34" charset="0"/>
-                <a:ea typeface="Calibri" pitchFamily="34" charset="-122"/>
-                <a:cs typeface="Calibri" pitchFamily="34" charset="-120"/>
-              </a:rPr>
-              <a:t>Serie del sistema</a:t>
-            </a:r>
-            <a:endParaRPr lang="en-US" sz="1600" dirty="0"/>
-          </a:p>
-        </p:txBody>
-      </p:sp>
-      <p:sp>
-        <p:nvSpPr>
-          <p:cNvPr id="18" name="Text 15"/>
-          <p:cNvSpPr txBox="1"/>
-          <p:nvPr/>
-        </p:nvSpPr>
-        <p:spPr>
-          <a:xfrm>
-            <a:off x="7936992" y="5669280"/>
-            <a:ext cx="3931920" cy="777240"/>
-          </a:xfrm>
-          <a:prstGeom prst="rect">
-            <a:avLst/>
-          </a:prstGeom>
-          <a:noFill/>
-          <a:ln/>
-        </p:spPr>
-        <p:txBody>
-          <a:bodyPr wrap="square" lIns="0" tIns="0" rIns="0" bIns="0" rtlCol="0" anchor="t"/>
-          <a:lstStyle/>
-          <a:p>
-            <a:pPr indent="0" marL="0">
-              <a:lnSpc>
-                <a:spcPct val="110000"/>
-              </a:lnSpc>
-              <a:buNone/>
-            </a:pPr>
-            <a:r>
-              <a:rPr lang="en-US" sz="1300" dirty="0">
-                <a:solidFill>
-                  <a:srgbClr val="5A5A5A"/>
-                </a:solidFill>
-                <a:latin typeface="Calibri" pitchFamily="34" charset="0"/>
-                <a:ea typeface="Calibri" pitchFamily="34" charset="-122"/>
-                <a:cs typeface="Calibri" pitchFamily="34" charset="-120"/>
-              </a:rPr>
-              <a:t>60 meses, con el nivel</a:t>
-            </a:r>
-            <a:endParaRPr lang="en-US" sz="1300" dirty="0"/>
-          </a:p>
-          <a:p>
-            <a:pPr indent="0" marL="0">
-              <a:lnSpc>
-                <a:spcPct val="110000"/>
-              </a:lnSpc>
-              <a:buNone/>
-            </a:pPr>
-            <a:r>
-              <a:rPr lang="en-US" sz="1300" dirty="0">
-                <a:solidFill>
-                  <a:srgbClr val="5A5A5A"/>
-                </a:solidFill>
-                <a:latin typeface="Calibri" pitchFamily="34" charset="0"/>
-                <a:ea typeface="Calibri" pitchFamily="34" charset="-122"/>
-                <a:cs typeface="Calibri" pitchFamily="34" charset="-120"/>
-              </a:rPr>
-              <a:t>de enero 2020 de referencia</a:t>
+              <a:t>Los hallazgos los genera build_model.py desde los datos. Dos son negativos: lo que los datos no sostienen.</a:t>
             </a:r>
             <a:endParaRPr lang="en-US" sz="1300" dirty="0"/>
           </a:p>
@@ -2993,7 +3166,7 @@
                 <a:ea typeface="Calibri" pitchFamily="34" charset="-122"/>
                 <a:cs typeface="Calibri" pitchFamily="34" charset="-120"/>
               </a:rPr>
-              <a:t>La interacción: una selección filtra todo</a:t>
+              <a:t>El hallazgo: el Bronx</a:t>
             </a:r>
             <a:endParaRPr lang="en-US" sz="2400" dirty="0"/>
           </a:p>
@@ -3041,7 +3214,7 @@
       </p:sp>
       <p:pic>
         <p:nvPicPr>
-          <p:cNvPr id="6" name="Image 0" descr="/home/claude/w10/img/brush.png">    </p:cNvPr>
+          <p:cNvPr id="6" name="Image 0" descr="/home/claude/w10v2/capturas/06-bronx.png">    </p:cNvPr>
           <p:cNvPicPr>
             <a:picLocks noChangeAspect="1"/>
           </p:cNvPicPr>
@@ -3056,7 +3229,7 @@
         <p:spPr>
           <a:xfrm>
             <a:off x="566928" y="1097280"/>
-            <a:ext cx="6583680" cy="5541264"/>
+            <a:ext cx="6949440" cy="4343400"/>
           </a:xfrm>
           <a:prstGeom prst="rect">
             <a:avLst/>
@@ -3071,8 +3244,8 @@
         </p:nvSpPr>
         <p:spPr>
           <a:xfrm>
-            <a:off x="7452360" y="1325880"/>
-            <a:ext cx="3931920" cy="36576"/>
+            <a:off x="7772400" y="1188720"/>
+            <a:ext cx="4114800" cy="36576"/>
           </a:xfrm>
           <a:prstGeom prst="rect">
             <a:avLst/>
@@ -3091,8 +3264,8 @@
         </p:nvSpPr>
         <p:spPr>
           <a:xfrm>
-            <a:off x="7452360" y="1536192"/>
-            <a:ext cx="4114800" cy="914400"/>
+            <a:off x="7772400" y="1371600"/>
+            <a:ext cx="4114800" cy="1097280"/>
           </a:xfrm>
           <a:prstGeom prst="rect">
             <a:avLst/>
@@ -3111,7 +3284,7 @@
               <a:buNone/>
             </a:pPr>
             <a:r>
-              <a:rPr lang="en-US" sz="1500" dirty="0">
+              <a:rPr lang="en-US" sz="1500" b="1" dirty="0">
                 <a:solidFill>
                   <a:srgbClr val="1A1A1A"/>
                 </a:solidFill>
@@ -3119,7 +3292,7 @@
                 <a:ea typeface="Calibri" pitchFamily="34" charset="-122"/>
                 <a:cs typeface="Calibri" pitchFamily="34" charset="-120"/>
               </a:rPr>
-              <a:t>Un brush sobre la dispersión selecciona las estaciones de pico bajo en ambos períodos.</a:t>
+              <a:t>Perdió más pasajeros que nadie y es el único borough donde el día no cambió de forma.</a:t>
             </a:r>
             <a:endParaRPr lang="en-US" sz="1500" dirty="0"/>
           </a:p>
@@ -3128,13 +3301,810 @@
       <p:sp>
         <p:nvSpPr>
           <p:cNvPr id="9" name="Text 6"/>
-          <p:cNvSpPr txBox="1"/>
-          <p:nvPr/>
-        </p:nvSpPr>
-        <p:spPr>
-          <a:xfrm>
-            <a:off x="7452360" y="2606040"/>
-            <a:ext cx="4114800" cy="548640"/>
+          <p:cNvSpPr/>
+          <p:nvPr/>
+        </p:nvSpPr>
+        <p:spPr>
+          <a:xfrm>
+            <a:off x="7772400" y="2560320"/>
+            <a:ext cx="91440" cy="91440"/>
+          </a:xfrm>
+          <a:prstGeom prst="rect">
+            <a:avLst/>
+          </a:prstGeom>
+          <a:noFill/>
+          <a:ln/>
+        </p:spPr>
+        <p:txBody>
+          <a:bodyPr wrap="square" rtlCol="0" anchor="ctr"/>
+          <a:lstStyle/>
+          <a:p>
+            <a:pPr indent="0" marL="0">
+              <a:buNone/>
+            </a:pPr>
+            <a:endParaRPr lang="en-US" dirty="0"/>
+          </a:p>
+        </p:txBody>
+      </p:sp>
+      <p:sp>
+        <p:nvSpPr>
+          <p:cNvPr id="10" name="Text 7"/>
+          <p:cNvSpPr txBox="1"/>
+          <p:nvPr/>
+        </p:nvSpPr>
+        <p:spPr>
+          <a:xfrm>
+            <a:off x="7772400" y="2606040"/>
+            <a:ext cx="1280160" cy="274320"/>
+          </a:xfrm>
+          <a:prstGeom prst="rect">
+            <a:avLst/>
+          </a:prstGeom>
+          <a:noFill/>
+          <a:ln/>
+        </p:spPr>
+        <p:txBody>
+          <a:bodyPr wrap="square" lIns="0" tIns="0" rIns="0" bIns="0" rtlCol="0" anchor="ctr"/>
+          <a:lstStyle/>
+          <a:p>
+            <a:pPr algn="l" indent="0" marL="0">
+              <a:buNone/>
+            </a:pPr>
+            <a:endParaRPr lang="en-US" sz="1050" dirty="0"/>
+          </a:p>
+        </p:txBody>
+      </p:sp>
+      <p:sp>
+        <p:nvSpPr>
+          <p:cNvPr id="11" name="Text 8"/>
+          <p:cNvSpPr txBox="1"/>
+          <p:nvPr/>
+        </p:nvSpPr>
+        <p:spPr>
+          <a:xfrm>
+            <a:off x="9052560" y="2606040"/>
+            <a:ext cx="1005840" cy="274320"/>
+          </a:xfrm>
+          <a:prstGeom prst="rect">
+            <a:avLst/>
+          </a:prstGeom>
+          <a:noFill/>
+          <a:ln/>
+        </p:spPr>
+        <p:txBody>
+          <a:bodyPr wrap="square" lIns="0" tIns="0" rIns="0" bIns="0" rtlCol="0" anchor="ctr"/>
+          <a:lstStyle/>
+          <a:p>
+            <a:pPr algn="r" indent="0" marL="0">
+              <a:buNone/>
+            </a:pPr>
+            <a:r>
+              <a:rPr lang="en-US" sz="1050" dirty="0">
+                <a:solidFill>
+                  <a:srgbClr val="5A5A5A"/>
+                </a:solidFill>
+                <a:latin typeface="Calibri" pitchFamily="34" charset="0"/>
+                <a:ea typeface="Calibri" pitchFamily="34" charset="-122"/>
+                <a:cs typeface="Calibri" pitchFamily="34" charset="-120"/>
+              </a:rPr>
+              <a:t>recup.</a:t>
+            </a:r>
+            <a:endParaRPr lang="en-US" sz="1050" dirty="0"/>
+          </a:p>
+        </p:txBody>
+      </p:sp>
+      <p:sp>
+        <p:nvSpPr>
+          <p:cNvPr id="12" name="Text 9"/>
+          <p:cNvSpPr txBox="1"/>
+          <p:nvPr/>
+        </p:nvSpPr>
+        <p:spPr>
+          <a:xfrm>
+            <a:off x="10058400" y="2606040"/>
+            <a:ext cx="822960" cy="274320"/>
+          </a:xfrm>
+          <a:prstGeom prst="rect">
+            <a:avLst/>
+          </a:prstGeom>
+          <a:noFill/>
+          <a:ln/>
+        </p:spPr>
+        <p:txBody>
+          <a:bodyPr wrap="square" lIns="0" tIns="0" rIns="0" bIns="0" rtlCol="0" anchor="ctr"/>
+          <a:lstStyle/>
+          <a:p>
+            <a:pPr algn="r" indent="0" marL="0">
+              <a:buNone/>
+            </a:pPr>
+            <a:r>
+              <a:rPr lang="en-US" sz="1050" dirty="0">
+                <a:solidFill>
+                  <a:srgbClr val="5A5A5A"/>
+                </a:solidFill>
+                <a:latin typeface="Calibri" pitchFamily="34" charset="0"/>
+                <a:ea typeface="Calibri" pitchFamily="34" charset="-122"/>
+                <a:cs typeface="Calibri" pitchFamily="34" charset="-120"/>
+              </a:rPr>
+              <a:t>pico</a:t>
+            </a:r>
+            <a:endParaRPr lang="en-US" sz="1050" dirty="0"/>
+          </a:p>
+        </p:txBody>
+      </p:sp>
+      <p:sp>
+        <p:nvSpPr>
+          <p:cNvPr id="13" name="Text 10"/>
+          <p:cNvSpPr txBox="1"/>
+          <p:nvPr/>
+        </p:nvSpPr>
+        <p:spPr>
+          <a:xfrm>
+            <a:off x="10881360" y="2606040"/>
+            <a:ext cx="1188720" cy="274320"/>
+          </a:xfrm>
+          <a:prstGeom prst="rect">
+            <a:avLst/>
+          </a:prstGeom>
+          <a:noFill/>
+          <a:ln/>
+        </p:spPr>
+        <p:txBody>
+          <a:bodyPr wrap="square" lIns="0" tIns="0" rIns="0" bIns="0" rtlCol="0" anchor="ctr"/>
+          <a:lstStyle/>
+          <a:p>
+            <a:pPr algn="r" indent="0" marL="0">
+              <a:buNone/>
+            </a:pPr>
+            <a:r>
+              <a:rPr lang="en-US" sz="1050" dirty="0">
+                <a:solidFill>
+                  <a:srgbClr val="5A5A5A"/>
+                </a:solidFill>
+                <a:latin typeface="Calibri" pitchFamily="34" charset="0"/>
+                <a:ea typeface="Calibri" pitchFamily="34" charset="-122"/>
+                <a:cs typeface="Calibri" pitchFamily="34" charset="-120"/>
+              </a:rPr>
+              <a:t>aplanaron &gt;5 %</a:t>
+            </a:r>
+            <a:endParaRPr lang="en-US" sz="1050" dirty="0"/>
+          </a:p>
+        </p:txBody>
+      </p:sp>
+      <p:sp>
+        <p:nvSpPr>
+          <p:cNvPr id="14" name="Text 11"/>
+          <p:cNvSpPr txBox="1"/>
+          <p:nvPr/>
+        </p:nvSpPr>
+        <p:spPr>
+          <a:xfrm>
+            <a:off x="7772400" y="2907792"/>
+            <a:ext cx="1280160" cy="274320"/>
+          </a:xfrm>
+          <a:prstGeom prst="rect">
+            <a:avLst/>
+          </a:prstGeom>
+          <a:noFill/>
+          <a:ln/>
+        </p:spPr>
+        <p:txBody>
+          <a:bodyPr wrap="square" lIns="0" tIns="0" rIns="0" bIns="0" rtlCol="0" anchor="ctr"/>
+          <a:lstStyle/>
+          <a:p>
+            <a:pPr algn="l" indent="0" marL="0">
+              <a:buNone/>
+            </a:pPr>
+            <a:r>
+              <a:rPr lang="en-US" sz="1250" b="1" dirty="0">
+                <a:solidFill>
+                  <a:srgbClr val="1A1A1A"/>
+                </a:solidFill>
+                <a:latin typeface="Calibri" pitchFamily="34" charset="0"/>
+                <a:ea typeface="Calibri" pitchFamily="34" charset="-122"/>
+                <a:cs typeface="Calibri" pitchFamily="34" charset="-120"/>
+              </a:rPr>
+              <a:t>Bronx</a:t>
+            </a:r>
+            <a:endParaRPr lang="en-US" sz="1250" dirty="0"/>
+          </a:p>
+        </p:txBody>
+      </p:sp>
+      <p:sp>
+        <p:nvSpPr>
+          <p:cNvPr id="15" name="Text 12"/>
+          <p:cNvSpPr txBox="1"/>
+          <p:nvPr/>
+        </p:nvSpPr>
+        <p:spPr>
+          <a:xfrm>
+            <a:off x="9052560" y="2907792"/>
+            <a:ext cx="1005840" cy="274320"/>
+          </a:xfrm>
+          <a:prstGeom prst="rect">
+            <a:avLst/>
+          </a:prstGeom>
+          <a:noFill/>
+          <a:ln/>
+        </p:spPr>
+        <p:txBody>
+          <a:bodyPr wrap="square" lIns="0" tIns="0" rIns="0" bIns="0" rtlCol="0" anchor="ctr"/>
+          <a:lstStyle/>
+          <a:p>
+            <a:pPr algn="r" indent="0" marL="0">
+              <a:buNone/>
+            </a:pPr>
+            <a:r>
+              <a:rPr lang="en-US" sz="1250" b="1" dirty="0">
+                <a:solidFill>
+                  <a:srgbClr val="1A1A1A"/>
+                </a:solidFill>
+                <a:latin typeface="Calibri" pitchFamily="34" charset="0"/>
+                <a:ea typeface="Calibri" pitchFamily="34" charset="-122"/>
+                <a:cs typeface="Calibri" pitchFamily="34" charset="-120"/>
+              </a:rPr>
+              <a:t>56 %</a:t>
+            </a:r>
+            <a:endParaRPr lang="en-US" sz="1250" dirty="0"/>
+          </a:p>
+        </p:txBody>
+      </p:sp>
+      <p:sp>
+        <p:nvSpPr>
+          <p:cNvPr id="16" name="Text 13"/>
+          <p:cNvSpPr txBox="1"/>
+          <p:nvPr/>
+        </p:nvSpPr>
+        <p:spPr>
+          <a:xfrm>
+            <a:off x="10058400" y="2907792"/>
+            <a:ext cx="822960" cy="274320"/>
+          </a:xfrm>
+          <a:prstGeom prst="rect">
+            <a:avLst/>
+          </a:prstGeom>
+          <a:noFill/>
+          <a:ln/>
+        </p:spPr>
+        <p:txBody>
+          <a:bodyPr wrap="square" lIns="0" tIns="0" rIns="0" bIns="0" rtlCol="0" anchor="ctr"/>
+          <a:lstStyle/>
+          <a:p>
+            <a:pPr algn="r" indent="0" marL="0">
+              <a:buNone/>
+            </a:pPr>
+            <a:r>
+              <a:rPr lang="en-US" sz="1250" b="1" dirty="0">
+                <a:solidFill>
+                  <a:srgbClr val="1A1A1A"/>
+                </a:solidFill>
+                <a:latin typeface="Calibri" pitchFamily="34" charset="0"/>
+                <a:ea typeface="Calibri" pitchFamily="34" charset="-122"/>
+                <a:cs typeface="Calibri" pitchFamily="34" charset="-120"/>
+              </a:rPr>
+              <a:t>−5 %</a:t>
+            </a:r>
+            <a:endParaRPr lang="en-US" sz="1250" dirty="0"/>
+          </a:p>
+        </p:txBody>
+      </p:sp>
+      <p:sp>
+        <p:nvSpPr>
+          <p:cNvPr id="17" name="Text 14"/>
+          <p:cNvSpPr txBox="1"/>
+          <p:nvPr/>
+        </p:nvSpPr>
+        <p:spPr>
+          <a:xfrm>
+            <a:off x="10881360" y="2907792"/>
+            <a:ext cx="1188720" cy="274320"/>
+          </a:xfrm>
+          <a:prstGeom prst="rect">
+            <a:avLst/>
+          </a:prstGeom>
+          <a:noFill/>
+          <a:ln/>
+        </p:spPr>
+        <p:txBody>
+          <a:bodyPr wrap="square" lIns="0" tIns="0" rIns="0" bIns="0" rtlCol="0" anchor="ctr"/>
+          <a:lstStyle/>
+          <a:p>
+            <a:pPr algn="r" indent="0" marL="0">
+              <a:buNone/>
+            </a:pPr>
+            <a:r>
+              <a:rPr lang="en-US" sz="1250" b="1" dirty="0">
+                <a:solidFill>
+                  <a:srgbClr val="1A1A1A"/>
+                </a:solidFill>
+                <a:latin typeface="Calibri" pitchFamily="34" charset="0"/>
+                <a:ea typeface="Calibri" pitchFamily="34" charset="-122"/>
+                <a:cs typeface="Calibri" pitchFamily="34" charset="-120"/>
+              </a:rPr>
+              <a:t>51 %</a:t>
+            </a:r>
+            <a:endParaRPr lang="en-US" sz="1250" dirty="0"/>
+          </a:p>
+        </p:txBody>
+      </p:sp>
+      <p:sp>
+        <p:nvSpPr>
+          <p:cNvPr id="18" name="Text 15"/>
+          <p:cNvSpPr txBox="1"/>
+          <p:nvPr/>
+        </p:nvSpPr>
+        <p:spPr>
+          <a:xfrm>
+            <a:off x="7772400" y="3236976"/>
+            <a:ext cx="1280160" cy="274320"/>
+          </a:xfrm>
+          <a:prstGeom prst="rect">
+            <a:avLst/>
+          </a:prstGeom>
+          <a:noFill/>
+          <a:ln/>
+        </p:spPr>
+        <p:txBody>
+          <a:bodyPr wrap="square" lIns="0" tIns="0" rIns="0" bIns="0" rtlCol="0" anchor="ctr"/>
+          <a:lstStyle/>
+          <a:p>
+            <a:pPr algn="l" indent="0" marL="0">
+              <a:buNone/>
+            </a:pPr>
+            <a:r>
+              <a:rPr lang="en-US" sz="1250" dirty="0">
+                <a:solidFill>
+                  <a:srgbClr val="5A5A5A"/>
+                </a:solidFill>
+                <a:latin typeface="Calibri" pitchFamily="34" charset="0"/>
+                <a:ea typeface="Calibri" pitchFamily="34" charset="-122"/>
+                <a:cs typeface="Calibri" pitchFamily="34" charset="-120"/>
+              </a:rPr>
+              <a:t>Brooklyn</a:t>
+            </a:r>
+            <a:endParaRPr lang="en-US" sz="1250" dirty="0"/>
+          </a:p>
+        </p:txBody>
+      </p:sp>
+      <p:sp>
+        <p:nvSpPr>
+          <p:cNvPr id="19" name="Text 16"/>
+          <p:cNvSpPr txBox="1"/>
+          <p:nvPr/>
+        </p:nvSpPr>
+        <p:spPr>
+          <a:xfrm>
+            <a:off x="9052560" y="3236976"/>
+            <a:ext cx="1005840" cy="274320"/>
+          </a:xfrm>
+          <a:prstGeom prst="rect">
+            <a:avLst/>
+          </a:prstGeom>
+          <a:noFill/>
+          <a:ln/>
+        </p:spPr>
+        <p:txBody>
+          <a:bodyPr wrap="square" lIns="0" tIns="0" rIns="0" bIns="0" rtlCol="0" anchor="ctr"/>
+          <a:lstStyle/>
+          <a:p>
+            <a:pPr algn="r" indent="0" marL="0">
+              <a:buNone/>
+            </a:pPr>
+            <a:r>
+              <a:rPr lang="en-US" sz="1250" dirty="0">
+                <a:solidFill>
+                  <a:srgbClr val="5A5A5A"/>
+                </a:solidFill>
+                <a:latin typeface="Calibri" pitchFamily="34" charset="0"/>
+                <a:ea typeface="Calibri" pitchFamily="34" charset="-122"/>
+                <a:cs typeface="Calibri" pitchFamily="34" charset="-120"/>
+              </a:rPr>
+              <a:t>69 %</a:t>
+            </a:r>
+            <a:endParaRPr lang="en-US" sz="1250" dirty="0"/>
+          </a:p>
+        </p:txBody>
+      </p:sp>
+      <p:sp>
+        <p:nvSpPr>
+          <p:cNvPr id="20" name="Text 17"/>
+          <p:cNvSpPr txBox="1"/>
+          <p:nvPr/>
+        </p:nvSpPr>
+        <p:spPr>
+          <a:xfrm>
+            <a:off x="10058400" y="3236976"/>
+            <a:ext cx="822960" cy="274320"/>
+          </a:xfrm>
+          <a:prstGeom prst="rect">
+            <a:avLst/>
+          </a:prstGeom>
+          <a:noFill/>
+          <a:ln/>
+        </p:spPr>
+        <p:txBody>
+          <a:bodyPr wrap="square" lIns="0" tIns="0" rIns="0" bIns="0" rtlCol="0" anchor="ctr"/>
+          <a:lstStyle/>
+          <a:p>
+            <a:pPr algn="r" indent="0" marL="0">
+              <a:buNone/>
+            </a:pPr>
+            <a:r>
+              <a:rPr lang="en-US" sz="1250" dirty="0">
+                <a:solidFill>
+                  <a:srgbClr val="5A5A5A"/>
+                </a:solidFill>
+                <a:latin typeface="Calibri" pitchFamily="34" charset="0"/>
+                <a:ea typeface="Calibri" pitchFamily="34" charset="-122"/>
+                <a:cs typeface="Calibri" pitchFamily="34" charset="-120"/>
+              </a:rPr>
+              <a:t>−19 %</a:t>
+            </a:r>
+            <a:endParaRPr lang="en-US" sz="1250" dirty="0"/>
+          </a:p>
+        </p:txBody>
+      </p:sp>
+      <p:sp>
+        <p:nvSpPr>
+          <p:cNvPr id="21" name="Text 18"/>
+          <p:cNvSpPr txBox="1"/>
+          <p:nvPr/>
+        </p:nvSpPr>
+        <p:spPr>
+          <a:xfrm>
+            <a:off x="10881360" y="3236976"/>
+            <a:ext cx="1188720" cy="274320"/>
+          </a:xfrm>
+          <a:prstGeom prst="rect">
+            <a:avLst/>
+          </a:prstGeom>
+          <a:noFill/>
+          <a:ln/>
+        </p:spPr>
+        <p:txBody>
+          <a:bodyPr wrap="square" lIns="0" tIns="0" rIns="0" bIns="0" rtlCol="0" anchor="ctr"/>
+          <a:lstStyle/>
+          <a:p>
+            <a:pPr algn="r" indent="0" marL="0">
+              <a:buNone/>
+            </a:pPr>
+            <a:r>
+              <a:rPr lang="en-US" sz="1250" dirty="0">
+                <a:solidFill>
+                  <a:srgbClr val="5A5A5A"/>
+                </a:solidFill>
+                <a:latin typeface="Calibri" pitchFamily="34" charset="0"/>
+                <a:ea typeface="Calibri" pitchFamily="34" charset="-122"/>
+                <a:cs typeface="Calibri" pitchFamily="34" charset="-120"/>
+              </a:rPr>
+              <a:t>92 %</a:t>
+            </a:r>
+            <a:endParaRPr lang="en-US" sz="1250" dirty="0"/>
+          </a:p>
+        </p:txBody>
+      </p:sp>
+      <p:sp>
+        <p:nvSpPr>
+          <p:cNvPr id="22" name="Text 19"/>
+          <p:cNvSpPr txBox="1"/>
+          <p:nvPr/>
+        </p:nvSpPr>
+        <p:spPr>
+          <a:xfrm>
+            <a:off x="7772400" y="3566160"/>
+            <a:ext cx="1280160" cy="274320"/>
+          </a:xfrm>
+          <a:prstGeom prst="rect">
+            <a:avLst/>
+          </a:prstGeom>
+          <a:noFill/>
+          <a:ln/>
+        </p:spPr>
+        <p:txBody>
+          <a:bodyPr wrap="square" lIns="0" tIns="0" rIns="0" bIns="0" rtlCol="0" anchor="ctr"/>
+          <a:lstStyle/>
+          <a:p>
+            <a:pPr algn="l" indent="0" marL="0">
+              <a:buNone/>
+            </a:pPr>
+            <a:r>
+              <a:rPr lang="en-US" sz="1250" dirty="0">
+                <a:solidFill>
+                  <a:srgbClr val="5A5A5A"/>
+                </a:solidFill>
+                <a:latin typeface="Calibri" pitchFamily="34" charset="0"/>
+                <a:ea typeface="Calibri" pitchFamily="34" charset="-122"/>
+                <a:cs typeface="Calibri" pitchFamily="34" charset="-120"/>
+              </a:rPr>
+              <a:t>Queens</a:t>
+            </a:r>
+            <a:endParaRPr lang="en-US" sz="1250" dirty="0"/>
+          </a:p>
+        </p:txBody>
+      </p:sp>
+      <p:sp>
+        <p:nvSpPr>
+          <p:cNvPr id="23" name="Text 20"/>
+          <p:cNvSpPr txBox="1"/>
+          <p:nvPr/>
+        </p:nvSpPr>
+        <p:spPr>
+          <a:xfrm>
+            <a:off x="9052560" y="3566160"/>
+            <a:ext cx="1005840" cy="274320"/>
+          </a:xfrm>
+          <a:prstGeom prst="rect">
+            <a:avLst/>
+          </a:prstGeom>
+          <a:noFill/>
+          <a:ln/>
+        </p:spPr>
+        <p:txBody>
+          <a:bodyPr wrap="square" lIns="0" tIns="0" rIns="0" bIns="0" rtlCol="0" anchor="ctr"/>
+          <a:lstStyle/>
+          <a:p>
+            <a:pPr algn="r" indent="0" marL="0">
+              <a:buNone/>
+            </a:pPr>
+            <a:r>
+              <a:rPr lang="en-US" sz="1250" dirty="0">
+                <a:solidFill>
+                  <a:srgbClr val="5A5A5A"/>
+                </a:solidFill>
+                <a:latin typeface="Calibri" pitchFamily="34" charset="0"/>
+                <a:ea typeface="Calibri" pitchFamily="34" charset="-122"/>
+                <a:cs typeface="Calibri" pitchFamily="34" charset="-120"/>
+              </a:rPr>
+              <a:t>69 %</a:t>
+            </a:r>
+            <a:endParaRPr lang="en-US" sz="1250" dirty="0"/>
+          </a:p>
+        </p:txBody>
+      </p:sp>
+      <p:sp>
+        <p:nvSpPr>
+          <p:cNvPr id="24" name="Text 21"/>
+          <p:cNvSpPr txBox="1"/>
+          <p:nvPr/>
+        </p:nvSpPr>
+        <p:spPr>
+          <a:xfrm>
+            <a:off x="10058400" y="3566160"/>
+            <a:ext cx="822960" cy="274320"/>
+          </a:xfrm>
+          <a:prstGeom prst="rect">
+            <a:avLst/>
+          </a:prstGeom>
+          <a:noFill/>
+          <a:ln/>
+        </p:spPr>
+        <p:txBody>
+          <a:bodyPr wrap="square" lIns="0" tIns="0" rIns="0" bIns="0" rtlCol="0" anchor="ctr"/>
+          <a:lstStyle/>
+          <a:p>
+            <a:pPr algn="r" indent="0" marL="0">
+              <a:buNone/>
+            </a:pPr>
+            <a:r>
+              <a:rPr lang="en-US" sz="1250" dirty="0">
+                <a:solidFill>
+                  <a:srgbClr val="5A5A5A"/>
+                </a:solidFill>
+                <a:latin typeface="Calibri" pitchFamily="34" charset="0"/>
+                <a:ea typeface="Calibri" pitchFamily="34" charset="-122"/>
+                <a:cs typeface="Calibri" pitchFamily="34" charset="-120"/>
+              </a:rPr>
+              <a:t>−18 %</a:t>
+            </a:r>
+            <a:endParaRPr lang="en-US" sz="1250" dirty="0"/>
+          </a:p>
+        </p:txBody>
+      </p:sp>
+      <p:sp>
+        <p:nvSpPr>
+          <p:cNvPr id="25" name="Text 22"/>
+          <p:cNvSpPr txBox="1"/>
+          <p:nvPr/>
+        </p:nvSpPr>
+        <p:spPr>
+          <a:xfrm>
+            <a:off x="10881360" y="3566160"/>
+            <a:ext cx="1188720" cy="274320"/>
+          </a:xfrm>
+          <a:prstGeom prst="rect">
+            <a:avLst/>
+          </a:prstGeom>
+          <a:noFill/>
+          <a:ln/>
+        </p:spPr>
+        <p:txBody>
+          <a:bodyPr wrap="square" lIns="0" tIns="0" rIns="0" bIns="0" rtlCol="0" anchor="ctr"/>
+          <a:lstStyle/>
+          <a:p>
+            <a:pPr algn="r" indent="0" marL="0">
+              <a:buNone/>
+            </a:pPr>
+            <a:r>
+              <a:rPr lang="en-US" sz="1250" dirty="0">
+                <a:solidFill>
+                  <a:srgbClr val="5A5A5A"/>
+                </a:solidFill>
+                <a:latin typeface="Calibri" pitchFamily="34" charset="0"/>
+                <a:ea typeface="Calibri" pitchFamily="34" charset="-122"/>
+                <a:cs typeface="Calibri" pitchFamily="34" charset="-120"/>
+              </a:rPr>
+              <a:t>85 %</a:t>
+            </a:r>
+            <a:endParaRPr lang="en-US" sz="1250" dirty="0"/>
+          </a:p>
+        </p:txBody>
+      </p:sp>
+      <p:sp>
+        <p:nvSpPr>
+          <p:cNvPr id="26" name="Text 23"/>
+          <p:cNvSpPr txBox="1"/>
+          <p:nvPr/>
+        </p:nvSpPr>
+        <p:spPr>
+          <a:xfrm>
+            <a:off x="7772400" y="3895344"/>
+            <a:ext cx="1280160" cy="274320"/>
+          </a:xfrm>
+          <a:prstGeom prst="rect">
+            <a:avLst/>
+          </a:prstGeom>
+          <a:noFill/>
+          <a:ln/>
+        </p:spPr>
+        <p:txBody>
+          <a:bodyPr wrap="square" lIns="0" tIns="0" rIns="0" bIns="0" rtlCol="0" anchor="ctr"/>
+          <a:lstStyle/>
+          <a:p>
+            <a:pPr algn="l" indent="0" marL="0">
+              <a:buNone/>
+            </a:pPr>
+            <a:r>
+              <a:rPr lang="en-US" sz="1250" dirty="0">
+                <a:solidFill>
+                  <a:srgbClr val="5A5A5A"/>
+                </a:solidFill>
+                <a:latin typeface="Calibri" pitchFamily="34" charset="0"/>
+                <a:ea typeface="Calibri" pitchFamily="34" charset="-122"/>
+                <a:cs typeface="Calibri" pitchFamily="34" charset="-120"/>
+              </a:rPr>
+              <a:t>Manhattan</a:t>
+            </a:r>
+            <a:endParaRPr lang="en-US" sz="1250" dirty="0"/>
+          </a:p>
+        </p:txBody>
+      </p:sp>
+      <p:sp>
+        <p:nvSpPr>
+          <p:cNvPr id="27" name="Text 24"/>
+          <p:cNvSpPr txBox="1"/>
+          <p:nvPr/>
+        </p:nvSpPr>
+        <p:spPr>
+          <a:xfrm>
+            <a:off x="9052560" y="3895344"/>
+            <a:ext cx="1005840" cy="274320"/>
+          </a:xfrm>
+          <a:prstGeom prst="rect">
+            <a:avLst/>
+          </a:prstGeom>
+          <a:noFill/>
+          <a:ln/>
+        </p:spPr>
+        <p:txBody>
+          <a:bodyPr wrap="square" lIns="0" tIns="0" rIns="0" bIns="0" rtlCol="0" anchor="ctr"/>
+          <a:lstStyle/>
+          <a:p>
+            <a:pPr algn="r" indent="0" marL="0">
+              <a:buNone/>
+            </a:pPr>
+            <a:r>
+              <a:rPr lang="en-US" sz="1250" dirty="0">
+                <a:solidFill>
+                  <a:srgbClr val="5A5A5A"/>
+                </a:solidFill>
+                <a:latin typeface="Calibri" pitchFamily="34" charset="0"/>
+                <a:ea typeface="Calibri" pitchFamily="34" charset="-122"/>
+                <a:cs typeface="Calibri" pitchFamily="34" charset="-120"/>
+              </a:rPr>
+              <a:t>69 %</a:t>
+            </a:r>
+            <a:endParaRPr lang="en-US" sz="1250" dirty="0"/>
+          </a:p>
+        </p:txBody>
+      </p:sp>
+      <p:sp>
+        <p:nvSpPr>
+          <p:cNvPr id="28" name="Text 25"/>
+          <p:cNvSpPr txBox="1"/>
+          <p:nvPr/>
+        </p:nvSpPr>
+        <p:spPr>
+          <a:xfrm>
+            <a:off x="10058400" y="3895344"/>
+            <a:ext cx="822960" cy="274320"/>
+          </a:xfrm>
+          <a:prstGeom prst="rect">
+            <a:avLst/>
+          </a:prstGeom>
+          <a:noFill/>
+          <a:ln/>
+        </p:spPr>
+        <p:txBody>
+          <a:bodyPr wrap="square" lIns="0" tIns="0" rIns="0" bIns="0" rtlCol="0" anchor="ctr"/>
+          <a:lstStyle/>
+          <a:p>
+            <a:pPr algn="r" indent="0" marL="0">
+              <a:buNone/>
+            </a:pPr>
+            <a:r>
+              <a:rPr lang="en-US" sz="1250" dirty="0">
+                <a:solidFill>
+                  <a:srgbClr val="5A5A5A"/>
+                </a:solidFill>
+                <a:latin typeface="Calibri" pitchFamily="34" charset="0"/>
+                <a:ea typeface="Calibri" pitchFamily="34" charset="-122"/>
+                <a:cs typeface="Calibri" pitchFamily="34" charset="-120"/>
+              </a:rPr>
+              <a:t>−16 %</a:t>
+            </a:r>
+            <a:endParaRPr lang="en-US" sz="1250" dirty="0"/>
+          </a:p>
+        </p:txBody>
+      </p:sp>
+      <p:sp>
+        <p:nvSpPr>
+          <p:cNvPr id="29" name="Text 26"/>
+          <p:cNvSpPr txBox="1"/>
+          <p:nvPr/>
+        </p:nvSpPr>
+        <p:spPr>
+          <a:xfrm>
+            <a:off x="10881360" y="3895344"/>
+            <a:ext cx="1188720" cy="274320"/>
+          </a:xfrm>
+          <a:prstGeom prst="rect">
+            <a:avLst/>
+          </a:prstGeom>
+          <a:noFill/>
+          <a:ln/>
+        </p:spPr>
+        <p:txBody>
+          <a:bodyPr wrap="square" lIns="0" tIns="0" rIns="0" bIns="0" rtlCol="0" anchor="ctr"/>
+          <a:lstStyle/>
+          <a:p>
+            <a:pPr algn="r" indent="0" marL="0">
+              <a:buNone/>
+            </a:pPr>
+            <a:r>
+              <a:rPr lang="en-US" sz="1250" dirty="0">
+                <a:solidFill>
+                  <a:srgbClr val="5A5A5A"/>
+                </a:solidFill>
+                <a:latin typeface="Calibri" pitchFamily="34" charset="0"/>
+                <a:ea typeface="Calibri" pitchFamily="34" charset="-122"/>
+                <a:cs typeface="Calibri" pitchFamily="34" charset="-120"/>
+              </a:rPr>
+              <a:t>79 %</a:t>
+            </a:r>
+            <a:endParaRPr lang="en-US" sz="1250" dirty="0"/>
+          </a:p>
+        </p:txBody>
+      </p:sp>
+      <p:sp>
+        <p:nvSpPr>
+          <p:cNvPr id="30" name="Text 27"/>
+          <p:cNvSpPr txBox="1"/>
+          <p:nvPr/>
+        </p:nvSpPr>
+        <p:spPr>
+          <a:xfrm>
+            <a:off x="7772400" y="4343400"/>
+            <a:ext cx="4114800" cy="914400"/>
           </a:xfrm>
           <a:prstGeom prst="rect">
             <a:avLst/>
@@ -3153,30 +4123,30 @@
               <a:buNone/>
             </a:pPr>
             <a:r>
-              <a:rPr lang="en-US" sz="1700" b="1" dirty="0">
-                <a:solidFill>
-                  <a:srgbClr val="1B4F8C"/>
-                </a:solidFill>
-                <a:latin typeface="Calibri" pitchFamily="34" charset="0"/>
-                <a:ea typeface="Calibri" pitchFamily="34" charset="-122"/>
-                <a:cs typeface="Calibri" pitchFamily="34" charset="-120"/>
-              </a:rPr>
-              <a:t>161 de 428  ·  55 % de las entradas</a:t>
-            </a:r>
-            <a:endParaRPr lang="en-US" sz="1700" dirty="0"/>
-          </a:p>
-        </p:txBody>
-      </p:sp>
-      <p:sp>
-        <p:nvSpPr>
-          <p:cNvPr id="10" name="Text 7"/>
-          <p:cNvSpPr txBox="1"/>
-          <p:nvPr/>
-        </p:nvSpPr>
-        <p:spPr>
-          <a:xfrm>
-            <a:off x="7452360" y="3383280"/>
-            <a:ext cx="4114800" cy="1005840"/>
+              <a:rPr lang="en-US" sz="1200" dirty="0">
+                <a:solidFill>
+                  <a:srgbClr val="1A1A1A"/>
+                </a:solidFill>
+                <a:latin typeface="Calibri" pitchFamily="34" charset="0"/>
+                <a:ea typeface="Calibri" pitchFamily="34" charset="-122"/>
+                <a:cs typeface="Calibri" pitchFamily="34" charset="-120"/>
+              </a:rPr>
+              <a:t>Aplanar el pico es lo que hace el trabajo híbrido. Donde la gente no puede quedarse en casa, el pico se queda y solo baja el volumen.</a:t>
+            </a:r>
+            <a:endParaRPr lang="en-US" sz="1200" dirty="0"/>
+          </a:p>
+        </p:txBody>
+      </p:sp>
+      <p:sp>
+        <p:nvSpPr>
+          <p:cNvPr id="31" name="Text 28"/>
+          <p:cNvSpPr txBox="1"/>
+          <p:nvPr/>
+        </p:nvSpPr>
+        <p:spPr>
+          <a:xfrm>
+            <a:off x="7772400" y="5303520"/>
+            <a:ext cx="4114800" cy="731520"/>
           </a:xfrm>
           <a:prstGeom prst="rect">
             <a:avLst/>
@@ -3195,49 +4165,7 @@
               <a:buNone/>
             </a:pPr>
             <a:r>
-              <a:rPr lang="en-US" sz="1400" dirty="0">
-                <a:solidFill>
-                  <a:srgbClr val="1A1A1A"/>
-                </a:solidFill>
-                <a:latin typeface="Calibri" pitchFamily="34" charset="0"/>
-                <a:ea typeface="Calibri" pitchFamily="34" charset="-122"/>
-                <a:cs typeface="Calibri" pitchFamily="34" charset="-120"/>
-              </a:rPr>
-              <a:t>El mapa apaga el resto y la rejilla de perfiles se reconstruye con solo esas estaciones.</a:t>
-            </a:r>
-            <a:endParaRPr lang="en-US" sz="1400" dirty="0"/>
-          </a:p>
-        </p:txBody>
-      </p:sp>
-      <p:sp>
-        <p:nvSpPr>
-          <p:cNvPr id="11" name="Text 8"/>
-          <p:cNvSpPr txBox="1"/>
-          <p:nvPr/>
-        </p:nvSpPr>
-        <p:spPr>
-          <a:xfrm>
-            <a:off x="7452360" y="4480560"/>
-            <a:ext cx="4114800" cy="1463040"/>
-          </a:xfrm>
-          <a:prstGeom prst="rect">
-            <a:avLst/>
-          </a:prstGeom>
-          <a:noFill/>
-          <a:ln/>
-        </p:spPr>
-        <p:txBody>
-          <a:bodyPr wrap="square" lIns="0" tIns="0" rIns="0" bIns="0" rtlCol="0" anchor="t"/>
-          <a:lstStyle/>
-          <a:p>
-            <a:pPr indent="0" marL="0">
-              <a:lnSpc>
-                <a:spcPct val="110000"/>
-              </a:lnSpc>
-              <a:buNone/>
-            </a:pPr>
-            <a:r>
-              <a:rPr lang="en-US" sz="1300" dirty="0">
+              <a:rPr lang="en-US" sz="1100" i="1" dirty="0">
                 <a:solidFill>
                   <a:srgbClr val="5A5A5A"/>
                 </a:solidFill>
@@ -3245,9 +4173,9 @@
                 <a:ea typeface="Calibri" pitchFamily="34" charset="-122"/>
                 <a:cs typeface="Calibri" pitchFamily="34" charset="-120"/>
               </a:rPr>
-              <a:t>El estado vive en un solo módulo. Cualquier vista que lo cambie redibuja las cuatro: eso es el brushing &amp; linking del proyecto.</a:t>
-            </a:r>
-            <a:endParaRPr lang="en-US" sz="1300" dirty="0"/>
+              <a:t>Es una hipótesis consistente con los datos, no una medición. Aguanta tres pruebas de robustez.</a:t>
+            </a:r>
+            <a:endParaRPr lang="en-US" sz="1100" dirty="0"/>
           </a:p>
         </p:txBody>
       </p:sp>
@@ -3336,7 +4264,7 @@
                 <a:ea typeface="Calibri" pitchFamily="34" charset="-122"/>
                 <a:cs typeface="Calibri" pitchFamily="34" charset="-120"/>
               </a:rPr>
-              <a:t>Decisiones de diseño y alternativas descartadas</a:t>
+              <a:t>El explorador y la evidencia</a:t>
             </a:r>
             <a:endParaRPr lang="en-US" sz="2400" dirty="0"/>
           </a:p>
@@ -3382,41 +4310,40 @@
           <a:ln/>
         </p:spPr>
       </p:sp>
-      <p:sp>
-        <p:nvSpPr>
-          <p:cNvPr id="6" name="Shape 4"/>
-          <p:cNvSpPr/>
-          <p:nvPr/>
-        </p:nvSpPr>
-        <p:spPr>
-          <a:xfrm>
-            <a:off x="822960" y="1207008"/>
-            <a:ext cx="10515600" cy="877824"/>
-          </a:xfrm>
-          <a:prstGeom prst="rect">
-            <a:avLst/>
-          </a:prstGeom>
-          <a:solidFill>
-            <a:srgbClr val="FFFFFF"/>
-          </a:solidFill>
-          <a:ln w="9525">
-            <a:solidFill>
-              <a:srgbClr val="D5D5D5"/>
-            </a:solidFill>
-            <a:prstDash val="solid"/>
-          </a:ln>
-        </p:spPr>
-      </p:sp>
-      <p:sp>
-        <p:nvSpPr>
-          <p:cNvPr id="7" name="Text 5"/>
-          <p:cNvSpPr txBox="1"/>
-          <p:nvPr/>
-        </p:nvSpPr>
-        <p:spPr>
-          <a:xfrm>
-            <a:off x="1005840" y="1335024"/>
-            <a:ext cx="2286000" cy="548640"/>
+      <p:pic>
+        <p:nvPicPr>
+          <p:cNvPr id="6" name="Image 0" descr="/home/claude/w10v2/capturas/10-explorador-panel.png">    </p:cNvPr>
+          <p:cNvPicPr>
+            <a:picLocks noChangeAspect="1"/>
+          </p:cNvPicPr>
+          <p:nvPr/>
+        </p:nvPicPr>
+        <p:blipFill>
+          <a:blip r:embed="rId1"/>
+          <a:stretch>
+            <a:fillRect/>
+          </a:stretch>
+        </p:blipFill>
+        <p:spPr>
+          <a:xfrm>
+            <a:off x="566928" y="1097280"/>
+            <a:ext cx="6949440" cy="4343400"/>
+          </a:xfrm>
+          <a:prstGeom prst="rect">
+            <a:avLst/>
+          </a:prstGeom>
+        </p:spPr>
+      </p:pic>
+      <p:sp>
+        <p:nvSpPr>
+          <p:cNvPr id="7" name="Text 4"/>
+          <p:cNvSpPr txBox="1"/>
+          <p:nvPr/>
+        </p:nvSpPr>
+        <p:spPr>
+          <a:xfrm>
+            <a:off x="7772400" y="1188720"/>
+            <a:ext cx="4114800" cy="4206240"/>
           </a:xfrm>
           <a:prstGeom prst="rect">
             <a:avLst/>
@@ -3428,95 +4355,42 @@
           <a:bodyPr wrap="square" lIns="0" tIns="0" rIns="0" bIns="0" rtlCol="0" anchor="t"/>
           <a:lstStyle/>
           <a:p>
-            <a:pPr indent="0" marL="0">
-              <a:buNone/>
-            </a:pPr>
-            <a:r>
-              <a:rPr lang="en-US" sz="1350" b="1" dirty="0">
-                <a:solidFill>
-                  <a:srgbClr val="1B4F8C"/>
-                </a:solidFill>
-                <a:latin typeface="Calibri" pitchFamily="34" charset="0"/>
-                <a:ea typeface="Calibri" pitchFamily="34" charset="-122"/>
-                <a:cs typeface="Calibri" pitchFamily="34" charset="-120"/>
-              </a:rPr>
-              <a:t>Small multiples</a:t>
-            </a:r>
-            <a:endParaRPr lang="en-US" sz="1350" dirty="0"/>
-          </a:p>
-        </p:txBody>
-      </p:sp>
-      <p:sp>
-        <p:nvSpPr>
-          <p:cNvPr id="8" name="Text 6"/>
-          <p:cNvSpPr txBox="1"/>
-          <p:nvPr/>
-        </p:nvSpPr>
-        <p:spPr>
-          <a:xfrm>
-            <a:off x="3383280" y="1335024"/>
-            <a:ext cx="3017520" cy="640080"/>
-          </a:xfrm>
-          <a:prstGeom prst="rect">
-            <a:avLst/>
-          </a:prstGeom>
-          <a:noFill/>
-          <a:ln/>
-        </p:spPr>
-        <p:txBody>
-          <a:bodyPr wrap="square" lIns="0" tIns="0" rIns="0" bIns="0" rtlCol="0" anchor="t"/>
-          <a:lstStyle/>
-          <a:p>
-            <a:pPr indent="0" marL="0">
+            <a:pPr marL="342900" indent="-342900">
               <a:lnSpc>
                 <a:spcPct val="105000"/>
               </a:lnSpc>
-              <a:buNone/>
-            </a:pPr>
-            <a:r>
-              <a:rPr lang="en-US" sz="1150" dirty="0">
-                <a:solidFill>
-                  <a:srgbClr val="E07A16"/>
-                </a:solidFill>
-                <a:latin typeface="Calibri" pitchFamily="34" charset="0"/>
-                <a:ea typeface="Calibri" pitchFamily="34" charset="-122"/>
-                <a:cs typeface="Calibri" pitchFamily="34" charset="-120"/>
-              </a:rPr>
-              <a:t>428 líneas superpuestas · animar la transición · agrupar en 4 tipos</a:t>
-            </a:r>
-            <a:endParaRPr lang="en-US" sz="1150" dirty="0"/>
-          </a:p>
-        </p:txBody>
-      </p:sp>
-      <p:sp>
-        <p:nvSpPr>
-          <p:cNvPr id="9" name="Text 7"/>
-          <p:cNvSpPr txBox="1"/>
-          <p:nvPr/>
-        </p:nvSpPr>
-        <p:spPr>
-          <a:xfrm>
-            <a:off x="6537960" y="1335024"/>
-            <a:ext cx="4663440" cy="640080"/>
-          </a:xfrm>
-          <a:prstGeom prst="rect">
-            <a:avLst/>
-          </a:prstGeom>
-          <a:noFill/>
-          <a:ln/>
-        </p:spPr>
-        <p:txBody>
-          <a:bodyPr wrap="square" lIns="0" tIns="0" rIns="0" bIns="0" rtlCol="0" anchor="t"/>
-          <a:lstStyle/>
-          <a:p>
-            <a:pPr indent="0" marL="0">
+              <a:spcAft>
+                <a:spcPts val="800"/>
+              </a:spcAft>
+              <a:buSzPct val="100000"/>
+              <a:buChar char="•"/>
+            </a:pPr>
+            <a:r>
+              <a:rPr lang="en-US" sz="1250" dirty="0">
+                <a:solidFill>
+                  <a:srgbClr val="1A1A1A"/>
+                </a:solidFill>
+                <a:latin typeface="Calibri" pitchFamily="34" charset="0"/>
+                <a:ea typeface="Calibri" pitchFamily="34" charset="-122"/>
+                <a:cs typeface="Calibri" pitchFamily="34" charset="-120"/>
+              </a:rPr>
+              <a:t>Cuatro vistas, una sola selección: mapa con cuatro lentes, rejilla de 168 h, dispersión con brush, serie con brush.</a:t>
+            </a:r>
+            <a:endParaRPr lang="en-US" sz="1250" dirty="0"/>
+          </a:p>
+          <a:p>
+            <a:pPr marL="342900" indent="-342900">
               <a:lnSpc>
                 <a:spcPct val="105000"/>
               </a:lnSpc>
-              <a:buNone/>
-            </a:pPr>
-            <a:r>
-              <a:rPr lang="en-US" sz="1150" dirty="0">
+              <a:spcAft>
+                <a:spcPts val="800"/>
+              </a:spcAft>
+              <a:buSzPct val="100000"/>
+              <a:buChar char="•"/>
+            </a:pPr>
+            <a:r>
+              <a:rPr lang="en-US" sz="1250" dirty="0">
                 <a:solidFill>
                   <a:srgbClr val="1A1A1A"/>
                 </a:solidFill>
@@ -3524,147 +4398,47 @@
                 <a:ea typeface="Calibri" pitchFamily="34" charset="-122"/>
                 <a:cs typeface="Calibri" pitchFamily="34" charset="-120"/>
               </a:rPr>
-              <a:t>El overplotting borra la forma; la animación rinde peor comparando momentos distantes (Lee 2020); agrupar promedia y esconde la variación.</a:t>
-            </a:r>
-            <a:endParaRPr lang="en-US" sz="1150" dirty="0"/>
-          </a:p>
-        </p:txBody>
-      </p:sp>
-      <p:sp>
-        <p:nvSpPr>
-          <p:cNvPr id="10" name="Shape 8"/>
-          <p:cNvSpPr/>
-          <p:nvPr/>
-        </p:nvSpPr>
-        <p:spPr>
-          <a:xfrm>
-            <a:off x="822960" y="2194560"/>
-            <a:ext cx="10515600" cy="877824"/>
-          </a:xfrm>
-          <a:prstGeom prst="rect">
-            <a:avLst/>
-          </a:prstGeom>
-          <a:solidFill>
-            <a:srgbClr val="F7F9FB"/>
-          </a:solidFill>
-          <a:ln w="9525">
-            <a:solidFill>
-              <a:srgbClr val="D5D5D5"/>
-            </a:solidFill>
-            <a:prstDash val="solid"/>
-          </a:ln>
-        </p:spPr>
-      </p:sp>
-      <p:sp>
-        <p:nvSpPr>
-          <p:cNvPr id="11" name="Text 9"/>
-          <p:cNvSpPr txBox="1"/>
-          <p:nvPr/>
-        </p:nvSpPr>
-        <p:spPr>
-          <a:xfrm>
-            <a:off x="1005840" y="2322576"/>
-            <a:ext cx="2286000" cy="548640"/>
-          </a:xfrm>
-          <a:prstGeom prst="rect">
-            <a:avLst/>
-          </a:prstGeom>
-          <a:noFill/>
-          <a:ln/>
-        </p:spPr>
-        <p:txBody>
-          <a:bodyPr wrap="square" lIns="0" tIns="0" rIns="0" bIns="0" rtlCol="0" anchor="t"/>
-          <a:lstStyle/>
-          <a:p>
-            <a:pPr indent="0" marL="0">
-              <a:buNone/>
-            </a:pPr>
-            <a:r>
-              <a:rPr lang="en-US" sz="1350" b="1" dirty="0">
-                <a:solidFill>
-                  <a:srgbClr val="1B4F8C"/>
-                </a:solidFill>
-                <a:latin typeface="Calibri" pitchFamily="34" charset="0"/>
-                <a:ea typeface="Calibri" pitchFamily="34" charset="-122"/>
-                <a:cs typeface="Calibri" pitchFamily="34" charset="-120"/>
-              </a:rPr>
-              <a:t>Escala vertical común</a:t>
-            </a:r>
-            <a:endParaRPr lang="en-US" sz="1350" dirty="0"/>
-          </a:p>
-        </p:txBody>
-      </p:sp>
-      <p:sp>
-        <p:nvSpPr>
-          <p:cNvPr id="12" name="Text 10"/>
-          <p:cNvSpPr txBox="1"/>
-          <p:nvPr/>
-        </p:nvSpPr>
-        <p:spPr>
-          <a:xfrm>
-            <a:off x="3383280" y="2322576"/>
-            <a:ext cx="3017520" cy="640080"/>
-          </a:xfrm>
-          <a:prstGeom prst="rect">
-            <a:avLst/>
-          </a:prstGeom>
-          <a:noFill/>
-          <a:ln/>
-        </p:spPr>
-        <p:txBody>
-          <a:bodyPr wrap="square" lIns="0" tIns="0" rIns="0" bIns="0" rtlCol="0" anchor="t"/>
-          <a:lstStyle/>
-          <a:p>
-            <a:pPr indent="0" marL="0">
+              <a:t>Un clic en una estación abre su panel: cifras, perfil antes/después, serie mensual y la tabla con los números detrás de cada afirmación.</a:t>
+            </a:r>
+            <a:endParaRPr lang="en-US" sz="1250" dirty="0"/>
+          </a:p>
+          <a:p>
+            <a:pPr marL="342900" indent="-342900">
               <a:lnSpc>
                 <a:spcPct val="105000"/>
               </a:lnSpc>
-              <a:buNone/>
-            </a:pPr>
-            <a:r>
-              <a:rPr lang="en-US" sz="1150" dirty="0">
-                <a:solidFill>
-                  <a:srgbClr val="E07A16"/>
-                </a:solidFill>
-                <a:latin typeface="Calibri" pitchFamily="34" charset="0"/>
-                <a:ea typeface="Calibri" pitchFamily="34" charset="-122"/>
-                <a:cs typeface="Calibri" pitchFamily="34" charset="-120"/>
-              </a:rPr>
-              <a:t>una escala por múltiplo</a:t>
-            </a:r>
-            <a:endParaRPr lang="en-US" sz="1150" dirty="0"/>
-          </a:p>
-        </p:txBody>
-      </p:sp>
-      <p:sp>
-        <p:nvSpPr>
-          <p:cNvPr id="13" name="Text 11"/>
-          <p:cNvSpPr txBox="1"/>
-          <p:nvPr/>
-        </p:nvSpPr>
-        <p:spPr>
-          <a:xfrm>
-            <a:off x="6537960" y="2322576"/>
-            <a:ext cx="4663440" cy="640080"/>
-          </a:xfrm>
-          <a:prstGeom prst="rect">
-            <a:avLst/>
-          </a:prstGeom>
-          <a:noFill/>
-          <a:ln/>
-        </p:spPr>
-        <p:txBody>
-          <a:bodyPr wrap="square" lIns="0" tIns="0" rIns="0" bIns="0" rtlCol="0" anchor="t"/>
-          <a:lstStyle/>
-          <a:p>
-            <a:pPr indent="0" marL="0">
+              <a:spcAft>
+                <a:spcPts val="800"/>
+              </a:spcAft>
+              <a:buSzPct val="100000"/>
+              <a:buChar char="•"/>
+            </a:pPr>
+            <a:r>
+              <a:rPr lang="en-US" sz="1250" dirty="0">
+                <a:solidFill>
+                  <a:srgbClr val="1A1A1A"/>
+                </a:solidFill>
+                <a:latin typeface="Calibri" pitchFamily="34" charset="0"/>
+                <a:ea typeface="Calibri" pitchFamily="34" charset="-122"/>
+                <a:cs typeface="Calibri" pitchFamily="34" charset="-120"/>
+              </a:rPr>
+              <a:t>Si la comparación es poco confiable, el panel dice por qué. Nada se esconde.</a:t>
+            </a:r>
+            <a:endParaRPr lang="en-US" sz="1250" dirty="0"/>
+          </a:p>
+          <a:p>
+            <a:pPr marL="342900" indent="-342900">
               <a:lnSpc>
                 <a:spcPct val="105000"/>
               </a:lnSpc>
-              <a:buNone/>
-            </a:pPr>
-            <a:r>
-              <a:rPr lang="en-US" sz="1150" dirty="0">
+              <a:spcAft>
+                <a:spcPts val="800"/>
+              </a:spcAft>
+              <a:buSzPct val="100000"/>
+              <a:buChar char="•"/>
+            </a:pPr>
+            <a:r>
+              <a:rPr lang="en-US" sz="1250" dirty="0">
                 <a:solidFill>
                   <a:srgbClr val="1A1A1A"/>
                 </a:solidFill>
@@ -3672,570 +4446,9 @@
                 <a:ea typeface="Calibri" pitchFamily="34" charset="-122"/>
                 <a:cs typeface="Calibri" pitchFamily="34" charset="-120"/>
               </a:rPr>
-              <a:t>Con escala propia cada gráfico llena su caja y las formas dejan de ser comparables, que es el único motivo para ponerlas juntas.</a:t>
-            </a:r>
-            <a:endParaRPr lang="en-US" sz="1150" dirty="0"/>
-          </a:p>
-        </p:txBody>
-      </p:sp>
-      <p:sp>
-        <p:nvSpPr>
-          <p:cNvPr id="14" name="Shape 12"/>
-          <p:cNvSpPr/>
-          <p:nvPr/>
-        </p:nvSpPr>
-        <p:spPr>
-          <a:xfrm>
-            <a:off x="822960" y="3182112"/>
-            <a:ext cx="10515600" cy="877824"/>
-          </a:xfrm>
-          <a:prstGeom prst="rect">
-            <a:avLst/>
-          </a:prstGeom>
-          <a:solidFill>
-            <a:srgbClr val="FFFFFF"/>
-          </a:solidFill>
-          <a:ln w="9525">
-            <a:solidFill>
-              <a:srgbClr val="D5D5D5"/>
-            </a:solidFill>
-            <a:prstDash val="solid"/>
-          </a:ln>
-        </p:spPr>
-      </p:sp>
-      <p:sp>
-        <p:nvSpPr>
-          <p:cNvPr id="15" name="Text 13"/>
-          <p:cNvSpPr txBox="1"/>
-          <p:nvPr/>
-        </p:nvSpPr>
-        <p:spPr>
-          <a:xfrm>
-            <a:off x="1005840" y="3310128"/>
-            <a:ext cx="2286000" cy="548640"/>
-          </a:xfrm>
-          <a:prstGeom prst="rect">
-            <a:avLst/>
-          </a:prstGeom>
-          <a:noFill/>
-          <a:ln/>
-        </p:spPr>
-        <p:txBody>
-          <a:bodyPr wrap="square" lIns="0" tIns="0" rIns="0" bIns="0" rtlCol="0" anchor="t"/>
-          <a:lstStyle/>
-          <a:p>
-            <a:pPr indent="0" marL="0">
-              <a:buNone/>
-            </a:pPr>
-            <a:r>
-              <a:rPr lang="en-US" sz="1350" b="1" dirty="0">
-                <a:solidFill>
-                  <a:srgbClr val="1B4F8C"/>
-                </a:solidFill>
-                <a:latin typeface="Calibri" pitchFamily="34" charset="0"/>
-                <a:ea typeface="Calibri" pitchFamily="34" charset="-122"/>
-                <a:cs typeface="Calibri" pitchFamily="34" charset="-120"/>
-              </a:rPr>
-              <a:t>Área gris + línea azul</a:t>
-            </a:r>
-            <a:endParaRPr lang="en-US" sz="1350" dirty="0"/>
-          </a:p>
-        </p:txBody>
-      </p:sp>
-      <p:sp>
-        <p:nvSpPr>
-          <p:cNvPr id="16" name="Text 14"/>
-          <p:cNvSpPr txBox="1"/>
-          <p:nvPr/>
-        </p:nvSpPr>
-        <p:spPr>
-          <a:xfrm>
-            <a:off x="3383280" y="3310128"/>
-            <a:ext cx="3017520" cy="640080"/>
-          </a:xfrm>
-          <a:prstGeom prst="rect">
-            <a:avLst/>
-          </a:prstGeom>
-          <a:noFill/>
-          <a:ln/>
-        </p:spPr>
-        <p:txBody>
-          <a:bodyPr wrap="square" lIns="0" tIns="0" rIns="0" bIns="0" rtlCol="0" anchor="t"/>
-          <a:lstStyle/>
-          <a:p>
-            <a:pPr indent="0" marL="0">
-              <a:lnSpc>
-                <a:spcPct val="105000"/>
-              </a:lnSpc>
-              <a:buNone/>
-            </a:pPr>
-            <a:r>
-              <a:rPr lang="en-US" sz="1150" dirty="0">
-                <a:solidFill>
-                  <a:srgbClr val="E07A16"/>
-                </a:solidFill>
-                <a:latin typeface="Calibri" pitchFamily="34" charset="0"/>
-                <a:ea typeface="Calibri" pitchFamily="34" charset="-122"/>
-                <a:cs typeface="Calibri" pitchFamily="34" charset="-120"/>
-              </a:rPr>
-              <a:t>dos líneas superpuestas</a:t>
-            </a:r>
-            <a:endParaRPr lang="en-US" sz="1150" dirty="0"/>
-          </a:p>
-        </p:txBody>
-      </p:sp>
-      <p:sp>
-        <p:nvSpPr>
-          <p:cNvPr id="17" name="Text 15"/>
-          <p:cNvSpPr txBox="1"/>
-          <p:nvPr/>
-        </p:nvSpPr>
-        <p:spPr>
-          <a:xfrm>
-            <a:off x="6537960" y="3310128"/>
-            <a:ext cx="4663440" cy="640080"/>
-          </a:xfrm>
-          <a:prstGeom prst="rect">
-            <a:avLst/>
-          </a:prstGeom>
-          <a:noFill/>
-          <a:ln/>
-        </p:spPr>
-        <p:txBody>
-          <a:bodyPr wrap="square" lIns="0" tIns="0" rIns="0" bIns="0" rtlCol="0" anchor="t"/>
-          <a:lstStyle/>
-          <a:p>
-            <a:pPr indent="0" marL="0">
-              <a:lnSpc>
-                <a:spcPct val="105000"/>
-              </a:lnSpc>
-              <a:buNone/>
-            </a:pPr>
-            <a:r>
-              <a:rPr lang="en-US" sz="1150" dirty="0">
-                <a:solidFill>
-                  <a:srgbClr val="1A1A1A"/>
-                </a:solidFill>
-                <a:latin typeface="Calibri" pitchFamily="34" charset="0"/>
-                <a:ea typeface="Calibri" pitchFamily="34" charset="-122"/>
-                <a:cs typeface="Calibri" pitchFamily="34" charset="-120"/>
-              </a:rPr>
-              <a:t>A 124 × 42 px la línea gris quedaba tapada y la comparación antes/después no se leía.</a:t>
-            </a:r>
-            <a:endParaRPr lang="en-US" sz="1150" dirty="0"/>
-          </a:p>
-        </p:txBody>
-      </p:sp>
-      <p:sp>
-        <p:nvSpPr>
-          <p:cNvPr id="18" name="Shape 16"/>
-          <p:cNvSpPr/>
-          <p:nvPr/>
-        </p:nvSpPr>
-        <p:spPr>
-          <a:xfrm>
-            <a:off x="822960" y="4169664"/>
-            <a:ext cx="10515600" cy="877824"/>
-          </a:xfrm>
-          <a:prstGeom prst="rect">
-            <a:avLst/>
-          </a:prstGeom>
-          <a:solidFill>
-            <a:srgbClr val="F7F9FB"/>
-          </a:solidFill>
-          <a:ln w="9525">
-            <a:solidFill>
-              <a:srgbClr val="D5D5D5"/>
-            </a:solidFill>
-            <a:prstDash val="solid"/>
-          </a:ln>
-        </p:spPr>
-      </p:sp>
-      <p:sp>
-        <p:nvSpPr>
-          <p:cNvPr id="19" name="Text 17"/>
-          <p:cNvSpPr txBox="1"/>
-          <p:nvPr/>
-        </p:nvSpPr>
-        <p:spPr>
-          <a:xfrm>
-            <a:off x="1005840" y="4297680"/>
-            <a:ext cx="2286000" cy="548640"/>
-          </a:xfrm>
-          <a:prstGeom prst="rect">
-            <a:avLst/>
-          </a:prstGeom>
-          <a:noFill/>
-          <a:ln/>
-        </p:spPr>
-        <p:txBody>
-          <a:bodyPr wrap="square" lIns="0" tIns="0" rIns="0" bIns="0" rtlCol="0" anchor="t"/>
-          <a:lstStyle/>
-          <a:p>
-            <a:pPr indent="0" marL="0">
-              <a:buNone/>
-            </a:pPr>
-            <a:r>
-              <a:rPr lang="en-US" sz="1350" b="1" dirty="0">
-                <a:solidFill>
-                  <a:srgbClr val="1B4F8C"/>
-                </a:solidFill>
-                <a:latin typeface="Calibri" pitchFamily="34" charset="0"/>
-                <a:ea typeface="Calibri" pitchFamily="34" charset="-122"/>
-                <a:cs typeface="Calibri" pitchFamily="34" charset="-120"/>
-              </a:rPr>
-              <a:t>Color divergente recortado</a:t>
-            </a:r>
-            <a:endParaRPr lang="en-US" sz="1350" dirty="0"/>
-          </a:p>
-        </p:txBody>
-      </p:sp>
-      <p:sp>
-        <p:nvSpPr>
-          <p:cNvPr id="20" name="Text 18"/>
-          <p:cNvSpPr txBox="1"/>
-          <p:nvPr/>
-        </p:nvSpPr>
-        <p:spPr>
-          <a:xfrm>
-            <a:off x="3383280" y="4297680"/>
-            <a:ext cx="3017520" cy="640080"/>
-          </a:xfrm>
-          <a:prstGeom prst="rect">
-            <a:avLst/>
-          </a:prstGeom>
-          <a:noFill/>
-          <a:ln/>
-        </p:spPr>
-        <p:txBody>
-          <a:bodyPr wrap="square" lIns="0" tIns="0" rIns="0" bIns="0" rtlCol="0" anchor="t"/>
-          <a:lstStyle/>
-          <a:p>
-            <a:pPr indent="0" marL="0">
-              <a:lnSpc>
-                <a:spcPct val="105000"/>
-              </a:lnSpc>
-              <a:buNone/>
-            </a:pPr>
-            <a:r>
-              <a:rPr lang="en-US" sz="1150" dirty="0">
-                <a:solidFill>
-                  <a:srgbClr val="E07A16"/>
-                </a:solidFill>
-                <a:latin typeface="Calibri" pitchFamily="34" charset="0"/>
-                <a:ea typeface="Calibri" pitchFamily="34" charset="-122"/>
-                <a:cs typeface="Calibri" pitchFamily="34" charset="-120"/>
-              </a:rPr>
-              <a:t>escala secuencial lineal</a:t>
-            </a:r>
-            <a:endParaRPr lang="en-US" sz="1150" dirty="0"/>
-          </a:p>
-        </p:txBody>
-      </p:sp>
-      <p:sp>
-        <p:nvSpPr>
-          <p:cNvPr id="21" name="Text 19"/>
-          <p:cNvSpPr txBox="1"/>
-          <p:nvPr/>
-        </p:nvSpPr>
-        <p:spPr>
-          <a:xfrm>
-            <a:off x="6537960" y="4297680"/>
-            <a:ext cx="4663440" cy="640080"/>
-          </a:xfrm>
-          <a:prstGeom prst="rect">
-            <a:avLst/>
-          </a:prstGeom>
-          <a:noFill/>
-          <a:ln/>
-        </p:spPr>
-        <p:txBody>
-          <a:bodyPr wrap="square" lIns="0" tIns="0" rIns="0" bIns="0" rtlCol="0" anchor="t"/>
-          <a:lstStyle/>
-          <a:p>
-            <a:pPr indent="0" marL="0">
-              <a:lnSpc>
-                <a:spcPct val="105000"/>
-              </a:lnSpc>
-              <a:buNone/>
-            </a:pPr>
-            <a:r>
-              <a:rPr lang="en-US" sz="1150" dirty="0">
-                <a:solidFill>
-                  <a:srgbClr val="1A1A1A"/>
-                </a:solidFill>
-                <a:latin typeface="Calibri" pitchFamily="34" charset="0"/>
-                <a:ea typeface="Calibri" pitchFamily="34" charset="-122"/>
-                <a:cs typeface="Calibri" pitchFamily="34" charset="-120"/>
-              </a:rPr>
-              <a:t>La recuperación es un valor respecto de una referencia. Recortado en p10–p90 porque unos extremos (287 %) comprimían el resto.</a:t>
-            </a:r>
-            <a:endParaRPr lang="en-US" sz="1150" dirty="0"/>
-          </a:p>
-        </p:txBody>
-      </p:sp>
-      <p:sp>
-        <p:nvSpPr>
-          <p:cNvPr id="22" name="Shape 20"/>
-          <p:cNvSpPr/>
-          <p:nvPr/>
-        </p:nvSpPr>
-        <p:spPr>
-          <a:xfrm>
-            <a:off x="822960" y="5157216"/>
-            <a:ext cx="10515600" cy="877824"/>
-          </a:xfrm>
-          <a:prstGeom prst="rect">
-            <a:avLst/>
-          </a:prstGeom>
-          <a:solidFill>
-            <a:srgbClr val="FFFFFF"/>
-          </a:solidFill>
-          <a:ln w="9525">
-            <a:solidFill>
-              <a:srgbClr val="D5D5D5"/>
-            </a:solidFill>
-            <a:prstDash val="solid"/>
-          </a:ln>
-        </p:spPr>
-      </p:sp>
-      <p:sp>
-        <p:nvSpPr>
-          <p:cNvPr id="23" name="Text 21"/>
-          <p:cNvSpPr txBox="1"/>
-          <p:nvPr/>
-        </p:nvSpPr>
-        <p:spPr>
-          <a:xfrm>
-            <a:off x="1005840" y="5285232"/>
-            <a:ext cx="2286000" cy="548640"/>
-          </a:xfrm>
-          <a:prstGeom prst="rect">
-            <a:avLst/>
-          </a:prstGeom>
-          <a:noFill/>
-          <a:ln/>
-        </p:spPr>
-        <p:txBody>
-          <a:bodyPr wrap="square" lIns="0" tIns="0" rIns="0" bIns="0" rtlCol="0" anchor="t"/>
-          <a:lstStyle/>
-          <a:p>
-            <a:pPr indent="0" marL="0">
-              <a:buNone/>
-            </a:pPr>
-            <a:r>
-              <a:rPr lang="en-US" sz="1350" b="1" dirty="0">
-                <a:solidFill>
-                  <a:srgbClr val="1B4F8C"/>
-                </a:solidFill>
-                <a:latin typeface="Calibri" pitchFamily="34" charset="0"/>
-                <a:ea typeface="Calibri" pitchFamily="34" charset="-122"/>
-                <a:cs typeface="Calibri" pitchFamily="34" charset="-120"/>
-              </a:rPr>
-              <a:t>Dispersión en escala log</a:t>
-            </a:r>
-            <a:endParaRPr lang="en-US" sz="1350" dirty="0"/>
-          </a:p>
-        </p:txBody>
-      </p:sp>
-      <p:sp>
-        <p:nvSpPr>
-          <p:cNvPr id="24" name="Text 22"/>
-          <p:cNvSpPr txBox="1"/>
-          <p:nvPr/>
-        </p:nvSpPr>
-        <p:spPr>
-          <a:xfrm>
-            <a:off x="3383280" y="5285232"/>
-            <a:ext cx="3017520" cy="640080"/>
-          </a:xfrm>
-          <a:prstGeom prst="rect">
-            <a:avLst/>
-          </a:prstGeom>
-          <a:noFill/>
-          <a:ln/>
-        </p:spPr>
-        <p:txBody>
-          <a:bodyPr wrap="square" lIns="0" tIns="0" rIns="0" bIns="0" rtlCol="0" anchor="t"/>
-          <a:lstStyle/>
-          <a:p>
-            <a:pPr indent="0" marL="0">
-              <a:lnSpc>
-                <a:spcPct val="105000"/>
-              </a:lnSpc>
-              <a:buNone/>
-            </a:pPr>
-            <a:r>
-              <a:rPr lang="en-US" sz="1150" dirty="0">
-                <a:solidFill>
-                  <a:srgbClr val="E07A16"/>
-                </a:solidFill>
-                <a:latin typeface="Calibri" pitchFamily="34" charset="0"/>
-                <a:ea typeface="Calibri" pitchFamily="34" charset="-122"/>
-                <a:cs typeface="Calibri" pitchFamily="34" charset="-120"/>
-              </a:rPr>
-              <a:t>barras de la diferencia</a:t>
-            </a:r>
-            <a:endParaRPr lang="en-US" sz="1150" dirty="0"/>
-          </a:p>
-        </p:txBody>
-      </p:sp>
-      <p:sp>
-        <p:nvSpPr>
-          <p:cNvPr id="25" name="Text 23"/>
-          <p:cNvSpPr txBox="1"/>
-          <p:nvPr/>
-        </p:nvSpPr>
-        <p:spPr>
-          <a:xfrm>
-            <a:off x="6537960" y="5285232"/>
-            <a:ext cx="4663440" cy="640080"/>
-          </a:xfrm>
-          <a:prstGeom prst="rect">
-            <a:avLst/>
-          </a:prstGeom>
-          <a:noFill/>
-          <a:ln/>
-        </p:spPr>
-        <p:txBody>
-          <a:bodyPr wrap="square" lIns="0" tIns="0" rIns="0" bIns="0" rtlCol="0" anchor="t"/>
-          <a:lstStyle/>
-          <a:p>
-            <a:pPr indent="0" marL="0">
-              <a:lnSpc>
-                <a:spcPct val="105000"/>
-              </a:lnSpc>
-              <a:buNone/>
-            </a:pPr>
-            <a:r>
-              <a:rPr lang="en-US" sz="1150" dirty="0">
-                <a:solidFill>
-                  <a:srgbClr val="1A1A1A"/>
-                </a:solidFill>
-                <a:latin typeface="Calibri" pitchFamily="34" charset="0"/>
-                <a:ea typeface="Calibri" pitchFamily="34" charset="-122"/>
-                <a:cs typeface="Calibri" pitchFamily="34" charset="-120"/>
-              </a:rPr>
-              <a:t>Pico/valle es una razón. Las barras pierden el nivel de partida: ir de 6 a 5 no es lo mismo que ir de 2 a 1.</a:t>
-            </a:r>
-            <a:endParaRPr lang="en-US" sz="1150" dirty="0"/>
-          </a:p>
-        </p:txBody>
-      </p:sp>
-      <p:sp>
-        <p:nvSpPr>
-          <p:cNvPr id="26" name="Text 24"/>
-          <p:cNvSpPr txBox="1"/>
-          <p:nvPr/>
-        </p:nvSpPr>
-        <p:spPr>
-          <a:xfrm>
-            <a:off x="1005840" y="978408"/>
-            <a:ext cx="2286000" cy="201168"/>
-          </a:xfrm>
-          <a:prstGeom prst="rect">
-            <a:avLst/>
-          </a:prstGeom>
-          <a:noFill/>
-          <a:ln/>
-        </p:spPr>
-        <p:txBody>
-          <a:bodyPr wrap="square" lIns="0" tIns="0" rIns="0" bIns="0" rtlCol="0" anchor="ctr"/>
-          <a:lstStyle/>
-          <a:p>
-            <a:pPr indent="0" marL="0">
-              <a:buNone/>
-            </a:pPr>
-            <a:r>
-              <a:rPr lang="en-US" sz="1000" b="1" spc="100" kern="0" dirty="0">
-                <a:solidFill>
-                  <a:srgbClr val="5A5A5A"/>
-                </a:solidFill>
-                <a:latin typeface="Calibri" pitchFamily="34" charset="0"/>
-                <a:ea typeface="Calibri" pitchFamily="34" charset="-122"/>
-                <a:cs typeface="Calibri" pitchFamily="34" charset="-120"/>
-              </a:rPr>
-              <a:t>ELEGIMOS</a:t>
-            </a:r>
-            <a:endParaRPr lang="en-US" sz="1000" dirty="0"/>
-          </a:p>
-        </p:txBody>
-      </p:sp>
-      <p:sp>
-        <p:nvSpPr>
-          <p:cNvPr id="27" name="Text 25"/>
-          <p:cNvSpPr txBox="1"/>
-          <p:nvPr/>
-        </p:nvSpPr>
-        <p:spPr>
-          <a:xfrm>
-            <a:off x="3383280" y="978408"/>
-            <a:ext cx="3017520" cy="201168"/>
-          </a:xfrm>
-          <a:prstGeom prst="rect">
-            <a:avLst/>
-          </a:prstGeom>
-          <a:noFill/>
-          <a:ln/>
-        </p:spPr>
-        <p:txBody>
-          <a:bodyPr wrap="square" lIns="0" tIns="0" rIns="0" bIns="0" rtlCol="0" anchor="ctr"/>
-          <a:lstStyle/>
-          <a:p>
-            <a:pPr indent="0" marL="0">
-              <a:buNone/>
-            </a:pPr>
-            <a:r>
-              <a:rPr lang="en-US" sz="1000" b="1" spc="100" kern="0" dirty="0">
-                <a:solidFill>
-                  <a:srgbClr val="5A5A5A"/>
-                </a:solidFill>
-                <a:latin typeface="Calibri" pitchFamily="34" charset="0"/>
-                <a:ea typeface="Calibri" pitchFamily="34" charset="-122"/>
-                <a:cs typeface="Calibri" pitchFamily="34" charset="-120"/>
-              </a:rPr>
-              <a:t>DESCARTAMOS</a:t>
-            </a:r>
-            <a:endParaRPr lang="en-US" sz="1000" dirty="0"/>
-          </a:p>
-        </p:txBody>
-      </p:sp>
-      <p:sp>
-        <p:nvSpPr>
-          <p:cNvPr id="28" name="Text 26"/>
-          <p:cNvSpPr txBox="1"/>
-          <p:nvPr/>
-        </p:nvSpPr>
-        <p:spPr>
-          <a:xfrm>
-            <a:off x="6537960" y="978408"/>
-            <a:ext cx="4663440" cy="201168"/>
-          </a:xfrm>
-          <a:prstGeom prst="rect">
-            <a:avLst/>
-          </a:prstGeom>
-          <a:noFill/>
-          <a:ln/>
-        </p:spPr>
-        <p:txBody>
-          <a:bodyPr wrap="square" lIns="0" tIns="0" rIns="0" bIns="0" rtlCol="0" anchor="ctr"/>
-          <a:lstStyle/>
-          <a:p>
-            <a:pPr indent="0" marL="0">
-              <a:buNone/>
-            </a:pPr>
-            <a:r>
-              <a:rPr lang="en-US" sz="1000" b="1" spc="100" kern="0" dirty="0">
-                <a:solidFill>
-                  <a:srgbClr val="5A5A5A"/>
-                </a:solidFill>
-                <a:latin typeface="Calibri" pitchFamily="34" charset="0"/>
-                <a:ea typeface="Calibri" pitchFamily="34" charset="-122"/>
-                <a:cs typeface="Calibri" pitchFamily="34" charset="-120"/>
-              </a:rPr>
-              <a:t>POR QUÉ</a:t>
-            </a:r>
-            <a:endParaRPr lang="en-US" sz="1000" dirty="0"/>
+              <a:t>La clave visual dice qué significa cada marca y qué no: "más azul no es mejor".</a:t>
+            </a:r>
+            <a:endParaRPr lang="en-US" sz="1250" dirty="0"/>
           </a:p>
         </p:txBody>
       </p:sp>
@@ -4324,7 +4537,7 @@
                 <a:ea typeface="Calibri" pitchFamily="34" charset="-122"/>
                 <a:cs typeface="Calibri" pitchFamily="34" charset="-120"/>
               </a:rPr>
-              <a:t>La decisión que invirtió la conclusión</a:t>
+              <a:t>Decisiones de diseño y alternativas descartadas</a:t>
             </a:r>
             <a:endParaRPr lang="en-US" sz="2400" dirty="0"/>
           </a:p>
@@ -4378,24 +4591,247 @@
         </p:nvSpPr>
         <p:spPr>
           <a:xfrm>
+            <a:off x="1005840" y="1024128"/>
+            <a:ext cx="2377440" cy="201168"/>
+          </a:xfrm>
+          <a:prstGeom prst="rect">
+            <a:avLst/>
+          </a:prstGeom>
+          <a:noFill/>
+          <a:ln/>
+        </p:spPr>
+        <p:txBody>
+          <a:bodyPr wrap="square" lIns="0" tIns="0" rIns="0" bIns="0" rtlCol="0" anchor="ctr"/>
+          <a:lstStyle/>
+          <a:p>
+            <a:pPr indent="0" marL="0">
+              <a:buNone/>
+            </a:pPr>
+            <a:r>
+              <a:rPr lang="en-US" sz="1000" b="1" spc="100" kern="0" dirty="0">
+                <a:solidFill>
+                  <a:srgbClr val="5A5A5A"/>
+                </a:solidFill>
+                <a:latin typeface="Calibri" pitchFamily="34" charset="0"/>
+                <a:ea typeface="Calibri" pitchFamily="34" charset="-122"/>
+                <a:cs typeface="Calibri" pitchFamily="34" charset="-120"/>
+              </a:rPr>
+              <a:t>ELEGIMOS</a:t>
+            </a:r>
+            <a:endParaRPr lang="en-US" sz="1000" dirty="0"/>
+          </a:p>
+        </p:txBody>
+      </p:sp>
+      <p:sp>
+        <p:nvSpPr>
+          <p:cNvPr id="7" name="Text 5"/>
+          <p:cNvSpPr txBox="1"/>
+          <p:nvPr/>
+        </p:nvSpPr>
+        <p:spPr>
+          <a:xfrm>
+            <a:off x="3474720" y="1024128"/>
+            <a:ext cx="2560320" cy="201168"/>
+          </a:xfrm>
+          <a:prstGeom prst="rect">
+            <a:avLst/>
+          </a:prstGeom>
+          <a:noFill/>
+          <a:ln/>
+        </p:spPr>
+        <p:txBody>
+          <a:bodyPr wrap="square" lIns="0" tIns="0" rIns="0" bIns="0" rtlCol="0" anchor="ctr"/>
+          <a:lstStyle/>
+          <a:p>
+            <a:pPr indent="0" marL="0">
+              <a:buNone/>
+            </a:pPr>
+            <a:r>
+              <a:rPr lang="en-US" sz="1000" b="1" spc="100" kern="0" dirty="0">
+                <a:solidFill>
+                  <a:srgbClr val="5A5A5A"/>
+                </a:solidFill>
+                <a:latin typeface="Calibri" pitchFamily="34" charset="0"/>
+                <a:ea typeface="Calibri" pitchFamily="34" charset="-122"/>
+                <a:cs typeface="Calibri" pitchFamily="34" charset="-120"/>
+              </a:rPr>
+              <a:t>DESCARTAMOS</a:t>
+            </a:r>
+            <a:endParaRPr lang="en-US" sz="1000" dirty="0"/>
+          </a:p>
+        </p:txBody>
+      </p:sp>
+      <p:sp>
+        <p:nvSpPr>
+          <p:cNvPr id="8" name="Text 6"/>
+          <p:cNvSpPr txBox="1"/>
+          <p:nvPr/>
+        </p:nvSpPr>
+        <p:spPr>
+          <a:xfrm>
+            <a:off x="6126480" y="1024128"/>
+            <a:ext cx="5120640" cy="201168"/>
+          </a:xfrm>
+          <a:prstGeom prst="rect">
+            <a:avLst/>
+          </a:prstGeom>
+          <a:noFill/>
+          <a:ln/>
+        </p:spPr>
+        <p:txBody>
+          <a:bodyPr wrap="square" lIns="0" tIns="0" rIns="0" bIns="0" rtlCol="0" anchor="ctr"/>
+          <a:lstStyle/>
+          <a:p>
+            <a:pPr indent="0" marL="0">
+              <a:buNone/>
+            </a:pPr>
+            <a:r>
+              <a:rPr lang="en-US" sz="1000" b="1" spc="100" kern="0" dirty="0">
+                <a:solidFill>
+                  <a:srgbClr val="5A5A5A"/>
+                </a:solidFill>
+                <a:latin typeface="Calibri" pitchFamily="34" charset="0"/>
+                <a:ea typeface="Calibri" pitchFamily="34" charset="-122"/>
+                <a:cs typeface="Calibri" pitchFamily="34" charset="-120"/>
+              </a:rPr>
+              <a:t>POR QUÉ</a:t>
+            </a:r>
+            <a:endParaRPr lang="en-US" sz="1000" dirty="0"/>
+          </a:p>
+        </p:txBody>
+      </p:sp>
+      <p:sp>
+        <p:nvSpPr>
+          <p:cNvPr id="9" name="Shape 7"/>
+          <p:cNvSpPr/>
+          <p:nvPr/>
+        </p:nvSpPr>
+        <p:spPr>
+          <a:xfrm>
             <a:off x="822960" y="1280160"/>
-            <a:ext cx="10515600" cy="365760"/>
-          </a:xfrm>
-          <a:prstGeom prst="rect">
-            <a:avLst/>
-          </a:prstGeom>
-          <a:noFill/>
-          <a:ln/>
-        </p:spPr>
-        <p:txBody>
-          <a:bodyPr wrap="square" lIns="0" tIns="0" rIns="0" bIns="0" rtlCol="0" anchor="ctr"/>
-          <a:lstStyle/>
-          <a:p>
-            <a:pPr indent="0" marL="0">
-              <a:buNone/>
-            </a:pPr>
-            <a:r>
-              <a:rPr lang="en-US" sz="1700" b="1" dirty="0">
+            <a:ext cx="10515600" cy="731520"/>
+          </a:xfrm>
+          <a:prstGeom prst="rect">
+            <a:avLst/>
+          </a:prstGeom>
+          <a:solidFill>
+            <a:srgbClr val="FFFFFF"/>
+          </a:solidFill>
+          <a:ln w="9525">
+            <a:solidFill>
+              <a:srgbClr val="D5D5D5"/>
+            </a:solidFill>
+            <a:prstDash val="solid"/>
+          </a:ln>
+        </p:spPr>
+      </p:sp>
+      <p:sp>
+        <p:nvSpPr>
+          <p:cNvPr id="10" name="Text 8"/>
+          <p:cNvSpPr txBox="1"/>
+          <p:nvPr/>
+        </p:nvSpPr>
+        <p:spPr>
+          <a:xfrm>
+            <a:off x="1005840" y="1389888"/>
+            <a:ext cx="2377440" cy="548640"/>
+          </a:xfrm>
+          <a:prstGeom prst="rect">
+            <a:avLst/>
+          </a:prstGeom>
+          <a:noFill/>
+          <a:ln/>
+        </p:spPr>
+        <p:txBody>
+          <a:bodyPr wrap="square" lIns="0" tIns="0" rIns="0" bIns="0" rtlCol="0" anchor="t"/>
+          <a:lstStyle/>
+          <a:p>
+            <a:pPr indent="0" marL="0">
+              <a:buNone/>
+            </a:pPr>
+            <a:r>
+              <a:rPr lang="en-US" sz="1250" b="1" dirty="0">
+                <a:solidFill>
+                  <a:srgbClr val="1B4F8C"/>
+                </a:solidFill>
+                <a:latin typeface="Calibri" pitchFamily="34" charset="0"/>
+                <a:ea typeface="Calibri" pitchFamily="34" charset="-122"/>
+                <a:cs typeface="Calibri" pitchFamily="34" charset="-120"/>
+              </a:rPr>
+              <a:t>Argumento + explorador</a:t>
+            </a:r>
+            <a:endParaRPr lang="en-US" sz="1250" dirty="0"/>
+          </a:p>
+        </p:txBody>
+      </p:sp>
+      <p:sp>
+        <p:nvSpPr>
+          <p:cNvPr id="11" name="Text 9"/>
+          <p:cNvSpPr txBox="1"/>
+          <p:nvPr/>
+        </p:nvSpPr>
+        <p:spPr>
+          <a:xfrm>
+            <a:off x="3474720" y="1389888"/>
+            <a:ext cx="2560320" cy="548640"/>
+          </a:xfrm>
+          <a:prstGeom prst="rect">
+            <a:avLst/>
+          </a:prstGeom>
+          <a:noFill/>
+          <a:ln/>
+        </p:spPr>
+        <p:txBody>
+          <a:bodyPr wrap="square" lIns="0" tIns="0" rIns="0" bIns="0" rtlCol="0" anchor="t"/>
+          <a:lstStyle/>
+          <a:p>
+            <a:pPr indent="0" marL="0">
+              <a:buNone/>
+            </a:pPr>
+            <a:r>
+              <a:rPr lang="en-US" sz="1150" dirty="0">
+                <a:solidFill>
+                  <a:srgbClr val="E07A16"/>
+                </a:solidFill>
+                <a:latin typeface="Calibri" pitchFamily="34" charset="0"/>
+                <a:ea typeface="Calibri" pitchFamily="34" charset="-122"/>
+                <a:cs typeface="Calibri" pitchFamily="34" charset="-120"/>
+              </a:rPr>
+              <a:t>cuatro paneles en una pantalla</a:t>
+            </a:r>
+            <a:endParaRPr lang="en-US" sz="1150" dirty="0"/>
+          </a:p>
+        </p:txBody>
+      </p:sp>
+      <p:sp>
+        <p:nvSpPr>
+          <p:cNvPr id="12" name="Text 10"/>
+          <p:cNvSpPr txBox="1"/>
+          <p:nvPr/>
+        </p:nvSpPr>
+        <p:spPr>
+          <a:xfrm>
+            <a:off x="6126480" y="1389888"/>
+            <a:ext cx="5120640" cy="548640"/>
+          </a:xfrm>
+          <a:prstGeom prst="rect">
+            <a:avLst/>
+          </a:prstGeom>
+          <a:noFill/>
+          <a:ln/>
+        </p:spPr>
+        <p:txBody>
+          <a:bodyPr wrap="square" lIns="0" tIns="0" rIns="0" bIns="0" rtlCol="0" anchor="t"/>
+          <a:lstStyle/>
+          <a:p>
+            <a:pPr indent="0" marL="0">
+              <a:lnSpc>
+                <a:spcPct val="105000"/>
+              </a:lnSpc>
+              <a:buNone/>
+            </a:pPr>
+            <a:r>
+              <a:rPr lang="en-US" sz="1100" dirty="0">
                 <a:solidFill>
                   <a:srgbClr val="1A1A1A"/>
                 </a:solidFill>
@@ -4403,195 +4839,247 @@
                 <a:ea typeface="Calibri" pitchFamily="34" charset="-122"/>
                 <a:cs typeface="Calibri" pitchFamily="34" charset="-120"/>
               </a:rPr>
-              <a:t>La línea base es enero–febrero de 2020, no el año 2020 completo.</a:t>
-            </a:r>
-            <a:endParaRPr lang="en-US" sz="1700" dirty="0"/>
-          </a:p>
-        </p:txBody>
-      </p:sp>
-      <p:sp>
-        <p:nvSpPr>
-          <p:cNvPr id="7" name="Shape 5"/>
+              <a:t>Funcionaban y no contaban nada. Estructura tomada de FINO (VAST 2026): preguntas como títulos, hallazgos como frases, evidencia a un clic.</a:t>
+            </a:r>
+            <a:endParaRPr lang="en-US" sz="1100" dirty="0"/>
+          </a:p>
+        </p:txBody>
+      </p:sp>
+      <p:sp>
+        <p:nvSpPr>
+          <p:cNvPr id="13" name="Shape 11"/>
           <p:cNvSpPr/>
           <p:nvPr/>
         </p:nvSpPr>
         <p:spPr>
           <a:xfrm>
-            <a:off x="822960" y="1874520"/>
-            <a:ext cx="5029200" cy="1371600"/>
+            <a:off x="822960" y="2103120"/>
+            <a:ext cx="10515600" cy="731520"/>
           </a:xfrm>
           <a:prstGeom prst="rect">
             <a:avLst/>
           </a:prstGeom>
           <a:solidFill>
-            <a:srgbClr val="F7F7F7"/>
+            <a:srgbClr val="F7F9FB"/>
           </a:solidFill>
-          <a:ln/>
-        </p:spPr>
-      </p:sp>
-      <p:sp>
-        <p:nvSpPr>
-          <p:cNvPr id="8" name="Text 6"/>
-          <p:cNvSpPr txBox="1"/>
-          <p:nvPr/>
-        </p:nvSpPr>
-        <p:spPr>
-          <a:xfrm>
-            <a:off x="1051560" y="2029968"/>
-            <a:ext cx="4572000" cy="274320"/>
-          </a:xfrm>
-          <a:prstGeom prst="rect">
-            <a:avLst/>
-          </a:prstGeom>
-          <a:noFill/>
-          <a:ln/>
-        </p:spPr>
-        <p:txBody>
-          <a:bodyPr wrap="square" lIns="0" tIns="0" rIns="0" bIns="0" rtlCol="0" anchor="ctr"/>
-          <a:lstStyle/>
-          <a:p>
-            <a:pPr indent="0" marL="0">
-              <a:buNone/>
-            </a:pPr>
-            <a:r>
-              <a:rPr lang="en-US" sz="1200" b="1" dirty="0">
-                <a:solidFill>
-                  <a:srgbClr val="5A5A5A"/>
-                </a:solidFill>
-                <a:latin typeface="Calibri" pitchFamily="34" charset="0"/>
-                <a:ea typeface="Calibri" pitchFamily="34" charset="-122"/>
-                <a:cs typeface="Calibri" pitchFamily="34" charset="-120"/>
-              </a:rPr>
-              <a:t>Contra el año 2020 completo</a:t>
-            </a:r>
-            <a:endParaRPr lang="en-US" sz="1200" dirty="0"/>
-          </a:p>
-        </p:txBody>
-      </p:sp>
-      <p:sp>
-        <p:nvSpPr>
-          <p:cNvPr id="9" name="Text 7"/>
-          <p:cNvSpPr txBox="1"/>
-          <p:nvPr/>
-        </p:nvSpPr>
-        <p:spPr>
-          <a:xfrm>
-            <a:off x="1051560" y="2331720"/>
-            <a:ext cx="4572000" cy="457200"/>
-          </a:xfrm>
-          <a:prstGeom prst="rect">
-            <a:avLst/>
-          </a:prstGeom>
-          <a:noFill/>
-          <a:ln/>
-        </p:spPr>
-        <p:txBody>
-          <a:bodyPr wrap="square" lIns="0" tIns="0" rIns="0" bIns="0" rtlCol="0" anchor="ctr"/>
-          <a:lstStyle/>
-          <a:p>
-            <a:pPr indent="0" marL="0">
-              <a:buNone/>
-            </a:pPr>
-            <a:r>
-              <a:rPr lang="en-US" sz="2600" b="1" dirty="0">
-                <a:solidFill>
-                  <a:srgbClr val="5A5A5A"/>
-                </a:solidFill>
-                <a:latin typeface="Calibri" pitchFamily="34" charset="0"/>
-                <a:ea typeface="Calibri" pitchFamily="34" charset="-122"/>
-                <a:cs typeface="Calibri" pitchFamily="34" charset="-120"/>
-              </a:rPr>
-              <a:t>2.34  →  2.35</a:t>
-            </a:r>
-            <a:endParaRPr lang="en-US" sz="2600" dirty="0"/>
-          </a:p>
-        </p:txBody>
-      </p:sp>
-      <p:sp>
-        <p:nvSpPr>
-          <p:cNvPr id="10" name="Text 8"/>
-          <p:cNvSpPr txBox="1"/>
-          <p:nvPr/>
-        </p:nvSpPr>
-        <p:spPr>
-          <a:xfrm>
-            <a:off x="1051560" y="2816352"/>
-            <a:ext cx="4572000" cy="274320"/>
-          </a:xfrm>
-          <a:prstGeom prst="rect">
-            <a:avLst/>
-          </a:prstGeom>
-          <a:noFill/>
-          <a:ln/>
-        </p:spPr>
-        <p:txBody>
-          <a:bodyPr wrap="square" lIns="0" tIns="0" rIns="0" bIns="0" rtlCol="0" anchor="ctr"/>
-          <a:lstStyle/>
-          <a:p>
-            <a:pPr indent="0" marL="0">
-              <a:buNone/>
-            </a:pPr>
-            <a:r>
-              <a:rPr lang="en-US" sz="1300" i="1" dirty="0">
-                <a:solidFill>
-                  <a:srgbClr val="5A5A5A"/>
-                </a:solidFill>
-                <a:latin typeface="Calibri" pitchFamily="34" charset="0"/>
-                <a:ea typeface="Calibri" pitchFamily="34" charset="-122"/>
-                <a:cs typeface="Calibri" pitchFamily="34" charset="-120"/>
-              </a:rPr>
-              <a:t>no habría pasado nada</a:t>
-            </a:r>
-            <a:endParaRPr lang="en-US" sz="1300" dirty="0"/>
-          </a:p>
-        </p:txBody>
-      </p:sp>
-      <p:sp>
-        <p:nvSpPr>
-          <p:cNvPr id="11" name="Shape 9"/>
+          <a:ln w="9525">
+            <a:solidFill>
+              <a:srgbClr val="D5D5D5"/>
+            </a:solidFill>
+            <a:prstDash val="solid"/>
+          </a:ln>
+        </p:spPr>
+      </p:sp>
+      <p:sp>
+        <p:nvSpPr>
+          <p:cNvPr id="14" name="Text 12"/>
+          <p:cNvSpPr txBox="1"/>
+          <p:nvPr/>
+        </p:nvSpPr>
+        <p:spPr>
+          <a:xfrm>
+            <a:off x="1005840" y="2212848"/>
+            <a:ext cx="2377440" cy="548640"/>
+          </a:xfrm>
+          <a:prstGeom prst="rect">
+            <a:avLst/>
+          </a:prstGeom>
+          <a:noFill/>
+          <a:ln/>
+        </p:spPr>
+        <p:txBody>
+          <a:bodyPr wrap="square" lIns="0" tIns="0" rIns="0" bIns="0" rtlCol="0" anchor="t"/>
+          <a:lstStyle/>
+          <a:p>
+            <a:pPr indent="0" marL="0">
+              <a:buNone/>
+            </a:pPr>
+            <a:r>
+              <a:rPr lang="en-US" sz="1250" b="1" dirty="0">
+                <a:solidFill>
+                  <a:srgbClr val="1B4F8C"/>
+                </a:solidFill>
+                <a:latin typeface="Calibri" pitchFamily="34" charset="0"/>
+                <a:ea typeface="Calibri" pitchFamily="34" charset="-122"/>
+                <a:cs typeface="Calibri" pitchFamily="34" charset="-120"/>
+              </a:rPr>
+              <a:t>Tipología por asimetría AM/PM</a:t>
+            </a:r>
+            <a:endParaRPr lang="en-US" sz="1250" dirty="0"/>
+          </a:p>
+        </p:txBody>
+      </p:sp>
+      <p:sp>
+        <p:nvSpPr>
+          <p:cNvPr id="15" name="Text 13"/>
+          <p:cNvSpPr txBox="1"/>
+          <p:nvPr/>
+        </p:nvSpPr>
+        <p:spPr>
+          <a:xfrm>
+            <a:off x="3474720" y="2212848"/>
+            <a:ext cx="2560320" cy="548640"/>
+          </a:xfrm>
+          <a:prstGeom prst="rect">
+            <a:avLst/>
+          </a:prstGeom>
+          <a:noFill/>
+          <a:ln/>
+        </p:spPr>
+        <p:txBody>
+          <a:bodyPr wrap="square" lIns="0" tIns="0" rIns="0" bIns="0" rtlCol="0" anchor="t"/>
+          <a:lstStyle/>
+          <a:p>
+            <a:pPr indent="0" marL="0">
+              <a:buNone/>
+            </a:pPr>
+            <a:r>
+              <a:rPr lang="en-US" sz="1150" dirty="0">
+                <a:solidFill>
+                  <a:srgbClr val="E07A16"/>
+                </a:solidFill>
+                <a:latin typeface="Calibri" pitchFamily="34" charset="0"/>
+                <a:ea typeface="Calibri" pitchFamily="34" charset="-122"/>
+                <a:cs typeface="Calibri" pitchFamily="34" charset="-120"/>
+              </a:rPr>
+              <a:t>clustering de los 168 valores</a:t>
+            </a:r>
+            <a:endParaRPr lang="en-US" sz="1150" dirty="0"/>
+          </a:p>
+        </p:txBody>
+      </p:sp>
+      <p:sp>
+        <p:nvSpPr>
+          <p:cNvPr id="16" name="Text 14"/>
+          <p:cNvSpPr txBox="1"/>
+          <p:nvPr/>
+        </p:nvSpPr>
+        <p:spPr>
+          <a:xfrm>
+            <a:off x="6126480" y="2212848"/>
+            <a:ext cx="5120640" cy="548640"/>
+          </a:xfrm>
+          <a:prstGeom prst="rect">
+            <a:avLst/>
+          </a:prstGeom>
+          <a:noFill/>
+          <a:ln/>
+        </p:spPr>
+        <p:txBody>
+          <a:bodyPr wrap="square" lIns="0" tIns="0" rIns="0" bIns="0" rtlCol="0" anchor="t"/>
+          <a:lstStyle/>
+          <a:p>
+            <a:pPr indent="0" marL="0">
+              <a:lnSpc>
+                <a:spcPct val="105000"/>
+              </a:lnSpc>
+              <a:buNone/>
+            </a:pPr>
+            <a:r>
+              <a:rPr lang="en-US" sz="1100" dirty="0">
+                <a:solidFill>
+                  <a:srgbClr val="1A1A1A"/>
+                </a:solidFill>
+                <a:latin typeface="Calibri" pitchFamily="34" charset="0"/>
+                <a:ea typeface="Calibri" pitchFamily="34" charset="-122"/>
+                <a:cs typeface="Calibri" pitchFamily="34" charset="-120"/>
+              </a:rPr>
+              <a:t>Tiene significado físico (salir de casa / salir del trabajo), es un número por estación y se explica en una frase.</a:t>
+            </a:r>
+            <a:endParaRPr lang="en-US" sz="1100" dirty="0"/>
+          </a:p>
+        </p:txBody>
+      </p:sp>
+      <p:sp>
+        <p:nvSpPr>
+          <p:cNvPr id="17" name="Shape 15"/>
           <p:cNvSpPr/>
           <p:nvPr/>
         </p:nvSpPr>
         <p:spPr>
           <a:xfrm>
-            <a:off x="6309360" y="1874520"/>
-            <a:ext cx="5029200" cy="1371600"/>
+            <a:off x="822960" y="2926080"/>
+            <a:ext cx="10515600" cy="731520"/>
           </a:xfrm>
           <a:prstGeom prst="rect">
             <a:avLst/>
           </a:prstGeom>
           <a:solidFill>
-            <a:srgbClr val="FBEDE0"/>
+            <a:srgbClr val="FFFFFF"/>
           </a:solidFill>
-          <a:ln/>
-        </p:spPr>
-      </p:sp>
-      <p:sp>
-        <p:nvSpPr>
-          <p:cNvPr id="12" name="Text 10"/>
-          <p:cNvSpPr txBox="1"/>
-          <p:nvPr/>
-        </p:nvSpPr>
-        <p:spPr>
-          <a:xfrm>
-            <a:off x="6537960" y="2029968"/>
-            <a:ext cx="4572000" cy="274320"/>
-          </a:xfrm>
-          <a:prstGeom prst="rect">
-            <a:avLst/>
-          </a:prstGeom>
-          <a:noFill/>
-          <a:ln/>
-        </p:spPr>
-        <p:txBody>
-          <a:bodyPr wrap="square" lIns="0" tIns="0" rIns="0" bIns="0" rtlCol="0" anchor="ctr"/>
-          <a:lstStyle/>
-          <a:p>
-            <a:pPr indent="0" marL="0">
-              <a:buNone/>
-            </a:pPr>
-            <a:r>
-              <a:rPr lang="en-US" sz="1200" b="1" dirty="0">
+          <a:ln w="9525">
+            <a:solidFill>
+              <a:srgbClr val="D5D5D5"/>
+            </a:solidFill>
+            <a:prstDash val="solid"/>
+          </a:ln>
+        </p:spPr>
+      </p:sp>
+      <p:sp>
+        <p:nvSpPr>
+          <p:cNvPr id="18" name="Text 16"/>
+          <p:cNvSpPr txBox="1"/>
+          <p:nvPr/>
+        </p:nvSpPr>
+        <p:spPr>
+          <a:xfrm>
+            <a:off x="1005840" y="3035808"/>
+            <a:ext cx="2377440" cy="548640"/>
+          </a:xfrm>
+          <a:prstGeom prst="rect">
+            <a:avLst/>
+          </a:prstGeom>
+          <a:noFill/>
+          <a:ln/>
+        </p:spPr>
+        <p:txBody>
+          <a:bodyPr wrap="square" lIns="0" tIns="0" rIns="0" bIns="0" rtlCol="0" anchor="t"/>
+          <a:lstStyle/>
+          <a:p>
+            <a:pPr indent="0" marL="0">
+              <a:buNone/>
+            </a:pPr>
+            <a:r>
+              <a:rPr lang="en-US" sz="1250" b="1" dirty="0">
+                <a:solidFill>
+                  <a:srgbClr val="1B4F8C"/>
+                </a:solidFill>
+                <a:latin typeface="Calibri" pitchFamily="34" charset="0"/>
+                <a:ea typeface="Calibri" pitchFamily="34" charset="-122"/>
+                <a:cs typeface="Calibri" pitchFamily="34" charset="-120"/>
+              </a:rPr>
+              <a:t>Marcar la confiabilidad</a:t>
+            </a:r>
+            <a:endParaRPr lang="en-US" sz="1250" dirty="0"/>
+          </a:p>
+        </p:txBody>
+      </p:sp>
+      <p:sp>
+        <p:nvSpPr>
+          <p:cNvPr id="19" name="Text 17"/>
+          <p:cNvSpPr txBox="1"/>
+          <p:nvPr/>
+        </p:nvSpPr>
+        <p:spPr>
+          <a:xfrm>
+            <a:off x="3474720" y="3035808"/>
+            <a:ext cx="2560320" cy="548640"/>
+          </a:xfrm>
+          <a:prstGeom prst="rect">
+            <a:avLst/>
+          </a:prstGeom>
+          <a:noFill/>
+          <a:ln/>
+        </p:spPr>
+        <p:txBody>
+          <a:bodyPr wrap="square" lIns="0" tIns="0" rIns="0" bIns="0" rtlCol="0" anchor="t"/>
+          <a:lstStyle/>
+          <a:p>
+            <a:pPr indent="0" marL="0">
+              <a:buNone/>
+            </a:pPr>
+            <a:r>
+              <a:rPr lang="en-US" sz="1150" dirty="0">
                 <a:solidFill>
                   <a:srgbClr val="E07A16"/>
                 </a:solidFill>
@@ -4599,38 +5087,144 @@
                 <a:ea typeface="Calibri" pitchFamily="34" charset="-122"/>
                 <a:cs typeface="Calibri" pitchFamily="34" charset="-120"/>
               </a:rPr>
-              <a:t>Contra enero–febrero de 2020</a:t>
-            </a:r>
-            <a:endParaRPr lang="en-US" sz="1200" dirty="0"/>
-          </a:p>
-        </p:txBody>
-      </p:sp>
-      <p:sp>
-        <p:nvSpPr>
-          <p:cNvPr id="13" name="Text 11"/>
-          <p:cNvSpPr txBox="1"/>
-          <p:nvPr/>
-        </p:nvSpPr>
-        <p:spPr>
-          <a:xfrm>
-            <a:off x="6537960" y="2331720"/>
-            <a:ext cx="4572000" cy="457200"/>
-          </a:xfrm>
-          <a:prstGeom prst="rect">
-            <a:avLst/>
-          </a:prstGeom>
-          <a:noFill/>
-          <a:ln/>
-        </p:spPr>
-        <p:txBody>
-          <a:bodyPr wrap="square" lIns="0" tIns="0" rIns="0" bIns="0" rtlCol="0" anchor="ctr"/>
-          <a:lstStyle/>
-          <a:p>
-            <a:pPr indent="0" marL="0">
-              <a:buNone/>
-            </a:pPr>
-            <a:r>
-              <a:rPr lang="en-US" sz="2600" b="1" dirty="0">
+              <a:t>excluir las estaciones dudosas</a:t>
+            </a:r>
+            <a:endParaRPr lang="en-US" sz="1150" dirty="0"/>
+          </a:p>
+        </p:txBody>
+      </p:sp>
+      <p:sp>
+        <p:nvSpPr>
+          <p:cNvPr id="20" name="Text 18"/>
+          <p:cNvSpPr txBox="1"/>
+          <p:nvPr/>
+        </p:nvSpPr>
+        <p:spPr>
+          <a:xfrm>
+            <a:off x="6126480" y="3035808"/>
+            <a:ext cx="5120640" cy="548640"/>
+          </a:xfrm>
+          <a:prstGeom prst="rect">
+            <a:avLst/>
+          </a:prstGeom>
+          <a:noFill/>
+          <a:ln/>
+        </p:spPr>
+        <p:txBody>
+          <a:bodyPr wrap="square" lIns="0" tIns="0" rIns="0" bIns="0" rtlCol="0" anchor="t"/>
+          <a:lstStyle/>
+          <a:p>
+            <a:pPr indent="0" marL="0">
+              <a:lnSpc>
+                <a:spcPct val="105000"/>
+              </a:lnSpc>
+              <a:buNone/>
+            </a:pPr>
+            <a:r>
+              <a:rPr lang="en-US" sz="1100" dirty="0">
+                <a:solidFill>
+                  <a:srgbClr val="1A1A1A"/>
+                </a:solidFill>
+                <a:latin typeface="Calibri" pitchFamily="34" charset="0"/>
+                <a:ea typeface="Calibri" pitchFamily="34" charset="-122"/>
+                <a:cs typeface="Calibri" pitchFamily="34" charset="-120"/>
+              </a:rPr>
+              <a:t>Excluir esconde; marcar informa. 37 estaciones con anillo punteado y motivo, fuera de las medianas.</a:t>
+            </a:r>
+            <a:endParaRPr lang="en-US" sz="1100" dirty="0"/>
+          </a:p>
+        </p:txBody>
+      </p:sp>
+      <p:sp>
+        <p:nvSpPr>
+          <p:cNvPr id="21" name="Shape 19"/>
+          <p:cNvSpPr/>
+          <p:nvPr/>
+        </p:nvSpPr>
+        <p:spPr>
+          <a:xfrm>
+            <a:off x="822960" y="3749040"/>
+            <a:ext cx="10515600" cy="731520"/>
+          </a:xfrm>
+          <a:prstGeom prst="rect">
+            <a:avLst/>
+          </a:prstGeom>
+          <a:solidFill>
+            <a:srgbClr val="F7F9FB"/>
+          </a:solidFill>
+          <a:ln w="9525">
+            <a:solidFill>
+              <a:srgbClr val="D5D5D5"/>
+            </a:solidFill>
+            <a:prstDash val="solid"/>
+          </a:ln>
+        </p:spPr>
+      </p:sp>
+      <p:sp>
+        <p:nvSpPr>
+          <p:cNvPr id="22" name="Text 20"/>
+          <p:cNvSpPr txBox="1"/>
+          <p:nvPr/>
+        </p:nvSpPr>
+        <p:spPr>
+          <a:xfrm>
+            <a:off x="1005840" y="3858768"/>
+            <a:ext cx="2377440" cy="548640"/>
+          </a:xfrm>
+          <a:prstGeom prst="rect">
+            <a:avLst/>
+          </a:prstGeom>
+          <a:noFill/>
+          <a:ln/>
+        </p:spPr>
+        <p:txBody>
+          <a:bodyPr wrap="square" lIns="0" tIns="0" rIns="0" bIns="0" rtlCol="0" anchor="t"/>
+          <a:lstStyle/>
+          <a:p>
+            <a:pPr indent="0" marL="0">
+              <a:buNone/>
+            </a:pPr>
+            <a:r>
+              <a:rPr lang="en-US" sz="1250" b="1" dirty="0">
+                <a:solidFill>
+                  <a:srgbClr val="1B4F8C"/>
+                </a:solidFill>
+                <a:latin typeface="Calibri" pitchFamily="34" charset="0"/>
+                <a:ea typeface="Calibri" pitchFamily="34" charset="-122"/>
+                <a:cs typeface="Calibri" pitchFamily="34" charset="-120"/>
+              </a:rPr>
+              <a:t>Misma ventana calendario</a:t>
+            </a:r>
+            <a:endParaRPr lang="en-US" sz="1250" dirty="0"/>
+          </a:p>
+        </p:txBody>
+      </p:sp>
+      <p:sp>
+        <p:nvSpPr>
+          <p:cNvPr id="23" name="Text 21"/>
+          <p:cNvSpPr txBox="1"/>
+          <p:nvPr/>
+        </p:nvSpPr>
+        <p:spPr>
+          <a:xfrm>
+            <a:off x="3474720" y="3858768"/>
+            <a:ext cx="2560320" cy="548640"/>
+          </a:xfrm>
+          <a:prstGeom prst="rect">
+            <a:avLst/>
+          </a:prstGeom>
+          <a:noFill/>
+          <a:ln/>
+        </p:spPr>
+        <p:txBody>
+          <a:bodyPr wrap="square" lIns="0" tIns="0" rIns="0" bIns="0" rtlCol="0" anchor="t"/>
+          <a:lstStyle/>
+          <a:p>
+            <a:pPr indent="0" marL="0">
+              <a:buNone/>
+            </a:pPr>
+            <a:r>
+              <a:rPr lang="en-US" sz="1150" dirty="0">
                 <a:solidFill>
                   <a:srgbClr val="E07A16"/>
                 </a:solidFill>
@@ -4638,38 +5232,41 @@
                 <a:ea typeface="Calibri" pitchFamily="34" charset="-122"/>
                 <a:cs typeface="Calibri" pitchFamily="34" charset="-120"/>
               </a:rPr>
-              <a:t>2.90  →  2.35</a:t>
-            </a:r>
-            <a:endParaRPr lang="en-US" sz="2600" dirty="0"/>
-          </a:p>
-        </p:txBody>
-      </p:sp>
-      <p:sp>
-        <p:nvSpPr>
-          <p:cNvPr id="14" name="Text 12"/>
-          <p:cNvSpPr txBox="1"/>
-          <p:nvPr/>
-        </p:nvSpPr>
-        <p:spPr>
-          <a:xfrm>
-            <a:off x="6537960" y="2816352"/>
-            <a:ext cx="4572000" cy="274320"/>
-          </a:xfrm>
-          <a:prstGeom prst="rect">
-            <a:avLst/>
-          </a:prstGeom>
-          <a:noFill/>
-          <a:ln/>
-        </p:spPr>
-        <p:txBody>
-          <a:bodyPr wrap="square" lIns="0" tIns="0" rIns="0" bIns="0" rtlCol="0" anchor="ctr"/>
-          <a:lstStyle/>
-          <a:p>
-            <a:pPr indent="0" marL="0">
-              <a:buNone/>
-            </a:pPr>
-            <a:r>
-              <a:rPr lang="en-US" sz="1300" i="1" dirty="0">
+              <a:t>ene–feb 2020 vs todo 2024</a:t>
+            </a:r>
+            <a:endParaRPr lang="en-US" sz="1150" dirty="0"/>
+          </a:p>
+        </p:txBody>
+      </p:sp>
+      <p:sp>
+        <p:nvSpPr>
+          <p:cNvPr id="24" name="Text 22"/>
+          <p:cNvSpPr txBox="1"/>
+          <p:nvPr/>
+        </p:nvSpPr>
+        <p:spPr>
+          <a:xfrm>
+            <a:off x="6126480" y="3858768"/>
+            <a:ext cx="5120640" cy="548640"/>
+          </a:xfrm>
+          <a:prstGeom prst="rect">
+            <a:avLst/>
+          </a:prstGeom>
+          <a:noFill/>
+          <a:ln/>
+        </p:spPr>
+        <p:txBody>
+          <a:bodyPr wrap="square" lIns="0" tIns="0" rIns="0" bIns="0" rtlCol="0" anchor="t"/>
+          <a:lstStyle/>
+          <a:p>
+            <a:pPr indent="0" marL="0">
+              <a:lnSpc>
+                <a:spcPct val="105000"/>
+              </a:lnSpc>
+              <a:buNone/>
+            </a:pPr>
+            <a:r>
+              <a:rPr lang="en-US" sz="1100" dirty="0">
                 <a:solidFill>
                   <a:srgbClr val="1A1A1A"/>
                 </a:solidFill>
@@ -4677,26 +5274,51 @@
                 <a:ea typeface="Calibri" pitchFamily="34" charset="-122"/>
                 <a:cs typeface="Calibri" pitchFamily="34" charset="-120"/>
               </a:rPr>
-              <a:t>el pico se aplanó</a:t>
-            </a:r>
-            <a:endParaRPr lang="en-US" sz="1300" dirty="0"/>
-          </a:p>
-        </p:txBody>
-      </p:sp>
-      <p:sp>
-        <p:nvSpPr>
-          <p:cNvPr id="15" name="Text 13"/>
-          <p:cNvSpPr txBox="1"/>
-          <p:nvPr/>
-        </p:nvSpPr>
-        <p:spPr>
-          <a:xfrm>
-            <a:off x="822960" y="3474720"/>
+              <a:t>155 estaciones cambiaban más de 5 puntos según la ventana. Mets-Willets Point: de 287 % a 86 %.</a:t>
+            </a:r>
+            <a:endParaRPr lang="en-US" sz="1100" dirty="0"/>
+          </a:p>
+        </p:txBody>
+      </p:sp>
+      <p:sp>
+        <p:nvSpPr>
+          <p:cNvPr id="25" name="Shape 23"/>
+          <p:cNvSpPr/>
+          <p:nvPr/>
+        </p:nvSpPr>
+        <p:spPr>
+          <a:xfrm>
+            <a:off x="822960" y="4572000"/>
             <a:ext cx="10515600" cy="731520"/>
           </a:xfrm>
           <a:prstGeom prst="rect">
             <a:avLst/>
           </a:prstGeom>
+          <a:solidFill>
+            <a:srgbClr val="FFFFFF"/>
+          </a:solidFill>
+          <a:ln w="9525">
+            <a:solidFill>
+              <a:srgbClr val="D5D5D5"/>
+            </a:solidFill>
+            <a:prstDash val="solid"/>
+          </a:ln>
+        </p:spPr>
+      </p:sp>
+      <p:sp>
+        <p:nvSpPr>
+          <p:cNvPr id="26" name="Text 24"/>
+          <p:cNvSpPr txBox="1"/>
+          <p:nvPr/>
+        </p:nvSpPr>
+        <p:spPr>
+          <a:xfrm>
+            <a:off x="1005840" y="4681728"/>
+            <a:ext cx="2377440" cy="548640"/>
+          </a:xfrm>
+          <a:prstGeom prst="rect">
+            <a:avLst/>
+          </a:prstGeom>
           <a:noFill/>
           <a:ln/>
         </p:spPr>
@@ -4705,13 +5327,91 @@
           <a:lstStyle/>
           <a:p>
             <a:pPr indent="0" marL="0">
+              <a:buNone/>
+            </a:pPr>
+            <a:r>
+              <a:rPr lang="en-US" sz="1250" b="1" dirty="0">
+                <a:solidFill>
+                  <a:srgbClr val="1B4F8C"/>
+                </a:solidFill>
+                <a:latin typeface="Calibri" pitchFamily="34" charset="0"/>
+                <a:ea typeface="Calibri" pitchFamily="34" charset="-122"/>
+                <a:cs typeface="Calibri" pitchFamily="34" charset="-120"/>
+              </a:rPr>
+              <a:t>Cuatro lentes en un mapa</a:t>
+            </a:r>
+            <a:endParaRPr lang="en-US" sz="1250" dirty="0"/>
+          </a:p>
+        </p:txBody>
+      </p:sp>
+      <p:sp>
+        <p:nvSpPr>
+          <p:cNvPr id="27" name="Text 25"/>
+          <p:cNvSpPr txBox="1"/>
+          <p:nvPr/>
+        </p:nvSpPr>
+        <p:spPr>
+          <a:xfrm>
+            <a:off x="3474720" y="4681728"/>
+            <a:ext cx="2560320" cy="548640"/>
+          </a:xfrm>
+          <a:prstGeom prst="rect">
+            <a:avLst/>
+          </a:prstGeom>
+          <a:noFill/>
+          <a:ln/>
+        </p:spPr>
+        <p:txBody>
+          <a:bodyPr wrap="square" lIns="0" tIns="0" rIns="0" bIns="0" rtlCol="0" anchor="t"/>
+          <a:lstStyle/>
+          <a:p>
+            <a:pPr indent="0" marL="0">
+              <a:buNone/>
+            </a:pPr>
+            <a:r>
+              <a:rPr lang="en-US" sz="1150" dirty="0">
+                <a:solidFill>
+                  <a:srgbClr val="E07A16"/>
+                </a:solidFill>
+                <a:latin typeface="Calibri" pitchFamily="34" charset="0"/>
+                <a:ea typeface="Calibri" pitchFamily="34" charset="-122"/>
+                <a:cs typeface="Calibri" pitchFamily="34" charset="-120"/>
+              </a:rPr>
+              <a:t>cuatro mapas</a:t>
+            </a:r>
+            <a:endParaRPr lang="en-US" sz="1150" dirty="0"/>
+          </a:p>
+        </p:txBody>
+      </p:sp>
+      <p:sp>
+        <p:nvSpPr>
+          <p:cNvPr id="28" name="Text 26"/>
+          <p:cNvSpPr txBox="1"/>
+          <p:nvPr/>
+        </p:nvSpPr>
+        <p:spPr>
+          <a:xfrm>
+            <a:off x="6126480" y="4681728"/>
+            <a:ext cx="5120640" cy="548640"/>
+          </a:xfrm>
+          <a:prstGeom prst="rect">
+            <a:avLst/>
+          </a:prstGeom>
+          <a:noFill/>
+          <a:ln/>
+        </p:spPr>
+        <p:txBody>
+          <a:bodyPr wrap="square" lIns="0" tIns="0" rIns="0" bIns="0" rtlCol="0" anchor="t"/>
+          <a:lstStyle/>
+          <a:p>
+            <a:pPr indent="0" marL="0">
               <a:lnSpc>
-                <a:spcPct val="110000"/>
+                <a:spcPct val="105000"/>
               </a:lnSpc>
               <a:buNone/>
             </a:pPr>
             <a:r>
-              <a:rPr lang="en-US" sz="1400" dirty="0">
+              <a:rPr lang="en-US" sz="1100" dirty="0">
                 <a:solidFill>
                   <a:srgbClr val="1A1A1A"/>
                 </a:solidFill>
@@ -4719,46 +5419,47 @@
                 <a:ea typeface="Calibri" pitchFamily="34" charset="-122"/>
                 <a:cs typeface="Calibri" pitchFamily="34" charset="-120"/>
               </a:rPr>
-              <a:t>El año 2020 completo ya venía aplanado por el confinamiento: usarlo como referencia esconde el fenómeno. Es el mismo criterio de Hsu et al. con el metro de Taipéi: comparar el mismo período calendario entre dos años.</a:t>
-            </a:r>
-            <a:endParaRPr lang="en-US" sz="1400" dirty="0"/>
-          </a:p>
-        </p:txBody>
-      </p:sp>
-      <p:pic>
-        <p:nvPicPr>
-          <p:cNvPr id="16" name="Image 0" descr="/home/claude/w10/img/dispersion.png">    </p:cNvPr>
-          <p:cNvPicPr>
-            <a:picLocks noChangeAspect="1"/>
-          </p:cNvPicPr>
-          <p:nvPr/>
-        </p:nvPicPr>
-        <p:blipFill>
-          <a:blip r:embed="rId1"/>
-          <a:stretch>
-            <a:fillRect/>
-          </a:stretch>
-        </p:blipFill>
-        <p:spPr>
-          <a:xfrm>
-            <a:off x="3831336" y="4187952"/>
-            <a:ext cx="4498848" cy="2103120"/>
-          </a:xfrm>
-          <a:prstGeom prst="rect">
-            <a:avLst/>
-          </a:prstGeom>
-        </p:spPr>
-      </p:pic>
-      <p:sp>
-        <p:nvSpPr>
-          <p:cNvPr id="17" name="Text 14"/>
-          <p:cNvSpPr txBox="1"/>
-          <p:nvPr/>
-        </p:nvSpPr>
-        <p:spPr>
-          <a:xfrm>
-            <a:off x="822960" y="6355080"/>
-            <a:ext cx="10515600" cy="411480"/>
+              <a:t>El lector compara con el ojo, no con la memoria: posición y tamaño se conservan.</a:t>
+            </a:r>
+            <a:endParaRPr lang="en-US" sz="1100" dirty="0"/>
+          </a:p>
+        </p:txBody>
+      </p:sp>
+      <p:sp>
+        <p:nvSpPr>
+          <p:cNvPr id="29" name="Shape 27"/>
+          <p:cNvSpPr/>
+          <p:nvPr/>
+        </p:nvSpPr>
+        <p:spPr>
+          <a:xfrm>
+            <a:off x="822960" y="5394960"/>
+            <a:ext cx="10515600" cy="731520"/>
+          </a:xfrm>
+          <a:prstGeom prst="rect">
+            <a:avLst/>
+          </a:prstGeom>
+          <a:solidFill>
+            <a:srgbClr val="F7F9FB"/>
+          </a:solidFill>
+          <a:ln w="9525">
+            <a:solidFill>
+              <a:srgbClr val="D5D5D5"/>
+            </a:solidFill>
+            <a:prstDash val="solid"/>
+          </a:ln>
+        </p:spPr>
+      </p:sp>
+      <p:sp>
+        <p:nvSpPr>
+          <p:cNvPr id="30" name="Text 28"/>
+          <p:cNvSpPr txBox="1"/>
+          <p:nvPr/>
+        </p:nvSpPr>
+        <p:spPr>
+          <a:xfrm>
+            <a:off x="1005840" y="5504688"/>
+            <a:ext cx="2377440" cy="548640"/>
           </a:xfrm>
           <a:prstGeom prst="rect">
             <a:avLst/>
@@ -4774,17 +5475,98 @@
               <a:buNone/>
             </a:pPr>
             <a:r>
-              <a:rPr lang="en-US" sz="1300" i="1" dirty="0">
-                <a:solidFill>
-                  <a:srgbClr val="5A5A5A"/>
-                </a:solidFill>
-                <a:latin typeface="Calibri" pitchFamily="34" charset="0"/>
-                <a:ea typeface="Calibri" pitchFamily="34" charset="-122"/>
-                <a:cs typeface="Calibri" pitchFamily="34" charset="-120"/>
-              </a:rPr>
-              <a:t>372 de 414 estaciones redujeron su razón pico/valle. 14 se excluyen: su máximo cae en el borde de la ventana de búsqueda.</a:t>
-            </a:r>
-            <a:endParaRPr lang="en-US" sz="1300" dirty="0"/>
+              <a:rPr lang="en-US" sz="1250" b="1" dirty="0">
+                <a:solidFill>
+                  <a:srgbClr val="1B4F8C"/>
+                </a:solidFill>
+                <a:latin typeface="Calibri" pitchFamily="34" charset="0"/>
+                <a:ea typeface="Calibri" pitchFamily="34" charset="-122"/>
+                <a:cs typeface="Calibri" pitchFamily="34" charset="-120"/>
+              </a:rPr>
+              <a:t>Área gris + línea</a:t>
+            </a:r>
+            <a:endParaRPr lang="en-US" sz="1250" dirty="0"/>
+          </a:p>
+        </p:txBody>
+      </p:sp>
+      <p:sp>
+        <p:nvSpPr>
+          <p:cNvPr id="31" name="Text 29"/>
+          <p:cNvSpPr txBox="1"/>
+          <p:nvPr/>
+        </p:nvSpPr>
+        <p:spPr>
+          <a:xfrm>
+            <a:off x="3474720" y="5504688"/>
+            <a:ext cx="2560320" cy="548640"/>
+          </a:xfrm>
+          <a:prstGeom prst="rect">
+            <a:avLst/>
+          </a:prstGeom>
+          <a:noFill/>
+          <a:ln/>
+        </p:spPr>
+        <p:txBody>
+          <a:bodyPr wrap="square" lIns="0" tIns="0" rIns="0" bIns="0" rtlCol="0" anchor="t"/>
+          <a:lstStyle/>
+          <a:p>
+            <a:pPr indent="0" marL="0">
+              <a:buNone/>
+            </a:pPr>
+            <a:r>
+              <a:rPr lang="en-US" sz="1150" dirty="0">
+                <a:solidFill>
+                  <a:srgbClr val="E07A16"/>
+                </a:solidFill>
+                <a:latin typeface="Calibri" pitchFamily="34" charset="0"/>
+                <a:ea typeface="Calibri" pitchFamily="34" charset="-122"/>
+                <a:cs typeface="Calibri" pitchFamily="34" charset="-120"/>
+              </a:rPr>
+              <a:t>dos líneas superpuestas</a:t>
+            </a:r>
+            <a:endParaRPr lang="en-US" sz="1150" dirty="0"/>
+          </a:p>
+        </p:txBody>
+      </p:sp>
+      <p:sp>
+        <p:nvSpPr>
+          <p:cNvPr id="32" name="Text 30"/>
+          <p:cNvSpPr txBox="1"/>
+          <p:nvPr/>
+        </p:nvSpPr>
+        <p:spPr>
+          <a:xfrm>
+            <a:off x="6126480" y="5504688"/>
+            <a:ext cx="5120640" cy="548640"/>
+          </a:xfrm>
+          <a:prstGeom prst="rect">
+            <a:avLst/>
+          </a:prstGeom>
+          <a:noFill/>
+          <a:ln/>
+        </p:spPr>
+        <p:txBody>
+          <a:bodyPr wrap="square" lIns="0" tIns="0" rIns="0" bIns="0" rtlCol="0" anchor="t"/>
+          <a:lstStyle/>
+          <a:p>
+            <a:pPr indent="0" marL="0">
+              <a:lnSpc>
+                <a:spcPct val="105000"/>
+              </a:lnSpc>
+              <a:buNone/>
+            </a:pPr>
+            <a:r>
+              <a:rPr lang="en-US" sz="1100" dirty="0">
+                <a:solidFill>
+                  <a:srgbClr val="1A1A1A"/>
+                </a:solidFill>
+                <a:latin typeface="Calibri" pitchFamily="34" charset="0"/>
+                <a:ea typeface="Calibri" pitchFamily="34" charset="-122"/>
+                <a:cs typeface="Calibri" pitchFamily="34" charset="-120"/>
+              </a:rPr>
+              <a:t>A escala de small multiple el "antes" quedaba tapado.</a:t>
+            </a:r>
+            <a:endParaRPr lang="en-US" sz="1100" dirty="0"/>
           </a:p>
         </p:txBody>
       </p:sp>
@@ -4873,7 +5655,7 @@
                 <a:ea typeface="Calibri" pitchFamily="34" charset="-122"/>
                 <a:cs typeface="Calibri" pitchFamily="34" charset="-120"/>
               </a:rPr>
-              <a:t>Limitaciones conocidas</a:t>
+              <a:t>Lo que corregimos y lo que todavía no sabemos</a:t>
             </a:r>
             <a:endParaRPr lang="en-US" sz="2400" dirty="0"/>
           </a:p>
@@ -4928,7 +5710,7 @@
         <p:spPr>
           <a:xfrm>
             <a:off x="822960" y="1234440"/>
-            <a:ext cx="4846320" cy="274320"/>
+            <a:ext cx="4937760" cy="274320"/>
           </a:xfrm>
           <a:prstGeom prst="rect">
             <a:avLst/>
@@ -4952,7 +5734,7 @@
                 <a:ea typeface="Calibri" pitchFamily="34" charset="-122"/>
                 <a:cs typeface="Calibri" pitchFamily="34" charset="-120"/>
               </a:rPr>
-              <a:t>DEL PROTOTIPO</a:t>
+              <a:t>CORREGIDO DESDE LA SEMANA 7</a:t>
             </a:r>
             <a:endParaRPr lang="en-US" sz="1200" dirty="0"/>
           </a:p>
@@ -4967,7 +5749,7 @@
         <p:spPr>
           <a:xfrm>
             <a:off x="822960" y="1536192"/>
-            <a:ext cx="4846320" cy="27432"/>
+            <a:ext cx="4937760" cy="27432"/>
           </a:xfrm>
           <a:prstGeom prst="rect">
             <a:avLst/>
@@ -4987,7 +5769,7 @@
         <p:spPr>
           <a:xfrm>
             <a:off x="822960" y="1691640"/>
-            <a:ext cx="4846320" cy="3291840"/>
+            <a:ext cx="4937760" cy="3474720"/>
           </a:xfrm>
           <a:prstGeom prst="rect">
             <a:avLst/>
@@ -5004,13 +5786,13 @@
                 <a:spcPct val="105000"/>
               </a:lnSpc>
               <a:spcAft>
-                <a:spcPts val="1100"/>
+                <a:spcPts val="800"/>
               </a:spcAft>
               <a:buSzPct val="100000"/>
               <a:buChar char="•"/>
             </a:pPr>
             <a:r>
-              <a:rPr lang="en-US" sz="1300" dirty="0">
+              <a:rPr lang="en-US" sz="1250" dirty="0">
                 <a:solidFill>
                   <a:srgbClr val="1A1A1A"/>
                 </a:solidFill>
@@ -5018,9 +5800,9 @@
                 <a:ea typeface="Calibri" pitchFamily="34" charset="-122"/>
                 <a:cs typeface="Calibri" pitchFamily="34" charset="-120"/>
               </a:rPr>
-              <a:t>El brush temporal no reconstruye los perfiles: solo cambia el tamaño de los puntos del mapa.</a:t>
-            </a:r>
-            <a:endParaRPr lang="en-US" sz="1300" dirty="0"/>
+              <a:t>La recuperación compara la misma ventana calendario.</a:t>
+            </a:r>
+            <a:endParaRPr lang="en-US" sz="1250" dirty="0"/>
           </a:p>
           <a:p>
             <a:pPr marL="342900" indent="-342900">
@@ -5028,13 +5810,13 @@
                 <a:spcPct val="105000"/>
               </a:lnSpc>
               <a:spcAft>
-                <a:spcPts val="1100"/>
+                <a:spcPts val="800"/>
               </a:spcAft>
               <a:buSzPct val="100000"/>
               <a:buChar char="•"/>
             </a:pPr>
             <a:r>
-              <a:rPr lang="en-US" sz="1300" dirty="0">
+              <a:rPr lang="en-US" sz="1250" dirty="0">
                 <a:solidFill>
                   <a:srgbClr val="1A1A1A"/>
                 </a:solidFill>
@@ -5042,9 +5824,9 @@
                 <a:ea typeface="Calibri" pitchFamily="34" charset="-122"/>
                 <a:cs typeface="Calibri" pitchFamily="34" charset="-120"/>
               </a:rPr>
-              <a:t>Se dibujan 120 múltiplos de los 428; falta scroll virtual.</a:t>
-            </a:r>
-            <a:endParaRPr lang="en-US" sz="1300" dirty="0"/>
+              <a:t>Las ventanas del índice pico/valle ya no se solapan.</a:t>
+            </a:r>
+            <a:endParaRPr lang="en-US" sz="1250" dirty="0"/>
           </a:p>
           <a:p>
             <a:pPr marL="342900" indent="-342900">
@@ -5052,13 +5834,13 @@
                 <a:spcPct val="105000"/>
               </a:lnSpc>
               <a:spcAft>
-                <a:spcPts val="1100"/>
+                <a:spcPts val="800"/>
               </a:spcAft>
               <a:buSzPct val="100000"/>
               <a:buChar char="•"/>
             </a:pPr>
             <a:r>
-              <a:rPr lang="en-US" sz="1300" dirty="0">
+              <a:rPr lang="en-US" sz="1250" dirty="0">
                 <a:solidFill>
                   <a:srgbClr val="1A1A1A"/>
                 </a:solidFill>
@@ -5066,9 +5848,9 @@
                 <a:ea typeface="Calibri" pitchFamily="34" charset="-122"/>
                 <a:cs typeface="Calibri" pitchFamily="34" charset="-120"/>
               </a:rPr>
-              <a:t>El mapa no tiene contexto geográfico de fondo.</a:t>
-            </a:r>
-            <a:endParaRPr lang="en-US" sz="1300" dirty="0"/>
+              <a:t>El titular pasa de "372 de 414" a "80 % con umbral del 5 %, mediana −17 %".</a:t>
+            </a:r>
+            <a:endParaRPr lang="en-US" sz="1250" dirty="0"/>
           </a:p>
           <a:p>
             <a:pPr marL="342900" indent="-342900">
@@ -5076,13 +5858,13 @@
                 <a:spcPct val="105000"/>
               </a:lnSpc>
               <a:spcAft>
-                <a:spcPts val="1100"/>
+                <a:spcPts val="800"/>
               </a:spcAft>
               <a:buSzPct val="100000"/>
               <a:buChar char="•"/>
             </a:pPr>
             <a:r>
-              <a:rPr lang="en-US" sz="1300" dirty="0">
+              <a:rPr lang="en-US" sz="1250" dirty="0">
                 <a:solidFill>
                   <a:srgbClr val="1A1A1A"/>
                 </a:solidFill>
@@ -5090,9 +5872,9 @@
                 <a:ea typeface="Calibri" pitchFamily="34" charset="-122"/>
                 <a:cs typeface="Calibri" pitchFamily="34" charset="-120"/>
               </a:rPr>
-              <a:t>Falta la vista E (composición tarifaria) y la capa de anotaciones.</a:t>
-            </a:r>
-            <a:endParaRPr lang="en-US" sz="1300" dirty="0"/>
+              <a:t>Caídas anómalas detectadas en los datos: línea G jul–ago 2024, 21 St-Queensbridge sep 2023–mar 2024.</a:t>
+            </a:r>
+            <a:endParaRPr lang="en-US" sz="1250" dirty="0"/>
           </a:p>
           <a:p>
             <a:pPr marL="342900" indent="-342900">
@@ -5100,13 +5882,13 @@
                 <a:spcPct val="105000"/>
               </a:lnSpc>
               <a:spcAft>
-                <a:spcPts val="1100"/>
+                <a:spcPts val="800"/>
               </a:spcAft>
               <a:buSzPct val="100000"/>
               <a:buChar char="•"/>
             </a:pPr>
             <a:r>
-              <a:rPr lang="en-US" sz="1300" dirty="0">
+              <a:rPr lang="en-US" sz="1250" dirty="0">
                 <a:solidFill>
                   <a:srgbClr val="1A1A1A"/>
                 </a:solidFill>
@@ -5114,9 +5896,9 @@
                 <a:ea typeface="Calibri" pitchFamily="34" charset="-122"/>
                 <a:cs typeface="Calibri" pitchFamily="34" charset="-120"/>
               </a:rPr>
-              <a:t>Sin accesibilidad por teclado; paleta no verificada para daltonismo.</a:t>
-            </a:r>
-            <a:endParaRPr lang="en-US" sz="1300" dirty="0"/>
+              <a:t>Un hallazgo escrito a mano resultó falso; ahora los genera el modelo.</a:t>
+            </a:r>
+            <a:endParaRPr lang="en-US" sz="1250" dirty="0"/>
           </a:p>
         </p:txBody>
       </p:sp>
@@ -5129,7 +5911,7 @@
         <p:spPr>
           <a:xfrm>
             <a:off x="6217920" y="1234440"/>
-            <a:ext cx="4846320" cy="274320"/>
+            <a:ext cx="5029200" cy="274320"/>
           </a:xfrm>
           <a:prstGeom prst="rect">
             <a:avLst/>
@@ -5147,13 +5929,13 @@
             <a:r>
               <a:rPr lang="en-US" sz="1200" b="1" spc="100" kern="0" dirty="0">
                 <a:solidFill>
-                  <a:srgbClr val="E07A16"/>
-                </a:solidFill>
-                <a:latin typeface="Calibri" pitchFamily="34" charset="0"/>
-                <a:ea typeface="Calibri" pitchFamily="34" charset="-122"/>
-                <a:cs typeface="Calibri" pitchFamily="34" charset="-120"/>
-              </a:rPr>
-              <a:t>DE LOS DATOS</a:t>
+                  <a:srgbClr val="5A5A5A"/>
+                </a:solidFill>
+                <a:latin typeface="Calibri" pitchFamily="34" charset="0"/>
+                <a:ea typeface="Calibri" pitchFamily="34" charset="-122"/>
+                <a:cs typeface="Calibri" pitchFamily="34" charset="-120"/>
+              </a:rPr>
+              <a:t>LO QUE NO SABEMOS</a:t>
             </a:r>
             <a:endParaRPr lang="en-US" sz="1200" dirty="0"/>
           </a:p>
@@ -5168,7 +5950,7 @@
         <p:spPr>
           <a:xfrm>
             <a:off x="6217920" y="1536192"/>
-            <a:ext cx="4846320" cy="27432"/>
+            <a:ext cx="5029200" cy="27432"/>
           </a:xfrm>
           <a:prstGeom prst="rect">
             <a:avLst/>
@@ -5188,7 +5970,7 @@
         <p:spPr>
           <a:xfrm>
             <a:off x="6217920" y="1691640"/>
-            <a:ext cx="4846320" cy="3291840"/>
+            <a:ext cx="5029200" cy="3474720"/>
           </a:xfrm>
           <a:prstGeom prst="rect">
             <a:avLst/>
@@ -5205,13 +5987,13 @@
                 <a:spcPct val="105000"/>
               </a:lnSpc>
               <a:spcAft>
-                <a:spcPts val="1100"/>
+                <a:spcPts val="800"/>
               </a:spcAft>
               <a:buSzPct val="100000"/>
               <a:buChar char="•"/>
             </a:pPr>
             <a:r>
-              <a:rPr lang="en-US" sz="1300" dirty="0">
+              <a:rPr lang="en-US" sz="1250" dirty="0">
                 <a:solidFill>
                   <a:srgbClr val="1A1A1A"/>
                 </a:solidFill>
@@ -5219,9 +6001,9 @@
                 <a:ea typeface="Calibri" pitchFamily="34" charset="-122"/>
                 <a:cs typeface="Calibri" pitchFamily="34" charset="-120"/>
               </a:rPr>
-              <a:t>Mets-Willets Point marca 287 %: artefacto de la línea base (temporada baja de béisbol).</a:t>
-            </a:r>
-            <a:endParaRPr lang="en-US" sz="1300" dirty="0"/>
+              <a:t>Por qué el Bronx. Los datos muestran el patrón; la hipótesis del teletrabajo se contrasta con el Census (share de trabajo desde casa por estación).</a:t>
+            </a:r>
+            <a:endParaRPr lang="en-US" sz="1250" dirty="0"/>
           </a:p>
           <a:p>
             <a:pPr marL="342900" indent="-342900">
@@ -5229,13 +6011,13 @@
                 <a:spcPct val="105000"/>
               </a:lnSpc>
               <a:spcAft>
-                <a:spcPts val="1100"/>
+                <a:spcPts val="800"/>
               </a:spcAft>
               <a:buSzPct val="100000"/>
               <a:buChar char="•"/>
             </a:pPr>
             <a:r>
-              <a:rPr lang="en-US" sz="1300" dirty="0">
+              <a:rPr lang="en-US" sz="1250" dirty="0">
                 <a:solidFill>
                   <a:srgbClr val="1A1A1A"/>
                 </a:solidFill>
@@ -5243,9 +6025,9 @@
                 <a:ea typeface="Calibri" pitchFamily="34" charset="-122"/>
                 <a:cs typeface="Calibri" pitchFamily="34" charset="-120"/>
               </a:rPr>
-              <a:t>14 estaciones excluidas de la dispersión por el criterio de borde de ventana.</a:t>
-            </a:r>
-            <a:endParaRPr lang="en-US" sz="1300" dirty="0"/>
+              <a:t>El perfil de 168 h de 2024 es todavía el año completo; la recuperación ya no.</a:t>
+            </a:r>
+            <a:endParaRPr lang="en-US" sz="1250" dirty="0"/>
           </a:p>
           <a:p>
             <a:pPr marL="342900" indent="-342900">
@@ -5253,13 +6035,13 @@
                 <a:spcPct val="105000"/>
               </a:lnSpc>
               <a:spcAft>
-                <a:spcPts val="1100"/>
+                <a:spcPts val="800"/>
               </a:spcAft>
               <a:buSzPct val="100000"/>
               <a:buChar char="•"/>
             </a:pPr>
             <a:r>
-              <a:rPr lang="en-US" sz="1300" dirty="0">
+              <a:rPr lang="en-US" sz="1250" dirty="0">
                 <a:solidFill>
                   <a:srgbClr val="1A1A1A"/>
                 </a:solidFill>
@@ -5267,9 +6049,9 @@
                 <a:ea typeface="Calibri" pitchFamily="34" charset="-122"/>
                 <a:cs typeface="Calibri" pitchFamily="34" charset="-120"/>
               </a:rPr>
-              <a:t>Son entradas, no viajes: no hay pares origen–destino.</a:t>
-            </a:r>
-            <a:endParaRPr lang="en-US" sz="1300" dirty="0"/>
+              <a:t>El brush temporal solo cambia el tamaño de los puntos; con perfiles por mes reconstruirá la forma del día.</a:t>
+            </a:r>
+            <a:endParaRPr lang="en-US" sz="1250" dirty="0"/>
           </a:p>
           <a:p>
             <a:pPr marL="342900" indent="-342900">
@@ -5277,13 +6059,13 @@
                 <a:spcPct val="105000"/>
               </a:lnSpc>
               <a:spcAft>
-                <a:spcPts val="1100"/>
+                <a:spcPts val="800"/>
               </a:spcAft>
               <a:buSzPct val="100000"/>
               <a:buChar char="•"/>
             </a:pPr>
             <a:r>
-              <a:rPr lang="en-US" sz="1300" dirty="0">
+              <a:rPr lang="en-US" sz="1250" dirty="0">
                 <a:solidFill>
                   <a:srgbClr val="1A1A1A"/>
                 </a:solidFill>
@@ -5291,33 +6073,9 @@
                 <a:ea typeface="Calibri" pitchFamily="34" charset="-122"/>
                 <a:cs typeface="Calibri" pitchFamily="34" charset="-120"/>
               </a:rPr>
-              <a:t>Es el complejo de estación, no la estación individual.</a:t>
-            </a:r>
-            <a:endParaRPr lang="en-US" sz="1300" dirty="0"/>
-          </a:p>
-          <a:p>
-            <a:pPr marL="342900" indent="-342900">
-              <a:lnSpc>
-                <a:spcPct val="105000"/>
-              </a:lnSpc>
-              <a:spcAft>
-                <a:spcPts val="1100"/>
-              </a:spcAft>
-              <a:buSzPct val="100000"/>
-              <a:buChar char="•"/>
-            </a:pPr>
-            <a:r>
-              <a:rPr lang="en-US" sz="1300" dirty="0">
-                <a:solidFill>
-                  <a:srgbClr val="1A1A1A"/>
-                </a:solidFill>
-                <a:latin typeface="Calibri" pitchFamily="34" charset="0"/>
-                <a:ea typeface="Calibri" pitchFamily="34" charset="-122"/>
-                <a:cs typeface="Calibri" pitchFamily="34" charset="-120"/>
-              </a:rPr>
-              <a:t>MetroCard → OMNY es adopción tecnológica, no cambio de demanda.</a:t>
-            </a:r>
-            <a:endParaRPr lang="en-US" sz="1300" dirty="0"/>
+              <a:t>Son entradas, no viajes. Los cambios de servicio no están controlados.</a:t>
+            </a:r>
+            <a:endParaRPr lang="en-US" sz="1250" dirty="0"/>
           </a:p>
         </p:txBody>
       </p:sp>
@@ -5329,7 +6087,7 @@
         </p:nvSpPr>
         <p:spPr>
           <a:xfrm>
-            <a:off x="822960" y="5349240"/>
+            <a:off x="822960" y="5669280"/>
             <a:ext cx="10515600" cy="411480"/>
           </a:xfrm>
           <a:prstGeom prst="rect">
@@ -5354,7 +6112,7 @@
                 <a:ea typeface="Calibri" pitchFamily="34" charset="-122"/>
                 <a:cs typeface="Calibri" pitchFamily="34" charset="-120"/>
               </a:rPr>
-              <a:t>Todas están documentadas en PrototypeReport.md, sección 3.</a:t>
+              <a:t>Todo está en PrototypeReport.md, sección 3. Y en el capítulo 7 de la propia aplicación.</a:t>
             </a:r>
             <a:endParaRPr lang="en-US" sz="1300" dirty="0"/>
           </a:p>
@@ -5564,7 +6322,7 @@
         <p:spPr>
           <a:xfrm>
             <a:off x="1481328" y="1280160"/>
-            <a:ext cx="4206240" cy="548640"/>
+            <a:ext cx="4389120" cy="548640"/>
           </a:xfrm>
           <a:prstGeom prst="rect">
             <a:avLst/>
@@ -5588,7 +6346,7 @@
                 <a:ea typeface="Calibri" pitchFamily="34" charset="-122"/>
                 <a:cs typeface="Calibri" pitchFamily="34" charset="-120"/>
               </a:rPr>
-              <a:t>¿El mapa necesita contexto geográfico?</a:t>
+              <a:t>¿La tipología convence?</a:t>
             </a:r>
             <a:endParaRPr lang="en-US" sz="1350" dirty="0"/>
           </a:p>
@@ -5602,8 +6360,8 @@
         </p:nvSpPr>
         <p:spPr>
           <a:xfrm>
-            <a:off x="5852160" y="1307592"/>
-            <a:ext cx="5303520" cy="548640"/>
+            <a:off x="6035040" y="1307592"/>
+            <a:ext cx="5120640" cy="548640"/>
           </a:xfrm>
           <a:prstGeom prst="rect">
             <a:avLst/>
@@ -5630,7 +6388,7 @@
                 <a:ea typeface="Calibri" pitchFamily="34" charset="-122"/>
                 <a:cs typeface="Calibri" pitchFamily="34" charset="-120"/>
               </a:rPr>
-              <a:t>Hoy son puntos sueltos. Un GeoJSON de boroughs es asumible, pero puede competir con el color.</a:t>
+              <a:t>"Residencial / laboral" sale solo de a qué hora entra la gente. ¿Creíble, o promete más de lo que mide?</a:t>
             </a:r>
             <a:endParaRPr lang="en-US" sz="1200" dirty="0"/>
           </a:p>
@@ -5709,7 +6467,7 @@
         <p:spPr>
           <a:xfrm>
             <a:off x="1481328" y="2066544"/>
-            <a:ext cx="4206240" cy="548640"/>
+            <a:ext cx="4389120" cy="548640"/>
           </a:xfrm>
           <a:prstGeom prst="rect">
             <a:avLst/>
@@ -5733,7 +6491,7 @@
                 <a:ea typeface="Calibri" pitchFamily="34" charset="-122"/>
                 <a:cs typeface="Calibri" pitchFamily="34" charset="-120"/>
               </a:rPr>
-              <a:t>¿Se entiende "pico/valle"?</a:t>
+              <a:t>¿El Bronx está bien contado o estamos forzando?</a:t>
             </a:r>
             <a:endParaRPr lang="en-US" sz="1350" dirty="0"/>
           </a:p>
@@ -5747,8 +6505,8 @@
         </p:nvSpPr>
         <p:spPr>
           <a:xfrm>
-            <a:off x="5852160" y="2093976"/>
-            <a:ext cx="5303520" cy="548640"/>
+            <a:off x="6035040" y="2093976"/>
+            <a:ext cx="5120640" cy="548640"/>
           </a:xfrm>
           <a:prstGeom prst="rect">
             <a:avLst/>
@@ -5775,7 +6533,7 @@
                 <a:ea typeface="Calibri" pitchFamily="34" charset="-122"/>
                 <a:cs typeface="Calibri" pitchFamily="34" charset="-120"/>
               </a:rPr>
-              <a:t>Es un índice nuestro. Si no se lee, cambiamos la vista D por un gráfico de pendientes.</a:t>
+              <a:t>Presentamos el teletrabajo como hipótesis. ¿Se percibe así? ¿Qué evidencia pedirían?</a:t>
             </a:r>
             <a:endParaRPr lang="en-US" sz="1200" dirty="0"/>
           </a:p>
@@ -5854,7 +6612,7 @@
         <p:spPr>
           <a:xfrm>
             <a:off x="1481328" y="2852928"/>
-            <a:ext cx="4206240" cy="548640"/>
+            <a:ext cx="4389120" cy="548640"/>
           </a:xfrm>
           <a:prstGeom prst="rect">
             <a:avLst/>
@@ -5878,7 +6636,7 @@
                 <a:ea typeface="Calibri" pitchFamily="34" charset="-122"/>
                 <a:cs typeface="Calibri" pitchFamily="34" charset="-120"/>
               </a:rPr>
-              <a:t>¿El orden por defecto de los perfiles?</a:t>
+              <a:t>¿Narrativa + explorador es la estructura correcta?</a:t>
             </a:r>
             <a:endParaRPr lang="en-US" sz="1350" dirty="0"/>
           </a:p>
@@ -5892,8 +6650,8 @@
         </p:nvSpPr>
         <p:spPr>
           <a:xfrm>
-            <a:off x="5852160" y="2880360"/>
-            <a:ext cx="5303520" cy="548640"/>
+            <a:off x="6035040" y="2880360"/>
+            <a:ext cx="5120640" cy="548640"/>
           </a:xfrm>
           <a:prstGeom prst="rect">
             <a:avLst/>
@@ -5920,7 +6678,7 @@
                 <a:ea typeface="Calibri" pitchFamily="34" charset="-122"/>
                 <a:cs typeface="Calibri" pitchFamily="34" charset="-120"/>
               </a:rPr>
-              <a:t>Hoy entra por recuperación ascendente. La alternativa es por magnitud del cambio.</a:t>
+              <a:t>La alternativa es un solo explorador con anotaciones. ¿La narrativa guía o estorba?</a:t>
             </a:r>
             <a:endParaRPr lang="en-US" sz="1200" dirty="0"/>
           </a:p>
@@ -5999,7 +6757,7 @@
         <p:spPr>
           <a:xfrm>
             <a:off x="1481328" y="3639312"/>
-            <a:ext cx="4206240" cy="548640"/>
+            <a:ext cx="4389120" cy="548640"/>
           </a:xfrm>
           <a:prstGeom prst="rect">
             <a:avLst/>
@@ -6023,7 +6781,7 @@
                 <a:ea typeface="Calibri" pitchFamily="34" charset="-122"/>
                 <a:cs typeface="Calibri" pitchFamily="34" charset="-120"/>
               </a:rPr>
-              <a:t>¿Vale la pena el brush temporal como está?</a:t>
+              <a:t>¿Los hallazgos negativos aportan o confunden?</a:t>
             </a:r>
             <a:endParaRPr lang="en-US" sz="1350" dirty="0"/>
           </a:p>
@@ -6037,8 +6795,8 @@
         </p:nvSpPr>
         <p:spPr>
           <a:xfrm>
-            <a:off x="5852160" y="3666744"/>
-            <a:ext cx="5303520" cy="548640"/>
+            <a:off x="6035040" y="3666744"/>
+            <a:ext cx="5120640" cy="548640"/>
           </a:xfrm>
           <a:prstGeom prst="rect">
             <a:avLst/>
@@ -6065,7 +6823,7 @@
                 <a:ea typeface="Calibri" pitchFamily="34" charset="-122"/>
                 <a:cs typeface="Calibri" pitchFamily="34" charset="-120"/>
               </a:rPr>
-              <a:t>Solo cambia el tamaño de los puntos. ¿Útil, o promesa falsa?</a:t>
+              <a:t>Dos de siete dicen lo que los datos no sostienen.</a:t>
             </a:r>
             <a:endParaRPr lang="en-US" sz="1200" dirty="0"/>
           </a:p>
@@ -6144,7 +6902,7 @@
         <p:spPr>
           <a:xfrm>
             <a:off x="1481328" y="4425696"/>
-            <a:ext cx="4206240" cy="548640"/>
+            <a:ext cx="4389120" cy="548640"/>
           </a:xfrm>
           <a:prstGeom prst="rect">
             <a:avLst/>
@@ -6168,7 +6926,7 @@
                 <a:ea typeface="Calibri" pitchFamily="34" charset="-122"/>
                 <a:cs typeface="Calibri" pitchFamily="34" charset="-120"/>
               </a:rPr>
-              <a:t>¿Qué hacemos con Mets-Willets Point?</a:t>
+              <a:t>¿La capa de confiabilidad se lee?</a:t>
             </a:r>
             <a:endParaRPr lang="en-US" sz="1350" dirty="0"/>
           </a:p>
@@ -6182,8 +6940,8 @@
         </p:nvSpPr>
         <p:spPr>
           <a:xfrm>
-            <a:off x="5852160" y="4453128"/>
-            <a:ext cx="5303520" cy="548640"/>
+            <a:off x="6035040" y="4453128"/>
+            <a:ext cx="5120640" cy="548640"/>
           </a:xfrm>
           <a:prstGeom prst="rect">
             <a:avLst/>
@@ -6210,7 +6968,7 @@
                 <a:ea typeface="Calibri" pitchFamily="34" charset="-122"/>
                 <a:cs typeface="Calibri" pitchFamily="34" charset="-120"/>
               </a:rPr>
-              <a:t>287 % es ruido estacional y es el punto más llamativo del mapa. ¿Excluir, anotar o dejar?</a:t>
+              <a:t>37 estaciones con anillo punteado. ¿Aviso justo, o ruido? ¿Excluirlas por defecto?</a:t>
             </a:r>
             <a:endParaRPr lang="en-US" sz="1200" dirty="0"/>
           </a:p>
@@ -6289,7 +7047,7 @@
         <p:spPr>
           <a:xfrm>
             <a:off x="1481328" y="5212080"/>
-            <a:ext cx="4206240" cy="548640"/>
+            <a:ext cx="4389120" cy="548640"/>
           </a:xfrm>
           <a:prstGeom prst="rect">
             <a:avLst/>
@@ -6313,7 +7071,7 @@
                 <a:ea typeface="Calibri" pitchFamily="34" charset="-122"/>
                 <a:cs typeface="Calibri" pitchFamily="34" charset="-120"/>
               </a:rPr>
-              <a:t>¿El recorte de color en p10/p90 esconde algo?</a:t>
+              <a:t>¿Qué le falta para un periodista o un investigador?</a:t>
             </a:r>
             <a:endParaRPr lang="en-US" sz="1350" dirty="0"/>
           </a:p>
@@ -6327,8 +7085,8 @@
         </p:nvSpPr>
         <p:spPr>
           <a:xfrm>
-            <a:off x="5852160" y="5239512"/>
-            <a:ext cx="5303520" cy="548640"/>
+            <a:off x="6035040" y="5239512"/>
+            <a:ext cx="5120640" cy="548640"/>
           </a:xfrm>
           <a:prstGeom prst="rect">
             <a:avLst/>
@@ -6355,7 +7113,7 @@
                 <a:ea typeface="Calibri" pitchFamily="34" charset="-122"/>
                 <a:cs typeface="Calibri" pitchFamily="34" charset="-120"/>
               </a:rPr>
-              <a:t>Gana contraste en el centro y a cambio aplana los extremos.</a:t>
+              <a:t>Es la audiencia que declaramos. ¿Qué pregunta harían que no responde?</a:t>
             </a:r>
             <a:endParaRPr lang="en-US" sz="1200" dirty="0"/>
           </a:p>

--- a/deliveries/week10/PresentationWeek10.pptx
+++ b/deliveries/week10/PresentationWeek10.pptx
@@ -685,7 +685,7 @@
           <a:p>
             <a:r>
               <a:rPr lang="en-US" dirty="0"/>
-              <a:t>Demo en vivo: cargar la página, dejar que el pico se desdibuje, bajar con → al capítulo 2.</a:t>
+              <a:t>Demo en vivo: vista Perfiles, luego pestaña Recorrido y → hasta el capítulo 2.</a:t>
             </a:r>
             <a:endParaRPr lang="en-US" dirty="0"/>
           </a:p>
@@ -2278,7 +2278,7 @@
                 <a:ea typeface="Calibri" pitchFamily="34" charset="-122"/>
                 <a:cs typeface="Calibri" pitchFamily="34" charset="-120"/>
               </a:rPr>
-              <a:t>El prototipo: un argumento, no un dashboard</a:t>
+              <a:t>El prototipo: tres vistas, una selección</a:t>
             </a:r>
             <a:endParaRPr lang="en-US" sz="2400" dirty="0"/>
           </a:p>
@@ -2326,7 +2326,7 @@
       </p:sp>
       <p:pic>
         <p:nvPicPr>
-          <p:cNvPr id="6" name="Image 0" descr="/home/claude/w10v2/capturas/01-inicio.png">    </p:cNvPr>
+          <p:cNvPr id="6" name="Image 0" descr="/home/claude/w10v2/capturas/01-perfiles.png">    </p:cNvPr>
           <p:cNvPicPr>
             <a:picLocks noChangeAspect="1"/>
           </p:cNvPicPr>
@@ -2381,7 +2381,7 @@
                 <a:ea typeface="Calibri" pitchFamily="34" charset="-122"/>
                 <a:cs typeface="Calibri" pitchFamily="34" charset="-120"/>
               </a:rPr>
-              <a:t>SIETE CAPÍTULOS + UN EXPLORADOR</a:t>
+              <a:t>PERFILES · RECORRIDO · EXPLORADOR</a:t>
             </a:r>
             <a:endParaRPr lang="en-US" sz="1100" dirty="0"/>
           </a:p>
@@ -3036,7 +3036,7 @@
                 <a:ea typeface="Calibri" pitchFamily="34" charset="-122"/>
                 <a:cs typeface="Calibri" pitchFamily="34" charset="-120"/>
               </a:rPr>
-              <a:t>Cada capítulo: una pregunta, el hallazgo como frase, el gráfico, cómo se mide, qué no demuestra, y un botón al explorador ya configurado.</a:t>
+              <a:t>Perfiles es la vista base. Recorrido lleva los siete capítulos con Play. Explorador es libre. Un clic en un hallazgo abre su capítulo; cada capítulo abre el explorador ya configurado.</a:t>
             </a:r>
             <a:endParaRPr lang="en-US" sz="1150" dirty="0"/>
           </a:p>
@@ -3214,7 +3214,7 @@
       </p:sp>
       <p:pic>
         <p:nvPicPr>
-          <p:cNvPr id="6" name="Image 0" descr="/home/claude/w10v2/capturas/06-bronx.png">    </p:cNvPr>
+          <p:cNvPr id="6" name="Image 0" descr="/home/claude/w10v2/capturas/07-bronx.png">    </p:cNvPr>
           <p:cNvPicPr>
             <a:picLocks noChangeAspect="1"/>
           </p:cNvPicPr>
@@ -4312,7 +4312,7 @@
       </p:sp>
       <p:pic>
         <p:nvPicPr>
-          <p:cNvPr id="6" name="Image 0" descr="/home/claude/w10v2/capturas/10-explorador-panel.png">    </p:cNvPr>
+          <p:cNvPr id="6" name="Image 0" descr="/home/claude/w10v2/capturas/11-explorador-panel.png">    </p:cNvPr>
           <p:cNvPicPr>
             <a:picLocks noChangeAspect="1"/>
           </p:cNvPicPr>
@@ -6636,7 +6636,7 @@
                 <a:ea typeface="Calibri" pitchFamily="34" charset="-122"/>
                 <a:cs typeface="Calibri" pitchFamily="34" charset="-120"/>
               </a:rPr>
-              <a:t>¿Narrativa + explorador es la estructura correcta?</a:t>
+              <a:t>¿Tres vistas es la estructura correcta?</a:t>
             </a:r>
             <a:endParaRPr lang="en-US" sz="1350" dirty="0"/>
           </a:p>
@@ -6678,7 +6678,7 @@
                 <a:ea typeface="Calibri" pitchFamily="34" charset="-122"/>
                 <a:cs typeface="Calibri" pitchFamily="34" charset="-120"/>
               </a:rPr>
-              <a:t>La alternativa es un solo explorador con anotaciones. ¿La narrativa guía o estorba?</a:t>
+              <a:t>Perfiles, Recorrido, Explorador. ¿Sobra alguna? ¿El recorrido debería ser la entrada por defecto?</a:t>
             </a:r>
             <a:endParaRPr lang="en-US" sz="1200" dirty="0"/>
           </a:p>

--- a/deliveries/week10/PresentationWeek10.pptx
+++ b/deliveries/week10/PresentationWeek10.pptx
@@ -685,7 +685,7 @@
           <a:p>
             <a:r>
               <a:rPr lang="en-US" dirty="0"/>
-              <a:t>Demo en vivo: vista Perfiles, luego pestaña Recorrido y → hasta el capítulo 2.</a:t>
+              <a:t>Demo en vivo: Matriz, lente Qué cambió, luego pestaña Recorrido y → hasta el capítulo 2.</a:t>
             </a:r>
             <a:endParaRPr lang="en-US" dirty="0"/>
           </a:p>
@@ -2326,7 +2326,7 @@
       </p:sp>
       <p:pic>
         <p:nvPicPr>
-          <p:cNvPr id="6" name="Image 0" descr="/home/claude/w10v2/capturas/01-perfiles.png">    </p:cNvPr>
+          <p:cNvPr id="6" name="Image 0" descr="/home/claude/w10v2/capturas/02-matriz-cambio.png">    </p:cNvPr>
           <p:cNvPicPr>
             <a:picLocks noChangeAspect="1"/>
           </p:cNvPicPr>
@@ -2381,7 +2381,7 @@
                 <a:ea typeface="Calibri" pitchFamily="34" charset="-122"/>
                 <a:cs typeface="Calibri" pitchFamily="34" charset="-120"/>
               </a:rPr>
-              <a:t>PERFILES · RECORRIDO · EXPLORADOR</a:t>
+              <a:t>MATRIZ · RECORRIDO · EXPLORADOR</a:t>
             </a:r>
             <a:endParaRPr lang="en-US" sz="1100" dirty="0"/>
           </a:p>
@@ -2462,7 +2462,7 @@
         </p:nvSpPr>
         <p:spPr>
           <a:xfrm>
-            <a:off x="7772400" y="1865376"/>
+            <a:off x="7772400" y="1828800"/>
             <a:ext cx="320040" cy="320040"/>
           </a:xfrm>
           <a:prstGeom prst="rect">
@@ -2501,7 +2501,7 @@
         </p:nvSpPr>
         <p:spPr>
           <a:xfrm>
-            <a:off x="8092440" y="1865376"/>
+            <a:off x="8092440" y="1828800"/>
             <a:ext cx="3840480" cy="320040"/>
           </a:xfrm>
           <a:prstGeom prst="rect">
@@ -2540,7 +2540,7 @@
         </p:nvSpPr>
         <p:spPr>
           <a:xfrm>
-            <a:off x="7772400" y="2249424"/>
+            <a:off x="7772400" y="2176272"/>
             <a:ext cx="320040" cy="320040"/>
           </a:xfrm>
           <a:prstGeom prst="rect">
@@ -2579,7 +2579,7 @@
         </p:nvSpPr>
         <p:spPr>
           <a:xfrm>
-            <a:off x="8092440" y="2249424"/>
+            <a:off x="8092440" y="2176272"/>
             <a:ext cx="3840480" cy="320040"/>
           </a:xfrm>
           <a:prstGeom prst="rect">
@@ -2618,7 +2618,7 @@
         </p:nvSpPr>
         <p:spPr>
           <a:xfrm>
-            <a:off x="7772400" y="2633472"/>
+            <a:off x="7772400" y="2523744"/>
             <a:ext cx="320040" cy="320040"/>
           </a:xfrm>
           <a:prstGeom prst="rect">
@@ -2657,7 +2657,7 @@
         </p:nvSpPr>
         <p:spPr>
           <a:xfrm>
-            <a:off x="8092440" y="2633472"/>
+            <a:off x="8092440" y="2523744"/>
             <a:ext cx="3840480" cy="320040"/>
           </a:xfrm>
           <a:prstGeom prst="rect">
@@ -2682,6 +2682,84 @@
                 <a:ea typeface="Calibri" pitchFamily="34" charset="-122"/>
                 <a:cs typeface="Calibri" pitchFamily="34" charset="-120"/>
               </a:rPr>
+              <a:t>¿Qué días de la semana cambiaron?</a:t>
+            </a:r>
+            <a:endParaRPr lang="en-US" sz="1300" dirty="0"/>
+          </a:p>
+        </p:txBody>
+      </p:sp>
+      <p:sp>
+        <p:nvSpPr>
+          <p:cNvPr id="16" name="Text 13"/>
+          <p:cNvSpPr txBox="1"/>
+          <p:nvPr/>
+        </p:nvSpPr>
+        <p:spPr>
+          <a:xfrm>
+            <a:off x="7772400" y="2871216"/>
+            <a:ext cx="320040" cy="320040"/>
+          </a:xfrm>
+          <a:prstGeom prst="rect">
+            <a:avLst/>
+          </a:prstGeom>
+          <a:noFill/>
+          <a:ln/>
+        </p:spPr>
+        <p:txBody>
+          <a:bodyPr wrap="square" lIns="0" tIns="0" rIns="0" bIns="0" rtlCol="0" anchor="ctr"/>
+          <a:lstStyle/>
+          <a:p>
+            <a:pPr indent="0" marL="0">
+              <a:buNone/>
+            </a:pPr>
+            <a:r>
+              <a:rPr lang="en-US" sz="1300" b="1" dirty="0">
+                <a:solidFill>
+                  <a:srgbClr val="E07A16"/>
+                </a:solidFill>
+                <a:latin typeface="Calibri" pitchFamily="34" charset="0"/>
+                <a:ea typeface="Calibri" pitchFamily="34" charset="-122"/>
+                <a:cs typeface="Calibri" pitchFamily="34" charset="-120"/>
+              </a:rPr>
+              <a:t>4</a:t>
+            </a:r>
+            <a:endParaRPr lang="en-US" sz="1300" dirty="0"/>
+          </a:p>
+        </p:txBody>
+      </p:sp>
+      <p:sp>
+        <p:nvSpPr>
+          <p:cNvPr id="17" name="Text 14"/>
+          <p:cNvSpPr txBox="1"/>
+          <p:nvPr/>
+        </p:nvSpPr>
+        <p:spPr>
+          <a:xfrm>
+            <a:off x="8092440" y="2871216"/>
+            <a:ext cx="3840480" cy="320040"/>
+          </a:xfrm>
+          <a:prstGeom prst="rect">
+            <a:avLst/>
+          </a:prstGeom>
+          <a:noFill/>
+          <a:ln/>
+        </p:spPr>
+        <p:txBody>
+          <a:bodyPr wrap="square" lIns="0" tIns="0" rIns="0" bIns="0" rtlCol="0" anchor="ctr"/>
+          <a:lstStyle/>
+          <a:p>
+            <a:pPr indent="0" marL="0">
+              <a:buNone/>
+            </a:pPr>
+            <a:r>
+              <a:rPr lang="en-US" sz="1300" dirty="0">
+                <a:solidFill>
+                  <a:srgbClr val="1A1A1A"/>
+                </a:solidFill>
+                <a:latin typeface="Calibri" pitchFamily="34" charset="0"/>
+                <a:ea typeface="Calibri" pitchFamily="34" charset="-122"/>
+                <a:cs typeface="Calibri" pitchFamily="34" charset="-120"/>
+              </a:rPr>
               <a:t>¿Para qué se usa cada estación?</a:t>
             </a:r>
             <a:endParaRPr lang="en-US" sz="1300" dirty="0"/>
@@ -2690,13 +2768,13 @@
       </p:sp>
       <p:sp>
         <p:nvSpPr>
-          <p:cNvPr id="16" name="Text 13"/>
-          <p:cNvSpPr txBox="1"/>
-          <p:nvPr/>
-        </p:nvSpPr>
-        <p:spPr>
-          <a:xfrm>
-            <a:off x="7772400" y="3017520"/>
+          <p:cNvPr id="18" name="Text 15"/>
+          <p:cNvSpPr txBox="1"/>
+          <p:nvPr/>
+        </p:nvSpPr>
+        <p:spPr>
+          <a:xfrm>
+            <a:off x="7772400" y="3218688"/>
             <a:ext cx="320040" cy="320040"/>
           </a:xfrm>
           <a:prstGeom prst="rect">
@@ -2721,7 +2799,7 @@
                 <a:ea typeface="Calibri" pitchFamily="34" charset="-122"/>
                 <a:cs typeface="Calibri" pitchFamily="34" charset="-120"/>
               </a:rPr>
-              <a:t>4</a:t>
+              <a:t>5</a:t>
             </a:r>
             <a:endParaRPr lang="en-US" sz="1300" dirty="0"/>
           </a:p>
@@ -2729,13 +2807,13 @@
       </p:sp>
       <p:sp>
         <p:nvSpPr>
-          <p:cNvPr id="17" name="Text 14"/>
-          <p:cNvSpPr txBox="1"/>
-          <p:nvPr/>
-        </p:nvSpPr>
-        <p:spPr>
-          <a:xfrm>
-            <a:off x="8092440" y="3017520"/>
+          <p:cNvPr id="19" name="Text 16"/>
+          <p:cNvSpPr txBox="1"/>
+          <p:nvPr/>
+        </p:nvSpPr>
+        <p:spPr>
+          <a:xfrm>
+            <a:off x="8092440" y="3218688"/>
             <a:ext cx="3840480" cy="320040"/>
           </a:xfrm>
           <a:prstGeom prst="rect">
@@ -2768,13 +2846,13 @@
       </p:sp>
       <p:sp>
         <p:nvSpPr>
-          <p:cNvPr id="18" name="Text 15"/>
-          <p:cNvSpPr txBox="1"/>
-          <p:nvPr/>
-        </p:nvSpPr>
-        <p:spPr>
-          <a:xfrm>
-            <a:off x="7772400" y="3401568"/>
+          <p:cNvPr id="20" name="Text 17"/>
+          <p:cNvSpPr txBox="1"/>
+          <p:nvPr/>
+        </p:nvSpPr>
+        <p:spPr>
+          <a:xfrm>
+            <a:off x="7772400" y="3566160"/>
             <a:ext cx="320040" cy="320040"/>
           </a:xfrm>
           <a:prstGeom prst="rect">
@@ -2799,7 +2877,7 @@
                 <a:ea typeface="Calibri" pitchFamily="34" charset="-122"/>
                 <a:cs typeface="Calibri" pitchFamily="34" charset="-120"/>
               </a:rPr>
-              <a:t>5</a:t>
+              <a:t>6</a:t>
             </a:r>
             <a:endParaRPr lang="en-US" sz="1300" dirty="0"/>
           </a:p>
@@ -2807,13 +2885,13 @@
       </p:sp>
       <p:sp>
         <p:nvSpPr>
-          <p:cNvPr id="19" name="Text 16"/>
-          <p:cNvSpPr txBox="1"/>
-          <p:nvPr/>
-        </p:nvSpPr>
-        <p:spPr>
-          <a:xfrm>
-            <a:off x="8092440" y="3401568"/>
+          <p:cNvPr id="21" name="Text 18"/>
+          <p:cNvSpPr txBox="1"/>
+          <p:nvPr/>
+        </p:nvSpPr>
+        <p:spPr>
+          <a:xfrm>
+            <a:off x="8092440" y="3566160"/>
             <a:ext cx="3840480" cy="320040"/>
           </a:xfrm>
           <a:prstGeom prst="rect">
@@ -2846,13 +2924,13 @@
       </p:sp>
       <p:sp>
         <p:nvSpPr>
-          <p:cNvPr id="20" name="Text 17"/>
-          <p:cNvSpPr txBox="1"/>
-          <p:nvPr/>
-        </p:nvSpPr>
-        <p:spPr>
-          <a:xfrm>
-            <a:off x="7772400" y="3785616"/>
+          <p:cNvPr id="22" name="Text 19"/>
+          <p:cNvSpPr txBox="1"/>
+          <p:nvPr/>
+        </p:nvSpPr>
+        <p:spPr>
+          <a:xfrm>
+            <a:off x="7772400" y="3913632"/>
             <a:ext cx="320040" cy="320040"/>
           </a:xfrm>
           <a:prstGeom prst="rect">
@@ -2877,7 +2955,7 @@
                 <a:ea typeface="Calibri" pitchFamily="34" charset="-122"/>
                 <a:cs typeface="Calibri" pitchFamily="34" charset="-120"/>
               </a:rPr>
-              <a:t>6</a:t>
+              <a:t>7</a:t>
             </a:r>
             <a:endParaRPr lang="en-US" sz="1300" dirty="0"/>
           </a:p>
@@ -2885,13 +2963,13 @@
       </p:sp>
       <p:sp>
         <p:nvSpPr>
-          <p:cNvPr id="21" name="Text 18"/>
-          <p:cNvSpPr txBox="1"/>
-          <p:nvPr/>
-        </p:nvSpPr>
-        <p:spPr>
-          <a:xfrm>
-            <a:off x="8092440" y="3785616"/>
+          <p:cNvPr id="23" name="Text 20"/>
+          <p:cNvSpPr txBox="1"/>
+          <p:nvPr/>
+        </p:nvSpPr>
+        <p:spPr>
+          <a:xfrm>
+            <a:off x="8092440" y="3913632"/>
             <a:ext cx="3840480" cy="320040"/>
           </a:xfrm>
           <a:prstGeom prst="rect">
@@ -2924,13 +3002,13 @@
       </p:sp>
       <p:sp>
         <p:nvSpPr>
-          <p:cNvPr id="22" name="Text 19"/>
-          <p:cNvSpPr txBox="1"/>
-          <p:nvPr/>
-        </p:nvSpPr>
-        <p:spPr>
-          <a:xfrm>
-            <a:off x="7772400" y="4169664"/>
+          <p:cNvPr id="24" name="Text 21"/>
+          <p:cNvSpPr txBox="1"/>
+          <p:nvPr/>
+        </p:nvSpPr>
+        <p:spPr>
+          <a:xfrm>
+            <a:off x="7772400" y="4261104"/>
             <a:ext cx="320040" cy="320040"/>
           </a:xfrm>
           <a:prstGeom prst="rect">
@@ -2955,7 +3033,7 @@
                 <a:ea typeface="Calibri" pitchFamily="34" charset="-122"/>
                 <a:cs typeface="Calibri" pitchFamily="34" charset="-120"/>
               </a:rPr>
-              <a:t>7</a:t>
+              <a:t>8</a:t>
             </a:r>
             <a:endParaRPr lang="en-US" sz="1300" dirty="0"/>
           </a:p>
@@ -2963,13 +3041,13 @@
       </p:sp>
       <p:sp>
         <p:nvSpPr>
-          <p:cNvPr id="23" name="Text 20"/>
-          <p:cNvSpPr txBox="1"/>
-          <p:nvPr/>
-        </p:nvSpPr>
-        <p:spPr>
-          <a:xfrm>
-            <a:off x="8092440" y="4169664"/>
+          <p:cNvPr id="25" name="Text 22"/>
+          <p:cNvSpPr txBox="1"/>
+          <p:nvPr/>
+        </p:nvSpPr>
+        <p:spPr>
+          <a:xfrm>
+            <a:off x="8092440" y="4261104"/>
             <a:ext cx="3840480" cy="320040"/>
           </a:xfrm>
           <a:prstGeom prst="rect">
@@ -3002,7 +3080,7 @@
       </p:sp>
       <p:sp>
         <p:nvSpPr>
-          <p:cNvPr id="24" name="Text 21"/>
+          <p:cNvPr id="26" name="Text 23"/>
           <p:cNvSpPr txBox="1"/>
           <p:nvPr/>
         </p:nvSpPr>
@@ -3036,7 +3114,7 @@
                 <a:ea typeface="Calibri" pitchFamily="34" charset="-122"/>
                 <a:cs typeface="Calibri" pitchFamily="34" charset="-120"/>
               </a:rPr>
-              <a:t>Perfiles es la vista base. Recorrido lleva los siete capítulos con Play. Explorador es libre. Un clic en un hallazgo abre su capítulo; cada capítulo abre el explorador ya configurado.</a:t>
+              <a:t>Matriz es la vista base: 428 estaciones × 168 horas, tres lentes. Recorrido lleva los ocho capítulos con Play. Explorador es libre. Una sola selección en las tres.</a:t>
             </a:r>
             <a:endParaRPr lang="en-US" sz="1150" dirty="0"/>
           </a:p>
@@ -3044,7 +3122,7 @@
       </p:sp>
       <p:sp>
         <p:nvSpPr>
-          <p:cNvPr id="25" name="Text 22"/>
+          <p:cNvPr id="27" name="Text 24"/>
           <p:cNvSpPr txBox="1"/>
           <p:nvPr/>
         </p:nvSpPr>
@@ -3214,7 +3292,7 @@
       </p:sp>
       <p:pic>
         <p:nvPicPr>
-          <p:cNvPr id="6" name="Image 0" descr="/home/claude/w10v2/capturas/07-bronx.png">    </p:cNvPr>
+          <p:cNvPr id="6" name="Image 0" descr="/home/claude/w10v2/capturas/10-bronx.png">    </p:cNvPr>
           <p:cNvPicPr>
             <a:picLocks noChangeAspect="1"/>
           </p:cNvPicPr>
@@ -4312,7 +4390,7 @@
       </p:sp>
       <p:pic>
         <p:nvPicPr>
-          <p:cNvPr id="6" name="Image 0" descr="/home/claude/w10v2/capturas/11-explorador-panel.png">    </p:cNvPr>
+          <p:cNvPr id="6" name="Image 0" descr="/home/claude/w10v2/capturas/14-explorador-panel.png">    </p:cNvPr>
           <p:cNvPicPr>
             <a:picLocks noChangeAspect="1"/>
           </p:cNvPicPr>
@@ -6678,7 +6756,7 @@
                 <a:ea typeface="Calibri" pitchFamily="34" charset="-122"/>
                 <a:cs typeface="Calibri" pitchFamily="34" charset="-120"/>
               </a:rPr>
-              <a:t>Perfiles, Recorrido, Explorador. ¿Sobra alguna? ¿El recorrido debería ser la entrada por defecto?</a:t>
+              <a:t>Matriz, Recorrido, Explorador. ¿Sobra alguna? ¿La matriz es la entrada correcta?</a:t>
             </a:r>
             <a:endParaRPr lang="en-US" sz="1200" dirty="0"/>
           </a:p>
@@ -6823,7 +6901,7 @@
                 <a:ea typeface="Calibri" pitchFamily="34" charset="-122"/>
                 <a:cs typeface="Calibri" pitchFamily="34" charset="-120"/>
               </a:rPr>
-              <a:t>Dos de siete dicen lo que los datos no sostienen.</a:t>
+              <a:t>Dos de ocho dicen lo que los datos no sostienen.</a:t>
             </a:r>
             <a:endParaRPr lang="en-US" sz="1200" dirty="0"/>
           </a:p>

--- a/deliveries/week10/PresentationWeek10.pptx
+++ b/deliveries/week10/PresentationWeek10.pptx
@@ -861,7 +861,7 @@
           <a:p>
             <a:r>
               <a:rPr lang="en-US" dirty="0"/>
-              <a:t>Demo en vivo: clic en Parkchester o Yankee Stadium. Mostrar el aviso de estacionalidad.</a:t>
+              <a:t>Demo en vivo: en el mapa, clic en Yankee Stadium. Mostrar el aviso de estacionalidad.</a:t>
             </a:r>
             <a:endParaRPr lang="en-US" dirty="0"/>
           </a:p>
@@ -2381,7 +2381,7 @@
                 <a:ea typeface="Calibri" pitchFamily="34" charset="-122"/>
                 <a:cs typeface="Calibri" pitchFamily="34" charset="-120"/>
               </a:rPr>
-              <a:t>MATRIZ · RECORRIDO · EXPLORADOR</a:t>
+              <a:t>MATRIZ · RECORRIDO · MAPA</a:t>
             </a:r>
             <a:endParaRPr lang="en-US" sz="1100" dirty="0"/>
           </a:p>
@@ -2838,7 +2838,7 @@
                 <a:ea typeface="Calibri" pitchFamily="34" charset="-122"/>
                 <a:cs typeface="Calibri" pitchFamily="34" charset="-120"/>
               </a:rPr>
-              <a:t>¿Qué cambió más: cuánto o cómo?</a:t>
+              <a:t>¿Por qué el Bronx?</a:t>
             </a:r>
             <a:endParaRPr lang="en-US" sz="1300" dirty="0"/>
           </a:p>
@@ -2916,7 +2916,7 @@
                 <a:ea typeface="Calibri" pitchFamily="34" charset="-122"/>
                 <a:cs typeface="Calibri" pitchFamily="34" charset="-120"/>
               </a:rPr>
-              <a:t>¿Por qué el Bronx?</a:t>
+              <a:t>¿Quién dejó de comprar el abono?</a:t>
             </a:r>
             <a:endParaRPr lang="en-US" sz="1300" dirty="0"/>
           </a:p>
@@ -2994,7 +2994,7 @@
                 <a:ea typeface="Calibri" pitchFamily="34" charset="-122"/>
                 <a:cs typeface="Calibri" pitchFamily="34" charset="-120"/>
               </a:rPr>
-              <a:t>¿Quién dejó de comprar el abono?</a:t>
+              <a:t>¿Qué no podemos afirmar?</a:t>
             </a:r>
             <a:endParaRPr lang="en-US" sz="1300" dirty="0"/>
           </a:p>
@@ -3003,84 +3003,6 @@
       <p:sp>
         <p:nvSpPr>
           <p:cNvPr id="24" name="Text 21"/>
-          <p:cNvSpPr txBox="1"/>
-          <p:nvPr/>
-        </p:nvSpPr>
-        <p:spPr>
-          <a:xfrm>
-            <a:off x="7772400" y="4261104"/>
-            <a:ext cx="320040" cy="320040"/>
-          </a:xfrm>
-          <a:prstGeom prst="rect">
-            <a:avLst/>
-          </a:prstGeom>
-          <a:noFill/>
-          <a:ln/>
-        </p:spPr>
-        <p:txBody>
-          <a:bodyPr wrap="square" lIns="0" tIns="0" rIns="0" bIns="0" rtlCol="0" anchor="ctr"/>
-          <a:lstStyle/>
-          <a:p>
-            <a:pPr indent="0" marL="0">
-              <a:buNone/>
-            </a:pPr>
-            <a:r>
-              <a:rPr lang="en-US" sz="1300" b="1" dirty="0">
-                <a:solidFill>
-                  <a:srgbClr val="E07A16"/>
-                </a:solidFill>
-                <a:latin typeface="Calibri" pitchFamily="34" charset="0"/>
-                <a:ea typeface="Calibri" pitchFamily="34" charset="-122"/>
-                <a:cs typeface="Calibri" pitchFamily="34" charset="-120"/>
-              </a:rPr>
-              <a:t>8</a:t>
-            </a:r>
-            <a:endParaRPr lang="en-US" sz="1300" dirty="0"/>
-          </a:p>
-        </p:txBody>
-      </p:sp>
-      <p:sp>
-        <p:nvSpPr>
-          <p:cNvPr id="25" name="Text 22"/>
-          <p:cNvSpPr txBox="1"/>
-          <p:nvPr/>
-        </p:nvSpPr>
-        <p:spPr>
-          <a:xfrm>
-            <a:off x="8092440" y="4261104"/>
-            <a:ext cx="3840480" cy="320040"/>
-          </a:xfrm>
-          <a:prstGeom prst="rect">
-            <a:avLst/>
-          </a:prstGeom>
-          <a:noFill/>
-          <a:ln/>
-        </p:spPr>
-        <p:txBody>
-          <a:bodyPr wrap="square" lIns="0" tIns="0" rIns="0" bIns="0" rtlCol="0" anchor="ctr"/>
-          <a:lstStyle/>
-          <a:p>
-            <a:pPr indent="0" marL="0">
-              <a:buNone/>
-            </a:pPr>
-            <a:r>
-              <a:rPr lang="en-US" sz="1300" dirty="0">
-                <a:solidFill>
-                  <a:srgbClr val="1A1A1A"/>
-                </a:solidFill>
-                <a:latin typeface="Calibri" pitchFamily="34" charset="0"/>
-                <a:ea typeface="Calibri" pitchFamily="34" charset="-122"/>
-                <a:cs typeface="Calibri" pitchFamily="34" charset="-120"/>
-              </a:rPr>
-              <a:t>¿Qué no podemos afirmar?</a:t>
-            </a:r>
-            <a:endParaRPr lang="en-US" sz="1300" dirty="0"/>
-          </a:p>
-        </p:txBody>
-      </p:sp>
-      <p:sp>
-        <p:nvSpPr>
-          <p:cNvPr id="26" name="Text 23"/>
           <p:cNvSpPr txBox="1"/>
           <p:nvPr/>
         </p:nvSpPr>
@@ -3114,7 +3036,7 @@
                 <a:ea typeface="Calibri" pitchFamily="34" charset="-122"/>
                 <a:cs typeface="Calibri" pitchFamily="34" charset="-120"/>
               </a:rPr>
-              <a:t>Matriz es la vista base: 428 estaciones × 168 horas, tres lentes. Recorrido lleva los ocho capítulos con Play. Explorador es libre. Una sola selección en las tres.</a:t>
+              <a:t>Matriz es la vista base: 428 estaciones × 168 horas, tres lentes. Recorrido lleva siete capítulos con Play; cada uno es un gráfico a pantalla completa. Mapa: cinco lentes, cada estación como un reloj. Una sola selección en las tres.</a:t>
             </a:r>
             <a:endParaRPr lang="en-US" sz="1150" dirty="0"/>
           </a:p>
@@ -3122,7 +3044,7 @@
       </p:sp>
       <p:sp>
         <p:nvSpPr>
-          <p:cNvPr id="27" name="Text 24"/>
+          <p:cNvPr id="25" name="Text 22"/>
           <p:cNvSpPr txBox="1"/>
           <p:nvPr/>
         </p:nvSpPr>
@@ -3292,7 +3214,7 @@
       </p:sp>
       <p:pic>
         <p:nvPicPr>
-          <p:cNvPr id="6" name="Image 0" descr="/home/claude/w10v2/capturas/10-bronx.png">    </p:cNvPr>
+          <p:cNvPr id="6" name="Image 0" descr="/home/claude/w10v2/capturas/09-bronx.png">    </p:cNvPr>
           <p:cNvPicPr>
             <a:picLocks noChangeAspect="1"/>
           </p:cNvPicPr>
@@ -4390,7 +4312,7 @@
       </p:sp>
       <p:pic>
         <p:nvPicPr>
-          <p:cNvPr id="6" name="Image 0" descr="/home/claude/w10v2/capturas/14-explorador-panel.png">    </p:cNvPr>
+          <p:cNvPr id="6" name="Image 0" descr="/home/claude/w10v2/capturas/13-mapa-panel.png">    </p:cNvPr>
           <p:cNvPicPr>
             <a:picLocks noChangeAspect="1"/>
           </p:cNvPicPr>
@@ -6756,7 +6678,7 @@
                 <a:ea typeface="Calibri" pitchFamily="34" charset="-122"/>
                 <a:cs typeface="Calibri" pitchFamily="34" charset="-120"/>
               </a:rPr>
-              <a:t>Matriz, Recorrido, Explorador. ¿Sobra alguna? ¿La matriz es la entrada correcta?</a:t>
+              <a:t>Matriz, Recorrido, Mapa. ¿Sobra alguna? ¿La matriz es la entrada correcta?</a:t>
             </a:r>
             <a:endParaRPr lang="en-US" sz="1200" dirty="0"/>
           </a:p>

--- a/deliveries/week10/PresentationWeek10.pptx
+++ b/deliveries/week10/PresentationWeek10.pptx
@@ -2148,7 +2148,7 @@
                 <a:ea typeface="Calibri" pitchFamily="34" charset="-122"/>
                 <a:cs typeface="Calibri" pitchFamily="34" charset="-120"/>
               </a:rPr>
-              <a:t>428 estaciones · 60 meses · 120 855 568 registros</a:t>
+              <a:t>428 estaciones · 60 meses · 168 horas por estación</a:t>
             </a:r>
             <a:endParaRPr lang="en-US" sz="1500" dirty="0"/>
           </a:p>
@@ -2187,7 +2187,7 @@
                 <a:ea typeface="Calibri" pitchFamily="34" charset="-122"/>
                 <a:cs typeface="Calibri" pitchFamily="34" charset="-120"/>
               </a:rPr>
-              <a:t>Agregados del lado del servidor con la API SODA. El navegador carga 1.6 MB.</a:t>
+              <a:t>Agregados del lado del servidor con la API SODA; el dataset crudo nunca se descarga. El navegador carga 1.6 MB.</a:t>
             </a:r>
             <a:endParaRPr lang="en-US" sz="1150" dirty="0"/>
           </a:p>

--- a/deliveries/week10/PresentationWeek10.pptx
+++ b/deliveries/week10/PresentationWeek10.pptx
@@ -2148,7 +2148,7 @@
                 <a:ea typeface="Calibri" pitchFamily="34" charset="-122"/>
                 <a:cs typeface="Calibri" pitchFamily="34" charset="-120"/>
               </a:rPr>
-              <a:t>428 estaciones · 60 meses · 120 855 568 registros</a:t>
+              <a:t>428 estaciones · 60 meses · 168 horas por estación</a:t>
             </a:r>
             <a:endParaRPr lang="en-US" sz="1600" dirty="0"/>
           </a:p>

--- a/deliveries/week10/PresentationWeek10.pptx
+++ b/deliveries/week10/PresentationWeek10.pptx
@@ -1610,7 +1610,7 @@
                 <a:ea typeface="Calibri" pitchFamily="34" charset="-122"/>
                 <a:cs typeface="Calibri" pitchFamily="34" charset="-120"/>
               </a:rPr>
-              <a:t>La forma del día · cómo cambió el ritmo horario del metro de Nueva York, 2020–2024</a:t>
+              <a:t>Fractal · cómo cambió el ritmo horario del metro de Nueva York, 2020–2024</a:t>
             </a:r>
             <a:endParaRPr lang="en-US" sz="1700" dirty="0"/>
           </a:p>

--- a/deliveries/week10/PresentationWeek10.pptx
+++ b/deliveries/week10/PresentationWeek10.pptx
@@ -1610,7 +1610,7 @@
                 <a:ea typeface="Calibri" pitchFamily="34" charset="-122"/>
                 <a:cs typeface="Calibri" pitchFamily="34" charset="-120"/>
               </a:rPr>
-              <a:t>Fractal · cómo cambió el ritmo horario del metro de Nueva York, 2020–2024</a:t>
+              <a:t>La forma del día · cómo cambió el ritmo horario del metro de Nueva York, 2020–2024</a:t>
             </a:r>
             <a:endParaRPr lang="en-US" sz="1700" dirty="0"/>
           </a:p>
